--- a/docs/presentation/HGE_Gold_Forecasting_presentation_15_20min.pptx
+++ b/docs/presentation/HGE_Gold_Forecasting_presentation_15_20min.pptx
@@ -151,22 +151,22 @@
           <a:p>
             <a:pPr algn="r" rtl="1" marL="0" indent="0">
               <a:defRPr lang="fa-IR" sz="1000" b="0">
-                <a:latin typeface="B Nazanin"/>
-                <a:ea typeface="B Nazanin"/>
-                <a:cs typeface="B Nazanin"/>
                 <a:solidFill>
                   <a:srgbClr val="AAB4C8"/>
                 </a:solidFill>
+                <a:latin typeface="B Nazanin"/>
+                <a:ea typeface="B Nazanin"/>
+                <a:cs typeface="B Nazanin"/>
               </a:defRPr>
             </a:pPr>
             <a:r>
               <a:rPr lang="fa-IR" sz="1000" b="0">
-                <a:latin typeface="B Nazanin"/>
-                <a:ea typeface="B Nazanin"/>
-                <a:cs typeface="B Nazanin"/>
                 <a:solidFill>
                   <a:srgbClr val="AAB4C8"/>
                 </a:solidFill>
+                <a:latin typeface="B Nazanin"/>
+                <a:ea typeface="B Nazanin"/>
+                <a:cs typeface="B Nazanin"/>
               </a:rPr>
               <a:t>ارائه پژوهش | اسلاید 1 | B Nazanin</a:t>
             </a:r>
@@ -247,22 +247,22 @@
           <a:p>
             <a:pPr algn="r" rtl="1" marL="0" indent="0">
               <a:defRPr lang="fa-IR" sz="3100" b="1">
-                <a:latin typeface="B Nazanin"/>
-                <a:ea typeface="B Nazanin"/>
-                <a:cs typeface="B Nazanin"/>
-                <a:solidFill>
-                  <a:srgbClr val="F4F6FB"/>
-                </a:solidFill>
+                <a:solidFill>
+                  <a:srgbClr val="F4F6FB"/>
+                </a:solidFill>
+                <a:latin typeface="B Nazanin"/>
+                <a:ea typeface="B Nazanin"/>
+                <a:cs typeface="B Nazanin"/>
               </a:defRPr>
             </a:pPr>
             <a:r>
               <a:rPr lang="fa-IR" sz="3100" b="1">
-                <a:latin typeface="B Nazanin"/>
-                <a:ea typeface="B Nazanin"/>
-                <a:cs typeface="B Nazanin"/>
-                <a:solidFill>
-                  <a:srgbClr val="F4F6FB"/>
-                </a:solidFill>
+                <a:solidFill>
+                  <a:srgbClr val="F4F6FB"/>
+                </a:solidFill>
+                <a:latin typeface="B Nazanin"/>
+                <a:ea typeface="B Nazanin"/>
+                <a:cs typeface="B Nazanin"/>
               </a:rPr>
               <a:t>پیش‌بینی چندافقی جهت قیمت طلا</a:t>
             </a:r>
@@ -275,22 +275,22 @@
           <a:p>
             <a:pPr algn="r" rtl="1" marL="0" indent="0">
               <a:defRPr lang="fa-IR" sz="3100" b="1">
-                <a:latin typeface="B Nazanin"/>
-                <a:ea typeface="B Nazanin"/>
-                <a:cs typeface="B Nazanin"/>
-                <a:solidFill>
-                  <a:srgbClr val="F4F6FB"/>
-                </a:solidFill>
+                <a:solidFill>
+                  <a:srgbClr val="F4F6FB"/>
+                </a:solidFill>
+                <a:latin typeface="B Nazanin"/>
+                <a:ea typeface="B Nazanin"/>
+                <a:cs typeface="B Nazanin"/>
               </a:defRPr>
             </a:pPr>
             <a:r>
               <a:rPr lang="fa-IR" sz="3100" b="1">
-                <a:latin typeface="B Nazanin"/>
-                <a:ea typeface="B Nazanin"/>
-                <a:cs typeface="B Nazanin"/>
-                <a:solidFill>
-                  <a:srgbClr val="F4F6FB"/>
-                </a:solidFill>
+                <a:solidFill>
+                  <a:srgbClr val="F4F6FB"/>
+                </a:solidFill>
+                <a:latin typeface="B Nazanin"/>
+                <a:ea typeface="B Nazanin"/>
+                <a:cs typeface="B Nazanin"/>
               </a:rPr>
               <a:t>با چارچوب ترکیبی مبتنی بر نمای هرست</a:t>
             </a:r>
@@ -349,22 +349,22 @@
           <a:p>
             <a:pPr algn="r" rtl="1" marL="0" indent="0">
               <a:defRPr lang="fa-IR" sz="2000" b="0">
-                <a:latin typeface="B Nazanin"/>
-                <a:ea typeface="B Nazanin"/>
-                <a:cs typeface="B Nazanin"/>
                 <a:solidFill>
                   <a:srgbClr val="21C4B1"/>
                 </a:solidFill>
+                <a:latin typeface="B Nazanin"/>
+                <a:ea typeface="B Nazanin"/>
+                <a:cs typeface="B Nazanin"/>
               </a:defRPr>
             </a:pPr>
             <a:r>
               <a:rPr lang="fa-IR" sz="2000" b="0">
-                <a:latin typeface="B Nazanin"/>
-                <a:ea typeface="B Nazanin"/>
-                <a:cs typeface="B Nazanin"/>
                 <a:solidFill>
                   <a:srgbClr val="21C4B1"/>
                 </a:solidFill>
+                <a:latin typeface="B Nazanin"/>
+                <a:ea typeface="B Nazanin"/>
+                <a:cs typeface="B Nazanin"/>
               </a:rPr>
               <a:t>روش پیشنهادی، آزمون حذف مؤلفه و ارزیابی قابل ممیزی</a:t>
             </a:r>
@@ -401,22 +401,22 @@
           <a:p>
             <a:pPr algn="r" rtl="1" marL="0" indent="0">
               <a:defRPr lang="fa-IR" sz="1600" b="0">
-                <a:latin typeface="B Nazanin"/>
-                <a:ea typeface="B Nazanin"/>
-                <a:cs typeface="B Nazanin"/>
                 <a:solidFill>
                   <a:srgbClr val="AAB4C8"/>
                 </a:solidFill>
+                <a:latin typeface="B Nazanin"/>
+                <a:ea typeface="B Nazanin"/>
+                <a:cs typeface="B Nazanin"/>
               </a:defRPr>
             </a:pPr>
             <a:r>
               <a:rPr lang="fa-IR" sz="1600" b="0">
-                <a:latin typeface="B Nazanin"/>
-                <a:ea typeface="B Nazanin"/>
-                <a:cs typeface="B Nazanin"/>
                 <a:solidFill>
                   <a:srgbClr val="AAB4C8"/>
                 </a:solidFill>
+                <a:latin typeface="B Nazanin"/>
+                <a:ea typeface="B Nazanin"/>
+                <a:cs typeface="B Nazanin"/>
               </a:rPr>
               <a:t>موضوع: XAUUSD | افق‌های ۱، ۵، ۱۰ و ۲۰ روزه</a:t>
             </a:r>
@@ -429,22 +429,22 @@
           <a:p>
             <a:pPr algn="r" rtl="1" marL="0" indent="0">
               <a:defRPr lang="fa-IR" sz="1600" b="0">
-                <a:latin typeface="B Nazanin"/>
-                <a:ea typeface="B Nazanin"/>
-                <a:cs typeface="B Nazanin"/>
                 <a:solidFill>
                   <a:srgbClr val="AAB4C8"/>
                 </a:solidFill>
+                <a:latin typeface="B Nazanin"/>
+                <a:ea typeface="B Nazanin"/>
+                <a:cs typeface="B Nazanin"/>
               </a:defRPr>
             </a:pPr>
             <a:r>
               <a:rPr lang="fa-IR" sz="1600" b="0">
-                <a:latin typeface="B Nazanin"/>
-                <a:ea typeface="B Nazanin"/>
-                <a:cs typeface="B Nazanin"/>
                 <a:solidFill>
                   <a:srgbClr val="AAB4C8"/>
                 </a:solidFill>
+                <a:latin typeface="B Nazanin"/>
+                <a:ea typeface="B Nazanin"/>
+                <a:cs typeface="B Nazanin"/>
               </a:rPr>
               <a:t>ارائه پژوهش — زمان کل: حدود ۱۷ تا ۱۸ دقیقه</a:t>
             </a:r>
@@ -481,22 +481,22 @@
           <a:p>
             <a:pPr algn="r" rtl="1" marL="0" indent="0">
               <a:defRPr lang="fa-IR" sz="1100" b="0">
-                <a:latin typeface="B Nazanin"/>
-                <a:ea typeface="B Nazanin"/>
-                <a:cs typeface="B Nazanin"/>
                 <a:solidFill>
                   <a:srgbClr val="AAB4C8"/>
                 </a:solidFill>
+                <a:latin typeface="B Nazanin"/>
+                <a:ea typeface="B Nazanin"/>
+                <a:cs typeface="B Nazanin"/>
               </a:defRPr>
             </a:pPr>
             <a:r>
               <a:rPr lang="fa-IR" sz="1100" b="0">
-                <a:latin typeface="B Nazanin"/>
-                <a:ea typeface="B Nazanin"/>
-                <a:cs typeface="B Nazanin"/>
                 <a:solidFill>
                   <a:srgbClr val="AAB4C8"/>
                 </a:solidFill>
+                <a:latin typeface="B Nazanin"/>
+                <a:ea typeface="B Nazanin"/>
+                <a:cs typeface="B Nazanin"/>
               </a:rPr>
               <a:t>B Nazanin 14 | نسخه ارائه بر اساس پایان‌نامه نهایی</a:t>
             </a:r>
@@ -566,22 +566,22 @@
           <a:p>
             <a:pPr algn="r" rtl="1" marL="0" indent="0">
               <a:defRPr lang="fa-IR" sz="2700" b="1">
-                <a:latin typeface="B Nazanin"/>
-                <a:ea typeface="B Nazanin"/>
-                <a:cs typeface="B Nazanin"/>
-                <a:solidFill>
-                  <a:srgbClr val="F4F6FB"/>
-                </a:solidFill>
+                <a:solidFill>
+                  <a:srgbClr val="F4F6FB"/>
+                </a:solidFill>
+                <a:latin typeface="B Nazanin"/>
+                <a:ea typeface="B Nazanin"/>
+                <a:cs typeface="B Nazanin"/>
               </a:defRPr>
             </a:pPr>
             <a:r>
               <a:rPr lang="fa-IR" sz="2700" b="1">
-                <a:latin typeface="B Nazanin"/>
-                <a:ea typeface="B Nazanin"/>
-                <a:cs typeface="B Nazanin"/>
-                <a:solidFill>
-                  <a:srgbClr val="F4F6FB"/>
-                </a:solidFill>
+                <a:solidFill>
+                  <a:srgbClr val="F4F6FB"/>
+                </a:solidFill>
+                <a:latin typeface="B Nazanin"/>
+                <a:ea typeface="B Nazanin"/>
+                <a:cs typeface="B Nazanin"/>
               </a:rPr>
               <a:t>۹. مدل‌های پایه و فراطبقه‌بند</a:t>
             </a:r>
@@ -640,22 +640,22 @@
           <a:p>
             <a:pPr algn="r" rtl="1" marL="0" indent="0">
               <a:defRPr lang="fa-IR" sz="1000" b="0">
-                <a:latin typeface="B Nazanin"/>
-                <a:ea typeface="B Nazanin"/>
-                <a:cs typeface="B Nazanin"/>
                 <a:solidFill>
                   <a:srgbClr val="AAB4C8"/>
                 </a:solidFill>
+                <a:latin typeface="B Nazanin"/>
+                <a:ea typeface="B Nazanin"/>
+                <a:cs typeface="B Nazanin"/>
               </a:defRPr>
             </a:pPr>
             <a:r>
               <a:rPr lang="fa-IR" sz="1000" b="0">
-                <a:latin typeface="B Nazanin"/>
-                <a:ea typeface="B Nazanin"/>
-                <a:cs typeface="B Nazanin"/>
                 <a:solidFill>
                   <a:srgbClr val="AAB4C8"/>
                 </a:solidFill>
+                <a:latin typeface="B Nazanin"/>
+                <a:ea typeface="B Nazanin"/>
+                <a:cs typeface="B Nazanin"/>
               </a:rPr>
               <a:t>ارائه پژوهش | اسلاید 10 | B Nazanin</a:t>
             </a:r>
@@ -714,22 +714,22 @@
           <a:p>
             <a:pPr algn="r" rtl="1" marL="0" indent="0">
               <a:defRPr lang="fa-IR" sz="2100" b="1">
-                <a:latin typeface="B Nazanin"/>
-                <a:ea typeface="B Nazanin"/>
-                <a:cs typeface="B Nazanin"/>
                 <a:solidFill>
                   <a:srgbClr val="E0B24A"/>
                 </a:solidFill>
+                <a:latin typeface="B Nazanin"/>
+                <a:ea typeface="B Nazanin"/>
+                <a:cs typeface="B Nazanin"/>
               </a:defRPr>
             </a:pPr>
             <a:r>
               <a:rPr lang="fa-IR" sz="2100" b="1">
-                <a:latin typeface="B Nazanin"/>
-                <a:ea typeface="B Nazanin"/>
-                <a:cs typeface="B Nazanin"/>
                 <a:solidFill>
                   <a:srgbClr val="E0B24A"/>
                 </a:solidFill>
+                <a:latin typeface="B Nazanin"/>
+                <a:ea typeface="B Nazanin"/>
+                <a:cs typeface="B Nazanin"/>
               </a:rPr>
               <a:t>مدل‌های پایه</a:t>
             </a:r>
@@ -766,22 +766,22 @@
           <a:p>
             <a:pPr algn="r" rtl="1" marL="0" indent="0">
               <a:defRPr lang="fa-IR" sz="1700" b="0">
-                <a:latin typeface="B Nazanin"/>
-                <a:ea typeface="B Nazanin"/>
-                <a:cs typeface="B Nazanin"/>
-                <a:solidFill>
-                  <a:srgbClr val="F4F6FB"/>
-                </a:solidFill>
+                <a:solidFill>
+                  <a:srgbClr val="F4F6FB"/>
+                </a:solidFill>
+                <a:latin typeface="B Nazanin"/>
+                <a:ea typeface="B Nazanin"/>
+                <a:cs typeface="B Nazanin"/>
               </a:defRPr>
             </a:pPr>
             <a:r>
               <a:rPr lang="fa-IR" sz="1700" b="0">
-                <a:latin typeface="B Nazanin"/>
-                <a:ea typeface="B Nazanin"/>
-                <a:cs typeface="B Nazanin"/>
-                <a:solidFill>
-                  <a:srgbClr val="F4F6FB"/>
-                </a:solidFill>
+                <a:solidFill>
+                  <a:srgbClr val="F4F6FB"/>
+                </a:solidFill>
+                <a:latin typeface="B Nazanin"/>
+                <a:ea typeface="B Nazanin"/>
+                <a:cs typeface="B Nazanin"/>
               </a:rPr>
               <a:t>• Logistic Regression</a:t>
             </a:r>
@@ -794,22 +794,22 @@
           <a:p>
             <a:pPr algn="r" rtl="1" marL="0" indent="0">
               <a:defRPr lang="fa-IR" sz="1700" b="0">
-                <a:latin typeface="B Nazanin"/>
-                <a:ea typeface="B Nazanin"/>
-                <a:cs typeface="B Nazanin"/>
-                <a:solidFill>
-                  <a:srgbClr val="F4F6FB"/>
-                </a:solidFill>
+                <a:solidFill>
+                  <a:srgbClr val="F4F6FB"/>
+                </a:solidFill>
+                <a:latin typeface="B Nazanin"/>
+                <a:ea typeface="B Nazanin"/>
+                <a:cs typeface="B Nazanin"/>
               </a:defRPr>
             </a:pPr>
             <a:r>
               <a:rPr lang="fa-IR" sz="1700" b="0">
-                <a:latin typeface="B Nazanin"/>
-                <a:ea typeface="B Nazanin"/>
-                <a:cs typeface="B Nazanin"/>
-                <a:solidFill>
-                  <a:srgbClr val="F4F6FB"/>
-                </a:solidFill>
+                <a:solidFill>
+                  <a:srgbClr val="F4F6FB"/>
+                </a:solidFill>
+                <a:latin typeface="B Nazanin"/>
+                <a:ea typeface="B Nazanin"/>
+                <a:cs typeface="B Nazanin"/>
               </a:rPr>
               <a:t>• Random Forest</a:t>
             </a:r>
@@ -822,22 +822,22 @@
           <a:p>
             <a:pPr algn="r" rtl="1" marL="0" indent="0">
               <a:defRPr lang="fa-IR" sz="1700" b="0">
-                <a:latin typeface="B Nazanin"/>
-                <a:ea typeface="B Nazanin"/>
-                <a:cs typeface="B Nazanin"/>
-                <a:solidFill>
-                  <a:srgbClr val="F4F6FB"/>
-                </a:solidFill>
+                <a:solidFill>
+                  <a:srgbClr val="F4F6FB"/>
+                </a:solidFill>
+                <a:latin typeface="B Nazanin"/>
+                <a:ea typeface="B Nazanin"/>
+                <a:cs typeface="B Nazanin"/>
               </a:defRPr>
             </a:pPr>
             <a:r>
               <a:rPr lang="fa-IR" sz="1700" b="0">
-                <a:latin typeface="B Nazanin"/>
-                <a:ea typeface="B Nazanin"/>
-                <a:cs typeface="B Nazanin"/>
-                <a:solidFill>
-                  <a:srgbClr val="F4F6FB"/>
-                </a:solidFill>
+                <a:solidFill>
+                  <a:srgbClr val="F4F6FB"/>
+                </a:solidFill>
+                <a:latin typeface="B Nazanin"/>
+                <a:ea typeface="B Nazanin"/>
+                <a:cs typeface="B Nazanin"/>
               </a:rPr>
               <a:t>• Extra Trees</a:t>
             </a:r>
@@ -850,22 +850,22 @@
           <a:p>
             <a:pPr algn="r" rtl="1" marL="0" indent="0">
               <a:defRPr lang="fa-IR" sz="1700" b="0">
-                <a:latin typeface="B Nazanin"/>
-                <a:ea typeface="B Nazanin"/>
-                <a:cs typeface="B Nazanin"/>
-                <a:solidFill>
-                  <a:srgbClr val="F4F6FB"/>
-                </a:solidFill>
+                <a:solidFill>
+                  <a:srgbClr val="F4F6FB"/>
+                </a:solidFill>
+                <a:latin typeface="B Nazanin"/>
+                <a:ea typeface="B Nazanin"/>
+                <a:cs typeface="B Nazanin"/>
               </a:defRPr>
             </a:pPr>
             <a:r>
               <a:rPr lang="fa-IR" sz="1700" b="0">
-                <a:latin typeface="B Nazanin"/>
-                <a:ea typeface="B Nazanin"/>
-                <a:cs typeface="B Nazanin"/>
-                <a:solidFill>
-                  <a:srgbClr val="F4F6FB"/>
-                </a:solidFill>
+                <a:solidFill>
+                  <a:srgbClr val="F4F6FB"/>
+                </a:solidFill>
+                <a:latin typeface="B Nazanin"/>
+                <a:ea typeface="B Nazanin"/>
+                <a:cs typeface="B Nazanin"/>
               </a:rPr>
               <a:t>• Histogram Gradient Boosting</a:t>
             </a:r>
@@ -878,22 +878,22 @@
           <a:p>
             <a:pPr algn="r" rtl="1" marL="0" indent="0">
               <a:defRPr lang="fa-IR" sz="1700" b="0">
-                <a:latin typeface="B Nazanin"/>
-                <a:ea typeface="B Nazanin"/>
-                <a:cs typeface="B Nazanin"/>
-                <a:solidFill>
-                  <a:srgbClr val="F4F6FB"/>
-                </a:solidFill>
+                <a:solidFill>
+                  <a:srgbClr val="F4F6FB"/>
+                </a:solidFill>
+                <a:latin typeface="B Nazanin"/>
+                <a:ea typeface="B Nazanin"/>
+                <a:cs typeface="B Nazanin"/>
               </a:defRPr>
             </a:pPr>
             <a:r>
               <a:rPr lang="fa-IR" sz="1700" b="0">
-                <a:latin typeface="B Nazanin"/>
-                <a:ea typeface="B Nazanin"/>
-                <a:cs typeface="B Nazanin"/>
-                <a:solidFill>
-                  <a:srgbClr val="F4F6FB"/>
-                </a:solidFill>
+                <a:solidFill>
+                  <a:srgbClr val="F4F6FB"/>
+                </a:solidFill>
+                <a:latin typeface="B Nazanin"/>
+                <a:ea typeface="B Nazanin"/>
+                <a:cs typeface="B Nazanin"/>
               </a:rPr>
               <a:t> </a:t>
             </a:r>
@@ -906,22 +906,22 @@
           <a:p>
             <a:pPr algn="r" rtl="1" marL="0" indent="0">
               <a:defRPr lang="fa-IR" sz="1700" b="0">
-                <a:latin typeface="B Nazanin"/>
-                <a:ea typeface="B Nazanin"/>
-                <a:cs typeface="B Nazanin"/>
-                <a:solidFill>
-                  <a:srgbClr val="F4F6FB"/>
-                </a:solidFill>
+                <a:solidFill>
+                  <a:srgbClr val="F4F6FB"/>
+                </a:solidFill>
+                <a:latin typeface="B Nazanin"/>
+                <a:ea typeface="B Nazanin"/>
+                <a:cs typeface="B Nazanin"/>
               </a:defRPr>
             </a:pPr>
             <a:r>
               <a:rPr lang="fa-IR" sz="1700" b="0">
-                <a:latin typeface="B Nazanin"/>
-                <a:ea typeface="B Nazanin"/>
-                <a:cs typeface="B Nazanin"/>
-                <a:solidFill>
-                  <a:srgbClr val="F4F6FB"/>
-                </a:solidFill>
+                <a:solidFill>
+                  <a:srgbClr val="F4F6FB"/>
+                </a:solidFill>
+                <a:latin typeface="B Nazanin"/>
+                <a:ea typeface="B Nazanin"/>
+                <a:cs typeface="B Nazanin"/>
               </a:rPr>
               <a:t>Imputer + Missing Indicators</a:t>
             </a:r>
@@ -934,22 +934,22 @@
           <a:p>
             <a:pPr algn="r" rtl="1" marL="0" indent="0">
               <a:defRPr lang="fa-IR" sz="1700" b="0">
-                <a:latin typeface="B Nazanin"/>
-                <a:ea typeface="B Nazanin"/>
-                <a:cs typeface="B Nazanin"/>
-                <a:solidFill>
-                  <a:srgbClr val="F4F6FB"/>
-                </a:solidFill>
+                <a:solidFill>
+                  <a:srgbClr val="F4F6FB"/>
+                </a:solidFill>
+                <a:latin typeface="B Nazanin"/>
+                <a:ea typeface="B Nazanin"/>
+                <a:cs typeface="B Nazanin"/>
               </a:defRPr>
             </a:pPr>
             <a:r>
               <a:rPr lang="fa-IR" sz="1700" b="0">
-                <a:latin typeface="B Nazanin"/>
-                <a:ea typeface="B Nazanin"/>
-                <a:cs typeface="B Nazanin"/>
-                <a:solidFill>
-                  <a:srgbClr val="F4F6FB"/>
-                </a:solidFill>
+                <a:solidFill>
+                  <a:srgbClr val="F4F6FB"/>
+                </a:solidFill>
+                <a:latin typeface="B Nazanin"/>
+                <a:ea typeface="B Nazanin"/>
+                <a:cs typeface="B Nazanin"/>
               </a:rPr>
               <a:t>Scaling در مدل‌های لازم</a:t>
             </a:r>
@@ -1008,22 +1008,22 @@
           <a:p>
             <a:pPr algn="r" rtl="1" marL="0" indent="0">
               <a:defRPr lang="fa-IR" sz="2100" b="1">
-                <a:latin typeface="B Nazanin"/>
-                <a:ea typeface="B Nazanin"/>
-                <a:cs typeface="B Nazanin"/>
                 <a:solidFill>
                   <a:srgbClr val="21C4B1"/>
                 </a:solidFill>
+                <a:latin typeface="B Nazanin"/>
+                <a:ea typeface="B Nazanin"/>
+                <a:cs typeface="B Nazanin"/>
               </a:defRPr>
             </a:pPr>
             <a:r>
               <a:rPr lang="fa-IR" sz="2100" b="1">
-                <a:latin typeface="B Nazanin"/>
-                <a:ea typeface="B Nazanin"/>
-                <a:cs typeface="B Nazanin"/>
                 <a:solidFill>
                   <a:srgbClr val="21C4B1"/>
                 </a:solidFill>
+                <a:latin typeface="B Nazanin"/>
+                <a:ea typeface="B Nazanin"/>
+                <a:cs typeface="B Nazanin"/>
               </a:rPr>
               <a:t>ترکیب احتمال‌ها</a:t>
             </a:r>
@@ -1060,22 +1060,22 @@
           <a:p>
             <a:pPr algn="r" rtl="1" marL="0" indent="0">
               <a:defRPr lang="fa-IR" sz="1700" b="0">
-                <a:latin typeface="B Nazanin"/>
-                <a:ea typeface="B Nazanin"/>
-                <a:cs typeface="B Nazanin"/>
-                <a:solidFill>
-                  <a:srgbClr val="F4F6FB"/>
-                </a:solidFill>
+                <a:solidFill>
+                  <a:srgbClr val="F4F6FB"/>
+                </a:solidFill>
+                <a:latin typeface="B Nazanin"/>
+                <a:ea typeface="B Nazanin"/>
+                <a:cs typeface="B Nazanin"/>
               </a:defRPr>
             </a:pPr>
             <a:r>
               <a:rPr lang="fa-IR" sz="1700" b="0">
-                <a:latin typeface="B Nazanin"/>
-                <a:ea typeface="B Nazanin"/>
-                <a:cs typeface="B Nazanin"/>
-                <a:solidFill>
-                  <a:srgbClr val="F4F6FB"/>
-                </a:solidFill>
+                <a:solidFill>
+                  <a:srgbClr val="F4F6FB"/>
+                </a:solidFill>
+                <a:latin typeface="B Nazanin"/>
+                <a:ea typeface="B Nazanin"/>
+                <a:cs typeface="B Nazanin"/>
               </a:rPr>
               <a:t>احتمال‌های خارج از نمونه (OOF)</a:t>
             </a:r>
@@ -1088,22 +1088,22 @@
           <a:p>
             <a:pPr algn="r" rtl="1" marL="0" indent="0">
               <a:defRPr lang="fa-IR" sz="1700" b="0">
-                <a:latin typeface="B Nazanin"/>
-                <a:ea typeface="B Nazanin"/>
-                <a:cs typeface="B Nazanin"/>
-                <a:solidFill>
-                  <a:srgbClr val="F4F6FB"/>
-                </a:solidFill>
+                <a:solidFill>
+                  <a:srgbClr val="F4F6FB"/>
+                </a:solidFill>
+                <a:latin typeface="B Nazanin"/>
+                <a:ea typeface="B Nazanin"/>
+                <a:cs typeface="B Nazanin"/>
               </a:defRPr>
             </a:pPr>
             <a:r>
               <a:rPr lang="fa-IR" sz="1700" b="0">
-                <a:latin typeface="B Nazanin"/>
-                <a:ea typeface="B Nazanin"/>
-                <a:cs typeface="B Nazanin"/>
-                <a:solidFill>
-                  <a:srgbClr val="F4F6FB"/>
-                </a:solidFill>
+                <a:solidFill>
+                  <a:srgbClr val="F4F6FB"/>
+                </a:solidFill>
+                <a:latin typeface="B Nazanin"/>
+                <a:ea typeface="B Nazanin"/>
+                <a:cs typeface="B Nazanin"/>
               </a:rPr>
               <a:t>+ ویژگی‌های زمینه‌ای Hurst</a:t>
             </a:r>
@@ -1116,22 +1116,22 @@
           <a:p>
             <a:pPr algn="r" rtl="1" marL="0" indent="0">
               <a:defRPr lang="fa-IR" sz="1700" b="0">
-                <a:latin typeface="B Nazanin"/>
-                <a:ea typeface="B Nazanin"/>
-                <a:cs typeface="B Nazanin"/>
-                <a:solidFill>
-                  <a:srgbClr val="F4F6FB"/>
-                </a:solidFill>
+                <a:solidFill>
+                  <a:srgbClr val="F4F6FB"/>
+                </a:solidFill>
+                <a:latin typeface="B Nazanin"/>
+                <a:ea typeface="B Nazanin"/>
+                <a:cs typeface="B Nazanin"/>
               </a:defRPr>
             </a:pPr>
             <a:r>
               <a:rPr lang="fa-IR" sz="1700" b="0">
-                <a:latin typeface="B Nazanin"/>
-                <a:ea typeface="B Nazanin"/>
-                <a:cs typeface="B Nazanin"/>
-                <a:solidFill>
-                  <a:srgbClr val="F4F6FB"/>
-                </a:solidFill>
+                <a:solidFill>
+                  <a:srgbClr val="F4F6FB"/>
+                </a:solidFill>
+                <a:latin typeface="B Nazanin"/>
+                <a:ea typeface="B Nazanin"/>
+                <a:cs typeface="B Nazanin"/>
               </a:rPr>
               <a:t>→ ورودی فراطبقه‌بند</a:t>
             </a:r>
@@ -1144,22 +1144,22 @@
           <a:p>
             <a:pPr algn="r" rtl="1" marL="0" indent="0">
               <a:defRPr lang="fa-IR" sz="1700" b="0">
-                <a:latin typeface="B Nazanin"/>
-                <a:ea typeface="B Nazanin"/>
-                <a:cs typeface="B Nazanin"/>
-                <a:solidFill>
-                  <a:srgbClr val="F4F6FB"/>
-                </a:solidFill>
+                <a:solidFill>
+                  <a:srgbClr val="F4F6FB"/>
+                </a:solidFill>
+                <a:latin typeface="B Nazanin"/>
+                <a:ea typeface="B Nazanin"/>
+                <a:cs typeface="B Nazanin"/>
               </a:defRPr>
             </a:pPr>
             <a:r>
               <a:rPr lang="fa-IR" sz="1700" b="0">
-                <a:latin typeface="B Nazanin"/>
-                <a:ea typeface="B Nazanin"/>
-                <a:cs typeface="B Nazanin"/>
-                <a:solidFill>
-                  <a:srgbClr val="F4F6FB"/>
-                </a:solidFill>
+                <a:solidFill>
+                  <a:srgbClr val="F4F6FB"/>
+                </a:solidFill>
+                <a:latin typeface="B Nazanin"/>
+                <a:ea typeface="B Nazanin"/>
+                <a:cs typeface="B Nazanin"/>
               </a:rPr>
               <a:t> </a:t>
             </a:r>
@@ -1172,22 +1172,22 @@
           <a:p>
             <a:pPr algn="r" rtl="1" marL="0" indent="0">
               <a:defRPr lang="fa-IR" sz="1700" b="0">
-                <a:latin typeface="B Nazanin"/>
-                <a:ea typeface="B Nazanin"/>
-                <a:cs typeface="B Nazanin"/>
-                <a:solidFill>
-                  <a:srgbClr val="F4F6FB"/>
-                </a:solidFill>
+                <a:solidFill>
+                  <a:srgbClr val="F4F6FB"/>
+                </a:solidFill>
+                <a:latin typeface="B Nazanin"/>
+                <a:ea typeface="B Nazanin"/>
+                <a:cs typeface="B Nazanin"/>
               </a:defRPr>
             </a:pPr>
             <a:r>
               <a:rPr lang="fa-IR" sz="1700" b="0">
-                <a:latin typeface="B Nazanin"/>
-                <a:ea typeface="B Nazanin"/>
-                <a:cs typeface="B Nazanin"/>
-                <a:solidFill>
-                  <a:srgbClr val="F4F6FB"/>
-                </a:solidFill>
+                <a:solidFill>
+                  <a:srgbClr val="F4F6FB"/>
+                </a:solidFill>
+                <a:latin typeface="B Nazanin"/>
+                <a:ea typeface="B Nazanin"/>
+                <a:cs typeface="B Nazanin"/>
               </a:rPr>
               <a:t>کالیبراسیون احتمالات</a:t>
             </a:r>
@@ -1200,22 +1200,22 @@
           <a:p>
             <a:pPr algn="r" rtl="1" marL="0" indent="0">
               <a:defRPr lang="fa-IR" sz="1700" b="0">
-                <a:latin typeface="B Nazanin"/>
-                <a:ea typeface="B Nazanin"/>
-                <a:cs typeface="B Nazanin"/>
-                <a:solidFill>
-                  <a:srgbClr val="F4F6FB"/>
-                </a:solidFill>
+                <a:solidFill>
+                  <a:srgbClr val="F4F6FB"/>
+                </a:solidFill>
+                <a:latin typeface="B Nazanin"/>
+                <a:ea typeface="B Nazanin"/>
+                <a:cs typeface="B Nazanin"/>
               </a:defRPr>
             </a:pPr>
             <a:r>
               <a:rPr lang="fa-IR" sz="1700" b="0">
-                <a:latin typeface="B Nazanin"/>
-                <a:ea typeface="B Nazanin"/>
-                <a:cs typeface="B Nazanin"/>
-                <a:solidFill>
-                  <a:srgbClr val="F4F6FB"/>
-                </a:solidFill>
+                <a:solidFill>
+                  <a:srgbClr val="F4F6FB"/>
+                </a:solidFill>
+                <a:latin typeface="B Nazanin"/>
+                <a:ea typeface="B Nazanin"/>
+                <a:cs typeface="B Nazanin"/>
               </a:rPr>
               <a:t>و امکان عدم معامله در حاشیه اطمینان پایین</a:t>
             </a:r>
@@ -1274,22 +1274,22 @@
           <a:p>
             <a:pPr algn="ctr" rtl="1" marL="0" indent="0">
               <a:defRPr lang="fa-IR" sz="1400" b="1">
-                <a:latin typeface="B Nazanin"/>
-                <a:ea typeface="B Nazanin"/>
-                <a:cs typeface="B Nazanin"/>
                 <a:solidFill>
                   <a:srgbClr val="08101F"/>
                 </a:solidFill>
+                <a:latin typeface="B Nazanin"/>
+                <a:ea typeface="B Nazanin"/>
+                <a:cs typeface="B Nazanin"/>
               </a:defRPr>
             </a:pPr>
             <a:r>
               <a:rPr lang="fa-IR" sz="1400" b="1">
-                <a:latin typeface="B Nazanin"/>
-                <a:ea typeface="B Nazanin"/>
-                <a:cs typeface="B Nazanin"/>
                 <a:solidFill>
                   <a:srgbClr val="08101F"/>
                 </a:solidFill>
+                <a:latin typeface="B Nazanin"/>
+                <a:ea typeface="B Nazanin"/>
+                <a:cs typeface="B Nazanin"/>
               </a:rPr>
               <a:t>Fallback به مدل پایه</a:t>
             </a:r>
@@ -1359,22 +1359,22 @@
           <a:p>
             <a:pPr algn="r" rtl="1" marL="0" indent="0">
               <a:defRPr lang="fa-IR" sz="2700" b="1">
-                <a:latin typeface="B Nazanin"/>
-                <a:ea typeface="B Nazanin"/>
-                <a:cs typeface="B Nazanin"/>
-                <a:solidFill>
-                  <a:srgbClr val="F4F6FB"/>
-                </a:solidFill>
+                <a:solidFill>
+                  <a:srgbClr val="F4F6FB"/>
+                </a:solidFill>
+                <a:latin typeface="B Nazanin"/>
+                <a:ea typeface="B Nazanin"/>
+                <a:cs typeface="B Nazanin"/>
               </a:defRPr>
             </a:pPr>
             <a:r>
               <a:rPr lang="fa-IR" sz="2700" b="1">
-                <a:latin typeface="B Nazanin"/>
-                <a:ea typeface="B Nazanin"/>
-                <a:cs typeface="B Nazanin"/>
-                <a:solidFill>
-                  <a:srgbClr val="F4F6FB"/>
-                </a:solidFill>
+                <a:solidFill>
+                  <a:srgbClr val="F4F6FB"/>
+                </a:solidFill>
+                <a:latin typeface="B Nazanin"/>
+                <a:ea typeface="B Nazanin"/>
+                <a:cs typeface="B Nazanin"/>
               </a:rPr>
               <a:t>۱۰. کنترل نشت و اعتبارسنجی زمانی</a:t>
             </a:r>
@@ -1433,22 +1433,22 @@
           <a:p>
             <a:pPr algn="r" rtl="1" marL="0" indent="0">
               <a:defRPr lang="fa-IR" sz="1000" b="0">
-                <a:latin typeface="B Nazanin"/>
-                <a:ea typeface="B Nazanin"/>
-                <a:cs typeface="B Nazanin"/>
                 <a:solidFill>
                   <a:srgbClr val="AAB4C8"/>
                 </a:solidFill>
+                <a:latin typeface="B Nazanin"/>
+                <a:ea typeface="B Nazanin"/>
+                <a:cs typeface="B Nazanin"/>
               </a:defRPr>
             </a:pPr>
             <a:r>
               <a:rPr lang="fa-IR" sz="1000" b="0">
-                <a:latin typeface="B Nazanin"/>
-                <a:ea typeface="B Nazanin"/>
-                <a:cs typeface="B Nazanin"/>
                 <a:solidFill>
                   <a:srgbClr val="AAB4C8"/>
                 </a:solidFill>
+                <a:latin typeface="B Nazanin"/>
+                <a:ea typeface="B Nazanin"/>
+                <a:cs typeface="B Nazanin"/>
               </a:rPr>
               <a:t>ارائه پژوهش | اسلاید 11 | B Nazanin</a:t>
             </a:r>
@@ -1485,22 +1485,22 @@
           <a:p>
             <a:pPr algn="ctr" rtl="1" marL="0" indent="0">
               <a:defRPr lang="fa-IR" sz="1800" b="1">
-                <a:latin typeface="B Nazanin"/>
-                <a:ea typeface="B Nazanin"/>
-                <a:cs typeface="B Nazanin"/>
                 <a:solidFill>
                   <a:srgbClr val="E0B24A"/>
                 </a:solidFill>
+                <a:latin typeface="B Nazanin"/>
+                <a:ea typeface="B Nazanin"/>
+                <a:cs typeface="B Nazanin"/>
               </a:defRPr>
             </a:pPr>
             <a:r>
               <a:rPr lang="fa-IR" sz="1800" b="1">
-                <a:latin typeface="B Nazanin"/>
-                <a:ea typeface="B Nazanin"/>
-                <a:cs typeface="B Nazanin"/>
                 <a:solidFill>
                   <a:srgbClr val="E0B24A"/>
                 </a:solidFill>
+                <a:latin typeface="B Nazanin"/>
+                <a:ea typeface="B Nazanin"/>
+                <a:cs typeface="B Nazanin"/>
               </a:rPr>
               <a:t>اصل کلیدی: هر برچسب آموزشی باید پیش از شروع اعتبارسنجی تمام شده باشد.</a:t>
             </a:r>
@@ -1581,22 +1581,22 @@
           <a:p>
             <a:pPr algn="ctr" rtl="1" marL="0" indent="0">
               <a:defRPr lang="fa-IR" sz="1900" b="1">
-                <a:latin typeface="B Nazanin"/>
-                <a:ea typeface="B Nazanin"/>
-                <a:cs typeface="B Nazanin"/>
                 <a:solidFill>
                   <a:srgbClr val="08101F"/>
                 </a:solidFill>
+                <a:latin typeface="B Nazanin"/>
+                <a:ea typeface="B Nazanin"/>
+                <a:cs typeface="B Nazanin"/>
               </a:defRPr>
             </a:pPr>
             <a:r>
               <a:rPr lang="fa-IR" sz="1900" b="1">
-                <a:latin typeface="B Nazanin"/>
-                <a:ea typeface="B Nazanin"/>
-                <a:cs typeface="B Nazanin"/>
                 <a:solidFill>
                   <a:srgbClr val="08101F"/>
                 </a:solidFill>
+                <a:latin typeface="B Nazanin"/>
+                <a:ea typeface="B Nazanin"/>
+                <a:cs typeface="B Nazanin"/>
               </a:rPr>
               <a:t>Train</a:t>
             </a:r>
@@ -1655,22 +1655,22 @@
           <a:p>
             <a:pPr algn="ctr" rtl="1" marL="0" indent="0">
               <a:defRPr lang="fa-IR" sz="1700" b="1">
-                <a:latin typeface="B Nazanin"/>
-                <a:ea typeface="B Nazanin"/>
-                <a:cs typeface="B Nazanin"/>
                 <a:solidFill>
                   <a:srgbClr val="08101F"/>
                 </a:solidFill>
+                <a:latin typeface="B Nazanin"/>
+                <a:ea typeface="B Nazanin"/>
+                <a:cs typeface="B Nazanin"/>
               </a:defRPr>
             </a:pPr>
             <a:r>
               <a:rPr lang="fa-IR" sz="1700" b="1">
-                <a:latin typeface="B Nazanin"/>
-                <a:ea typeface="B Nazanin"/>
-                <a:cs typeface="B Nazanin"/>
                 <a:solidFill>
                   <a:srgbClr val="08101F"/>
                 </a:solidFill>
+                <a:latin typeface="B Nazanin"/>
+                <a:ea typeface="B Nazanin"/>
+                <a:cs typeface="B Nazanin"/>
               </a:rPr>
               <a:t>Purge / Gap</a:t>
             </a:r>
@@ -1729,22 +1729,22 @@
           <a:p>
             <a:pPr algn="ctr" rtl="1" marL="0" indent="0">
               <a:defRPr lang="fa-IR" sz="1800" b="1">
-                <a:latin typeface="B Nazanin"/>
-                <a:ea typeface="B Nazanin"/>
-                <a:cs typeface="B Nazanin"/>
                 <a:solidFill>
                   <a:srgbClr val="08101F"/>
                 </a:solidFill>
+                <a:latin typeface="B Nazanin"/>
+                <a:ea typeface="B Nazanin"/>
+                <a:cs typeface="B Nazanin"/>
               </a:defRPr>
             </a:pPr>
             <a:r>
               <a:rPr lang="fa-IR" sz="1800" b="1">
-                <a:latin typeface="B Nazanin"/>
-                <a:ea typeface="B Nazanin"/>
-                <a:cs typeface="B Nazanin"/>
                 <a:solidFill>
                   <a:srgbClr val="08101F"/>
                 </a:solidFill>
+                <a:latin typeface="B Nazanin"/>
+                <a:ea typeface="B Nazanin"/>
+                <a:cs typeface="B Nazanin"/>
               </a:rPr>
               <a:t>Validation</a:t>
             </a:r>
@@ -1803,22 +1803,22 @@
           <a:p>
             <a:pPr algn="ctr" rtl="1" marL="0" indent="0">
               <a:defRPr lang="fa-IR" sz="2200" b="1">
-                <a:latin typeface="B Nazanin"/>
-                <a:ea typeface="B Nazanin"/>
-                <a:cs typeface="B Nazanin"/>
-                <a:solidFill>
-                  <a:srgbClr val="F4F6FB"/>
-                </a:solidFill>
+                <a:solidFill>
+                  <a:srgbClr val="F4F6FB"/>
+                </a:solidFill>
+                <a:latin typeface="B Nazanin"/>
+                <a:ea typeface="B Nazanin"/>
+                <a:cs typeface="B Nazanin"/>
               </a:defRPr>
             </a:pPr>
             <a:r>
               <a:rPr lang="fa-IR" sz="2200" b="1">
-                <a:latin typeface="B Nazanin"/>
-                <a:ea typeface="B Nazanin"/>
-                <a:cs typeface="B Nazanin"/>
-                <a:solidFill>
-                  <a:srgbClr val="F4F6FB"/>
-                </a:solidFill>
+                <a:solidFill>
+                  <a:srgbClr val="F4F6FB"/>
+                </a:solidFill>
+                <a:latin typeface="B Nazanin"/>
+                <a:ea typeface="B Nazanin"/>
+                <a:cs typeface="B Nazanin"/>
               </a:rPr>
               <a:t>۰</a:t>
             </a:r>
@@ -1855,22 +1855,22 @@
           <a:p>
             <a:pPr algn="r" rtl="1" marL="0" indent="0">
               <a:defRPr lang="fa-IR" sz="1700" b="0">
-                <a:latin typeface="B Nazanin"/>
-                <a:ea typeface="B Nazanin"/>
-                <a:cs typeface="B Nazanin"/>
-                <a:solidFill>
-                  <a:srgbClr val="F4F6FB"/>
-                </a:solidFill>
+                <a:solidFill>
+                  <a:srgbClr val="F4F6FB"/>
+                </a:solidFill>
+                <a:latin typeface="B Nazanin"/>
+                <a:ea typeface="B Nazanin"/>
+                <a:cs typeface="B Nazanin"/>
               </a:defRPr>
             </a:pPr>
             <a:r>
               <a:rPr lang="fa-IR" sz="1700" b="0">
-                <a:latin typeface="B Nazanin"/>
-                <a:ea typeface="B Nazanin"/>
-                <a:cs typeface="B Nazanin"/>
-                <a:solidFill>
-                  <a:srgbClr val="F4F6FB"/>
-                </a:solidFill>
+                <a:solidFill>
+                  <a:srgbClr val="F4F6FB"/>
+                </a:solidFill>
+                <a:latin typeface="B Nazanin"/>
+                <a:ea typeface="B Nazanin"/>
+                <a:cs typeface="B Nazanin"/>
               </a:rPr>
               <a:t>• مرز مشترک ارزیابی تاریخی: ۳ ژوئیه ۲۰۲۳</a:t>
             </a:r>
@@ -1883,22 +1883,22 @@
           <a:p>
             <a:pPr algn="r" rtl="1" marL="0" indent="0">
               <a:defRPr lang="fa-IR" sz="1700" b="0">
-                <a:latin typeface="B Nazanin"/>
-                <a:ea typeface="B Nazanin"/>
-                <a:cs typeface="B Nazanin"/>
-                <a:solidFill>
-                  <a:srgbClr val="F4F6FB"/>
-                </a:solidFill>
+                <a:solidFill>
+                  <a:srgbClr val="F4F6FB"/>
+                </a:solidFill>
+                <a:latin typeface="B Nazanin"/>
+                <a:ea typeface="B Nazanin"/>
+                <a:cs typeface="B Nazanin"/>
               </a:defRPr>
             </a:pPr>
             <a:r>
               <a:rPr lang="fa-IR" sz="1700" b="0">
-                <a:latin typeface="B Nazanin"/>
-                <a:ea typeface="B Nazanin"/>
-                <a:cs typeface="B Nazanin"/>
-                <a:solidFill>
-                  <a:srgbClr val="F4F6FB"/>
-                </a:solidFill>
+                <a:solidFill>
+                  <a:srgbClr val="F4F6FB"/>
+                </a:solidFill>
+                <a:latin typeface="B Nazanin"/>
+                <a:ea typeface="B Nazanin"/>
+                <a:cs typeface="B Nazanin"/>
               </a:rPr>
               <a:t>• پنج fold توسعه‌یابنده Walk-Forward</a:t>
             </a:r>
@@ -1911,22 +1911,22 @@
           <a:p>
             <a:pPr algn="r" rtl="1" marL="0" indent="0">
               <a:defRPr lang="fa-IR" sz="1700" b="0">
-                <a:latin typeface="B Nazanin"/>
-                <a:ea typeface="B Nazanin"/>
-                <a:cs typeface="B Nazanin"/>
-                <a:solidFill>
-                  <a:srgbClr val="F4F6FB"/>
-                </a:solidFill>
+                <a:solidFill>
+                  <a:srgbClr val="F4F6FB"/>
+                </a:solidFill>
+                <a:latin typeface="B Nazanin"/>
+                <a:ea typeface="B Nazanin"/>
+                <a:cs typeface="B Nazanin"/>
               </a:defRPr>
             </a:pPr>
             <a:r>
               <a:rPr lang="fa-IR" sz="1700" b="0">
-                <a:latin typeface="B Nazanin"/>
-                <a:ea typeface="B Nazanin"/>
-                <a:cs typeface="B Nazanin"/>
-                <a:solidFill>
-                  <a:srgbClr val="F4F6FB"/>
-                </a:solidFill>
+                <a:solidFill>
+                  <a:srgbClr val="F4F6FB"/>
+                </a:solidFill>
+                <a:latin typeface="B Nazanin"/>
+                <a:ea typeface="B Nazanin"/>
+                <a:cs typeface="B Nazanin"/>
               </a:rPr>
               <a:t>• Purge مستقل برای کالیبراسیون</a:t>
             </a:r>
@@ -1939,22 +1939,22 @@
           <a:p>
             <a:pPr algn="r" rtl="1" marL="0" indent="0">
               <a:defRPr lang="fa-IR" sz="1700" b="0">
-                <a:latin typeface="B Nazanin"/>
-                <a:ea typeface="B Nazanin"/>
-                <a:cs typeface="B Nazanin"/>
-                <a:solidFill>
-                  <a:srgbClr val="F4F6FB"/>
-                </a:solidFill>
+                <a:solidFill>
+                  <a:srgbClr val="F4F6FB"/>
+                </a:solidFill>
+                <a:latin typeface="B Nazanin"/>
+                <a:ea typeface="B Nazanin"/>
+                <a:cs typeface="B Nazanin"/>
               </a:defRPr>
             </a:pPr>
             <a:r>
               <a:rPr lang="fa-IR" sz="1700" b="0">
-                <a:latin typeface="B Nazanin"/>
-                <a:ea typeface="B Nazanin"/>
-                <a:cs typeface="B Nazanin"/>
-                <a:solidFill>
-                  <a:srgbClr val="F4F6FB"/>
-                </a:solidFill>
+                <a:solidFill>
+                  <a:srgbClr val="F4F6FB"/>
+                </a:solidFill>
+                <a:latin typeface="B Nazanin"/>
+                <a:ea typeface="B Nazanin"/>
+                <a:cs typeface="B Nazanin"/>
               </a:rPr>
               <a:t>• ۲۸ تقسیم CPCV فقط در توسعه</a:t>
             </a:r>
@@ -1967,22 +1967,22 @@
           <a:p>
             <a:pPr algn="r" rtl="1" marL="0" indent="0">
               <a:defRPr lang="fa-IR" sz="1700" b="0">
-                <a:latin typeface="B Nazanin"/>
-                <a:ea typeface="B Nazanin"/>
-                <a:cs typeface="B Nazanin"/>
-                <a:solidFill>
-                  <a:srgbClr val="F4F6FB"/>
-                </a:solidFill>
+                <a:solidFill>
+                  <a:srgbClr val="F4F6FB"/>
+                </a:solidFill>
+                <a:latin typeface="B Nazanin"/>
+                <a:ea typeface="B Nazanin"/>
+                <a:cs typeface="B Nazanin"/>
               </a:defRPr>
             </a:pPr>
             <a:r>
               <a:rPr lang="fa-IR" sz="1700" b="0">
-                <a:latin typeface="B Nazanin"/>
-                <a:ea typeface="B Nazanin"/>
-                <a:cs typeface="B Nazanin"/>
-                <a:solidFill>
-                  <a:srgbClr val="F4F6FB"/>
-                </a:solidFill>
+                <a:solidFill>
+                  <a:srgbClr val="F4F6FB"/>
+                </a:solidFill>
+                <a:latin typeface="B Nazanin"/>
+                <a:ea typeface="B Nazanin"/>
+                <a:cs typeface="B Nazanin"/>
               </a:rPr>
               <a:t>• صفر نمونه هم‌پوشان در ۶۰ انتخاب outer</a:t>
             </a:r>
@@ -2041,22 +2041,22 @@
           <a:p>
             <a:pPr algn="ctr" rtl="1" marL="0" indent="0">
               <a:defRPr lang="fa-IR" sz="1500" b="1">
-                <a:latin typeface="B Nazanin"/>
-                <a:ea typeface="B Nazanin"/>
-                <a:cs typeface="B Nazanin"/>
-                <a:solidFill>
-                  <a:srgbClr val="F4F6FB"/>
-                </a:solidFill>
+                <a:solidFill>
+                  <a:srgbClr val="F4F6FB"/>
+                </a:solidFill>
+                <a:latin typeface="B Nazanin"/>
+                <a:ea typeface="B Nazanin"/>
+                <a:cs typeface="B Nazanin"/>
               </a:defRPr>
             </a:pPr>
             <a:r>
               <a:rPr lang="fa-IR" sz="1500" b="1">
-                <a:latin typeface="B Nazanin"/>
-                <a:ea typeface="B Nazanin"/>
-                <a:cs typeface="B Nazanin"/>
-                <a:solidFill>
-                  <a:srgbClr val="F4F6FB"/>
-                </a:solidFill>
+                <a:solidFill>
+                  <a:srgbClr val="F4F6FB"/>
+                </a:solidFill>
+                <a:latin typeface="B Nazanin"/>
+                <a:ea typeface="B Nazanin"/>
+                <a:cs typeface="B Nazanin"/>
               </a:rPr>
               <a:t>تقسیم تصادفی ممنوع است</a:t>
             </a:r>
@@ -2126,22 +2126,22 @@
           <a:p>
             <a:pPr algn="r" rtl="1" marL="0" indent="0">
               <a:defRPr lang="fa-IR" sz="2700" b="1">
-                <a:latin typeface="B Nazanin"/>
-                <a:ea typeface="B Nazanin"/>
-                <a:cs typeface="B Nazanin"/>
-                <a:solidFill>
-                  <a:srgbClr val="F4F6FB"/>
-                </a:solidFill>
+                <a:solidFill>
+                  <a:srgbClr val="F4F6FB"/>
+                </a:solidFill>
+                <a:latin typeface="B Nazanin"/>
+                <a:ea typeface="B Nazanin"/>
+                <a:cs typeface="B Nazanin"/>
               </a:defRPr>
             </a:pPr>
             <a:r>
               <a:rPr lang="fa-IR" sz="2700" b="1">
-                <a:latin typeface="B Nazanin"/>
-                <a:ea typeface="B Nazanin"/>
-                <a:cs typeface="B Nazanin"/>
-                <a:solidFill>
-                  <a:srgbClr val="F4F6FB"/>
-                </a:solidFill>
+                <a:solidFill>
+                  <a:srgbClr val="F4F6FB"/>
+                </a:solidFill>
+                <a:latin typeface="B Nazanin"/>
+                <a:ea typeface="B Nazanin"/>
+                <a:cs typeface="B Nazanin"/>
               </a:rPr>
               <a:t>۱۱. طراحی آزمون حذف مؤلفه (Ablation)</a:t>
             </a:r>
@@ -2200,22 +2200,22 @@
           <a:p>
             <a:pPr algn="r" rtl="1" marL="0" indent="0">
               <a:defRPr lang="fa-IR" sz="1000" b="0">
-                <a:latin typeface="B Nazanin"/>
-                <a:ea typeface="B Nazanin"/>
-                <a:cs typeface="B Nazanin"/>
                 <a:solidFill>
                   <a:srgbClr val="AAB4C8"/>
                 </a:solidFill>
+                <a:latin typeface="B Nazanin"/>
+                <a:ea typeface="B Nazanin"/>
+                <a:cs typeface="B Nazanin"/>
               </a:defRPr>
             </a:pPr>
             <a:r>
               <a:rPr lang="fa-IR" sz="1000" b="0">
-                <a:latin typeface="B Nazanin"/>
-                <a:ea typeface="B Nazanin"/>
-                <a:cs typeface="B Nazanin"/>
                 <a:solidFill>
                   <a:srgbClr val="AAB4C8"/>
                 </a:solidFill>
+                <a:latin typeface="B Nazanin"/>
+                <a:ea typeface="B Nazanin"/>
+                <a:cs typeface="B Nazanin"/>
               </a:rPr>
               <a:t>ارائه پژوهش | اسلاید 12 | B Nazanin</a:t>
             </a:r>
@@ -2252,22 +2252,22 @@
           <a:p>
             <a:pPr algn="ctr" rtl="1" marL="0" indent="0">
               <a:defRPr lang="fa-IR" sz="1700" b="0">
-                <a:latin typeface="B Nazanin"/>
-                <a:ea typeface="B Nazanin"/>
-                <a:cs typeface="B Nazanin"/>
                 <a:solidFill>
                   <a:srgbClr val="AAB4C8"/>
                 </a:solidFill>
+                <a:latin typeface="B Nazanin"/>
+                <a:ea typeface="B Nazanin"/>
+                <a:cs typeface="B Nazanin"/>
               </a:defRPr>
             </a:pPr>
             <a:r>
               <a:rPr lang="fa-IR" sz="1700" b="0">
-                <a:latin typeface="B Nazanin"/>
-                <a:ea typeface="B Nazanin"/>
-                <a:cs typeface="B Nazanin"/>
                 <a:solidFill>
                   <a:srgbClr val="AAB4C8"/>
                 </a:solidFill>
+                <a:latin typeface="B Nazanin"/>
+                <a:ea typeface="B Nazanin"/>
+                <a:cs typeface="B Nazanin"/>
               </a:rPr>
               <a:t>شرایط مقایسه ثابت نگه داشته شد تا تغییر عملکرد به افزودن Hurst نسبت داده شود.</a:t>
             </a:r>
@@ -2348,22 +2348,22 @@
           <a:p>
             <a:pPr algn="ctr" rtl="1" marL="0" indent="0">
               <a:defRPr lang="fa-IR" sz="1600" b="1">
-                <a:latin typeface="B Nazanin"/>
-                <a:ea typeface="B Nazanin"/>
-                <a:cs typeface="B Nazanin"/>
                 <a:solidFill>
                   <a:srgbClr val="08101F"/>
                 </a:solidFill>
+                <a:latin typeface="B Nazanin"/>
+                <a:ea typeface="B Nazanin"/>
+                <a:cs typeface="B Nazanin"/>
               </a:defRPr>
             </a:pPr>
             <a:r>
               <a:rPr lang="fa-IR" sz="1600" b="1">
-                <a:latin typeface="B Nazanin"/>
-                <a:ea typeface="B Nazanin"/>
-                <a:cs typeface="B Nazanin"/>
                 <a:solidFill>
                   <a:srgbClr val="08101F"/>
                 </a:solidFill>
+                <a:latin typeface="B Nazanin"/>
+                <a:ea typeface="B Nazanin"/>
+                <a:cs typeface="B Nazanin"/>
               </a:rPr>
               <a:t>بازوی آزمایش</a:t>
             </a:r>
@@ -2422,22 +2422,22 @@
           <a:p>
             <a:pPr algn="ctr" rtl="1" marL="0" indent="0">
               <a:defRPr lang="fa-IR" sz="1600" b="1">
-                <a:latin typeface="B Nazanin"/>
-                <a:ea typeface="B Nazanin"/>
-                <a:cs typeface="B Nazanin"/>
                 <a:solidFill>
                   <a:srgbClr val="08101F"/>
                 </a:solidFill>
+                <a:latin typeface="B Nazanin"/>
+                <a:ea typeface="B Nazanin"/>
+                <a:cs typeface="B Nazanin"/>
               </a:defRPr>
             </a:pPr>
             <a:r>
               <a:rPr lang="fa-IR" sz="1600" b="1">
-                <a:latin typeface="B Nazanin"/>
-                <a:ea typeface="B Nazanin"/>
-                <a:cs typeface="B Nazanin"/>
                 <a:solidFill>
                   <a:srgbClr val="08101F"/>
                 </a:solidFill>
+                <a:latin typeface="B Nazanin"/>
+                <a:ea typeface="B Nazanin"/>
+                <a:cs typeface="B Nazanin"/>
               </a:rPr>
               <a:t>۱ روز</a:t>
             </a:r>
@@ -2496,22 +2496,22 @@
           <a:p>
             <a:pPr algn="ctr" rtl="1" marL="0" indent="0">
               <a:defRPr lang="fa-IR" sz="1600" b="1">
-                <a:latin typeface="B Nazanin"/>
-                <a:ea typeface="B Nazanin"/>
-                <a:cs typeface="B Nazanin"/>
                 <a:solidFill>
                   <a:srgbClr val="08101F"/>
                 </a:solidFill>
+                <a:latin typeface="B Nazanin"/>
+                <a:ea typeface="B Nazanin"/>
+                <a:cs typeface="B Nazanin"/>
               </a:defRPr>
             </a:pPr>
             <a:r>
               <a:rPr lang="fa-IR" sz="1600" b="1">
-                <a:latin typeface="B Nazanin"/>
-                <a:ea typeface="B Nazanin"/>
-                <a:cs typeface="B Nazanin"/>
                 <a:solidFill>
                   <a:srgbClr val="08101F"/>
                 </a:solidFill>
+                <a:latin typeface="B Nazanin"/>
+                <a:ea typeface="B Nazanin"/>
+                <a:cs typeface="B Nazanin"/>
               </a:rPr>
               <a:t>۵ روز</a:t>
             </a:r>
@@ -2570,22 +2570,22 @@
           <a:p>
             <a:pPr algn="ctr" rtl="1" marL="0" indent="0">
               <a:defRPr lang="fa-IR" sz="1600" b="1">
-                <a:latin typeface="B Nazanin"/>
-                <a:ea typeface="B Nazanin"/>
-                <a:cs typeface="B Nazanin"/>
                 <a:solidFill>
                   <a:srgbClr val="08101F"/>
                 </a:solidFill>
+                <a:latin typeface="B Nazanin"/>
+                <a:ea typeface="B Nazanin"/>
+                <a:cs typeface="B Nazanin"/>
               </a:defRPr>
             </a:pPr>
             <a:r>
               <a:rPr lang="fa-IR" sz="1600" b="1">
-                <a:latin typeface="B Nazanin"/>
-                <a:ea typeface="B Nazanin"/>
-                <a:cs typeface="B Nazanin"/>
                 <a:solidFill>
                   <a:srgbClr val="08101F"/>
                 </a:solidFill>
+                <a:latin typeface="B Nazanin"/>
+                <a:ea typeface="B Nazanin"/>
+                <a:cs typeface="B Nazanin"/>
               </a:rPr>
               <a:t>۱۰ روز</a:t>
             </a:r>
@@ -2644,22 +2644,22 @@
           <a:p>
             <a:pPr algn="ctr" rtl="1" marL="0" indent="0">
               <a:defRPr lang="fa-IR" sz="1600" b="1">
-                <a:latin typeface="B Nazanin"/>
-                <a:ea typeface="B Nazanin"/>
-                <a:cs typeface="B Nazanin"/>
                 <a:solidFill>
                   <a:srgbClr val="08101F"/>
                 </a:solidFill>
+                <a:latin typeface="B Nazanin"/>
+                <a:ea typeface="B Nazanin"/>
+                <a:cs typeface="B Nazanin"/>
               </a:defRPr>
             </a:pPr>
             <a:r>
               <a:rPr lang="fa-IR" sz="1600" b="1">
-                <a:latin typeface="B Nazanin"/>
-                <a:ea typeface="B Nazanin"/>
-                <a:cs typeface="B Nazanin"/>
                 <a:solidFill>
                   <a:srgbClr val="08101F"/>
                 </a:solidFill>
+                <a:latin typeface="B Nazanin"/>
+                <a:ea typeface="B Nazanin"/>
+                <a:cs typeface="B Nazanin"/>
               </a:rPr>
               <a:t>۲۰ روز</a:t>
             </a:r>
@@ -2718,22 +2718,22 @@
           <a:p>
             <a:pPr algn="r" rtl="1" marL="0" indent="0">
               <a:defRPr lang="fa-IR" sz="1700" b="1">
-                <a:latin typeface="B Nazanin"/>
-                <a:ea typeface="B Nazanin"/>
-                <a:cs typeface="B Nazanin"/>
-                <a:solidFill>
-                  <a:srgbClr val="F4F6FB"/>
-                </a:solidFill>
+                <a:solidFill>
+                  <a:srgbClr val="F4F6FB"/>
+                </a:solidFill>
+                <a:latin typeface="B Nazanin"/>
+                <a:ea typeface="B Nazanin"/>
+                <a:cs typeface="B Nazanin"/>
               </a:defRPr>
             </a:pPr>
             <a:r>
               <a:rPr lang="fa-IR" sz="1700" b="1">
-                <a:latin typeface="B Nazanin"/>
-                <a:ea typeface="B Nazanin"/>
-                <a:cs typeface="B Nazanin"/>
-                <a:solidFill>
-                  <a:srgbClr val="F4F6FB"/>
-                </a:solidFill>
+                <a:solidFill>
+                  <a:srgbClr val="F4F6FB"/>
+                </a:solidFill>
+                <a:latin typeface="B Nazanin"/>
+                <a:ea typeface="B Nazanin"/>
+                <a:cs typeface="B Nazanin"/>
               </a:rPr>
               <a:t>بدون Hurst</a:t>
             </a:r>
@@ -2792,22 +2792,22 @@
           <a:p>
             <a:pPr algn="ctr" rtl="1" marL="0" indent="0">
               <a:defRPr lang="fa-IR" sz="1700" b="1">
-                <a:latin typeface="B Nazanin"/>
-                <a:ea typeface="B Nazanin"/>
-                <a:cs typeface="B Nazanin"/>
                 <a:solidFill>
                   <a:srgbClr val="08101F"/>
                 </a:solidFill>
+                <a:latin typeface="B Nazanin"/>
+                <a:ea typeface="B Nazanin"/>
+                <a:cs typeface="B Nazanin"/>
               </a:defRPr>
             </a:pPr>
             <a:r>
               <a:rPr lang="fa-IR" sz="1700" b="1">
-                <a:latin typeface="B Nazanin"/>
-                <a:ea typeface="B Nazanin"/>
-                <a:cs typeface="B Nazanin"/>
                 <a:solidFill>
                   <a:srgbClr val="08101F"/>
                 </a:solidFill>
+                <a:latin typeface="B Nazanin"/>
+                <a:ea typeface="B Nazanin"/>
+                <a:cs typeface="B Nazanin"/>
               </a:rPr>
               <a:t>۵۲٫۳۱٪</a:t>
             </a:r>
@@ -2866,22 +2866,22 @@
           <a:p>
             <a:pPr algn="ctr" rtl="1" marL="0" indent="0">
               <a:defRPr lang="fa-IR" sz="1700" b="1">
-                <a:latin typeface="B Nazanin"/>
-                <a:ea typeface="B Nazanin"/>
-                <a:cs typeface="B Nazanin"/>
-                <a:solidFill>
-                  <a:srgbClr val="F4F6FB"/>
-                </a:solidFill>
+                <a:solidFill>
+                  <a:srgbClr val="F4F6FB"/>
+                </a:solidFill>
+                <a:latin typeface="B Nazanin"/>
+                <a:ea typeface="B Nazanin"/>
+                <a:cs typeface="B Nazanin"/>
               </a:defRPr>
             </a:pPr>
             <a:r>
               <a:rPr lang="fa-IR" sz="1700" b="1">
-                <a:latin typeface="B Nazanin"/>
-                <a:ea typeface="B Nazanin"/>
-                <a:cs typeface="B Nazanin"/>
-                <a:solidFill>
-                  <a:srgbClr val="F4F6FB"/>
-                </a:solidFill>
+                <a:solidFill>
+                  <a:srgbClr val="F4F6FB"/>
+                </a:solidFill>
+                <a:latin typeface="B Nazanin"/>
+                <a:ea typeface="B Nazanin"/>
+                <a:cs typeface="B Nazanin"/>
               </a:rPr>
               <a:t>۴۹٫۷۲٪</a:t>
             </a:r>
@@ -2940,22 +2940,22 @@
           <a:p>
             <a:pPr algn="ctr" rtl="1" marL="0" indent="0">
               <a:defRPr lang="fa-IR" sz="1700" b="1">
-                <a:latin typeface="B Nazanin"/>
-                <a:ea typeface="B Nazanin"/>
-                <a:cs typeface="B Nazanin"/>
-                <a:solidFill>
-                  <a:srgbClr val="F4F6FB"/>
-                </a:solidFill>
+                <a:solidFill>
+                  <a:srgbClr val="F4F6FB"/>
+                </a:solidFill>
+                <a:latin typeface="B Nazanin"/>
+                <a:ea typeface="B Nazanin"/>
+                <a:cs typeface="B Nazanin"/>
               </a:defRPr>
             </a:pPr>
             <a:r>
               <a:rPr lang="fa-IR" sz="1700" b="1">
-                <a:latin typeface="B Nazanin"/>
-                <a:ea typeface="B Nazanin"/>
-                <a:cs typeface="B Nazanin"/>
-                <a:solidFill>
-                  <a:srgbClr val="F4F6FB"/>
-                </a:solidFill>
+                <a:solidFill>
+                  <a:srgbClr val="F4F6FB"/>
+                </a:solidFill>
+                <a:latin typeface="B Nazanin"/>
+                <a:ea typeface="B Nazanin"/>
+                <a:cs typeface="B Nazanin"/>
               </a:rPr>
               <a:t>۵۰٫۷۴٪</a:t>
             </a:r>
@@ -3014,22 +3014,22 @@
           <a:p>
             <a:pPr algn="ctr" rtl="1" marL="0" indent="0">
               <a:defRPr lang="fa-IR" sz="1700" b="1">
-                <a:latin typeface="B Nazanin"/>
-                <a:ea typeface="B Nazanin"/>
-                <a:cs typeface="B Nazanin"/>
-                <a:solidFill>
-                  <a:srgbClr val="F4F6FB"/>
-                </a:solidFill>
+                <a:solidFill>
+                  <a:srgbClr val="F4F6FB"/>
+                </a:solidFill>
+                <a:latin typeface="B Nazanin"/>
+                <a:ea typeface="B Nazanin"/>
+                <a:cs typeface="B Nazanin"/>
               </a:defRPr>
             </a:pPr>
             <a:r>
               <a:rPr lang="fa-IR" sz="1700" b="1">
-                <a:latin typeface="B Nazanin"/>
-                <a:ea typeface="B Nazanin"/>
-                <a:cs typeface="B Nazanin"/>
-                <a:solidFill>
-                  <a:srgbClr val="F4F6FB"/>
-                </a:solidFill>
+                <a:solidFill>
+                  <a:srgbClr val="F4F6FB"/>
+                </a:solidFill>
+                <a:latin typeface="B Nazanin"/>
+                <a:ea typeface="B Nazanin"/>
+                <a:cs typeface="B Nazanin"/>
               </a:rPr>
               <a:t>۴۹٫۹۳٪</a:t>
             </a:r>
@@ -3088,22 +3088,22 @@
           <a:p>
             <a:pPr algn="r" rtl="1" marL="0" indent="0">
               <a:defRPr lang="fa-IR" sz="1700" b="1">
-                <a:latin typeface="B Nazanin"/>
-                <a:ea typeface="B Nazanin"/>
-                <a:cs typeface="B Nazanin"/>
-                <a:solidFill>
-                  <a:srgbClr val="F4F6FB"/>
-                </a:solidFill>
+                <a:solidFill>
+                  <a:srgbClr val="F4F6FB"/>
+                </a:solidFill>
+                <a:latin typeface="B Nazanin"/>
+                <a:ea typeface="B Nazanin"/>
+                <a:cs typeface="B Nazanin"/>
               </a:defRPr>
             </a:pPr>
             <a:r>
               <a:rPr lang="fa-IR" sz="1700" b="1">
-                <a:latin typeface="B Nazanin"/>
-                <a:ea typeface="B Nazanin"/>
-                <a:cs typeface="B Nazanin"/>
-                <a:solidFill>
-                  <a:srgbClr val="F4F6FB"/>
-                </a:solidFill>
+                <a:solidFill>
+                  <a:srgbClr val="F4F6FB"/>
+                </a:solidFill>
+                <a:latin typeface="B Nazanin"/>
+                <a:ea typeface="B Nazanin"/>
+                <a:cs typeface="B Nazanin"/>
               </a:rPr>
               <a:t>DFA1 جاری</a:t>
             </a:r>
@@ -3162,22 +3162,22 @@
           <a:p>
             <a:pPr algn="ctr" rtl="1" marL="0" indent="0">
               <a:defRPr lang="fa-IR" sz="1700" b="1">
-                <a:latin typeface="B Nazanin"/>
-                <a:ea typeface="B Nazanin"/>
-                <a:cs typeface="B Nazanin"/>
-                <a:solidFill>
-                  <a:srgbClr val="F4F6FB"/>
-                </a:solidFill>
+                <a:solidFill>
+                  <a:srgbClr val="F4F6FB"/>
+                </a:solidFill>
+                <a:latin typeface="B Nazanin"/>
+                <a:ea typeface="B Nazanin"/>
+                <a:cs typeface="B Nazanin"/>
               </a:defRPr>
             </a:pPr>
             <a:r>
               <a:rPr lang="fa-IR" sz="1700" b="1">
-                <a:latin typeface="B Nazanin"/>
-                <a:ea typeface="B Nazanin"/>
-                <a:cs typeface="B Nazanin"/>
-                <a:solidFill>
-                  <a:srgbClr val="F4F6FB"/>
-                </a:solidFill>
+                <a:solidFill>
+                  <a:srgbClr val="F4F6FB"/>
+                </a:solidFill>
+                <a:latin typeface="B Nazanin"/>
+                <a:ea typeface="B Nazanin"/>
+                <a:cs typeface="B Nazanin"/>
               </a:rPr>
               <a:t>۵۰٫۸۲٪</a:t>
             </a:r>
@@ -3236,22 +3236,22 @@
           <a:p>
             <a:pPr algn="ctr" rtl="1" marL="0" indent="0">
               <a:defRPr lang="fa-IR" sz="1700" b="1">
-                <a:latin typeface="B Nazanin"/>
-                <a:ea typeface="B Nazanin"/>
-                <a:cs typeface="B Nazanin"/>
-                <a:solidFill>
-                  <a:srgbClr val="F4F6FB"/>
-                </a:solidFill>
+                <a:solidFill>
+                  <a:srgbClr val="F4F6FB"/>
+                </a:solidFill>
+                <a:latin typeface="B Nazanin"/>
+                <a:ea typeface="B Nazanin"/>
+                <a:cs typeface="B Nazanin"/>
               </a:defRPr>
             </a:pPr>
             <a:r>
               <a:rPr lang="fa-IR" sz="1700" b="1">
-                <a:latin typeface="B Nazanin"/>
-                <a:ea typeface="B Nazanin"/>
-                <a:cs typeface="B Nazanin"/>
-                <a:solidFill>
-                  <a:srgbClr val="F4F6FB"/>
-                </a:solidFill>
+                <a:solidFill>
+                  <a:srgbClr val="F4F6FB"/>
+                </a:solidFill>
+                <a:latin typeface="B Nazanin"/>
+                <a:ea typeface="B Nazanin"/>
+                <a:cs typeface="B Nazanin"/>
               </a:rPr>
               <a:t>۴۸٫۷۸٪</a:t>
             </a:r>
@@ -3310,22 +3310,22 @@
           <a:p>
             <a:pPr algn="ctr" rtl="1" marL="0" indent="0">
               <a:defRPr lang="fa-IR" sz="1700" b="1">
-                <a:latin typeface="B Nazanin"/>
-                <a:ea typeface="B Nazanin"/>
-                <a:cs typeface="B Nazanin"/>
-                <a:solidFill>
-                  <a:srgbClr val="F4F6FB"/>
-                </a:solidFill>
+                <a:solidFill>
+                  <a:srgbClr val="F4F6FB"/>
+                </a:solidFill>
+                <a:latin typeface="B Nazanin"/>
+                <a:ea typeface="B Nazanin"/>
+                <a:cs typeface="B Nazanin"/>
               </a:defRPr>
             </a:pPr>
             <a:r>
               <a:rPr lang="fa-IR" sz="1700" b="1">
-                <a:latin typeface="B Nazanin"/>
-                <a:ea typeface="B Nazanin"/>
-                <a:cs typeface="B Nazanin"/>
-                <a:solidFill>
-                  <a:srgbClr val="F4F6FB"/>
-                </a:solidFill>
+                <a:solidFill>
+                  <a:srgbClr val="F4F6FB"/>
+                </a:solidFill>
+                <a:latin typeface="B Nazanin"/>
+                <a:ea typeface="B Nazanin"/>
+                <a:cs typeface="B Nazanin"/>
               </a:rPr>
               <a:t>۴۷٫۵۲٪</a:t>
             </a:r>
@@ -3384,22 +3384,22 @@
           <a:p>
             <a:pPr algn="ctr" rtl="1" marL="0" indent="0">
               <a:defRPr lang="fa-IR" sz="1700" b="1">
-                <a:latin typeface="B Nazanin"/>
-                <a:ea typeface="B Nazanin"/>
-                <a:cs typeface="B Nazanin"/>
-                <a:solidFill>
-                  <a:srgbClr val="F4F6FB"/>
-                </a:solidFill>
+                <a:solidFill>
+                  <a:srgbClr val="F4F6FB"/>
+                </a:solidFill>
+                <a:latin typeface="B Nazanin"/>
+                <a:ea typeface="B Nazanin"/>
+                <a:cs typeface="B Nazanin"/>
               </a:defRPr>
             </a:pPr>
             <a:r>
               <a:rPr lang="fa-IR" sz="1700" b="1">
-                <a:latin typeface="B Nazanin"/>
-                <a:ea typeface="B Nazanin"/>
-                <a:cs typeface="B Nazanin"/>
-                <a:solidFill>
-                  <a:srgbClr val="F4F6FB"/>
-                </a:solidFill>
+                <a:solidFill>
+                  <a:srgbClr val="F4F6FB"/>
+                </a:solidFill>
+                <a:latin typeface="B Nazanin"/>
+                <a:ea typeface="B Nazanin"/>
+                <a:cs typeface="B Nazanin"/>
               </a:rPr>
               <a:t>۴۷٫۳۱٪</a:t>
             </a:r>
@@ -3458,22 +3458,22 @@
           <a:p>
             <a:pPr algn="r" rtl="1" marL="0" indent="0">
               <a:defRPr lang="fa-IR" sz="1700" b="1">
-                <a:latin typeface="B Nazanin"/>
-                <a:ea typeface="B Nazanin"/>
-                <a:cs typeface="B Nazanin"/>
-                <a:solidFill>
-                  <a:srgbClr val="F4F6FB"/>
-                </a:solidFill>
+                <a:solidFill>
+                  <a:srgbClr val="F4F6FB"/>
+                </a:solidFill>
+                <a:latin typeface="B Nazanin"/>
+                <a:ea typeface="B Nazanin"/>
+                <a:cs typeface="B Nazanin"/>
               </a:defRPr>
             </a:pPr>
             <a:r>
               <a:rPr lang="fa-IR" sz="1700" b="1">
-                <a:latin typeface="B Nazanin"/>
-                <a:ea typeface="B Nazanin"/>
-                <a:cs typeface="B Nazanin"/>
-                <a:solidFill>
-                  <a:srgbClr val="F4F6FB"/>
-                </a:solidFill>
+                <a:solidFill>
+                  <a:srgbClr val="F4F6FB"/>
+                </a:solidFill>
+                <a:latin typeface="B Nazanin"/>
+                <a:ea typeface="B Nazanin"/>
+                <a:cs typeface="B Nazanin"/>
               </a:rPr>
               <a:t>رژیم مقاوم</a:t>
             </a:r>
@@ -3532,22 +3532,22 @@
           <a:p>
             <a:pPr algn="ctr" rtl="1" marL="0" indent="0">
               <a:defRPr lang="fa-IR" sz="1700" b="1">
-                <a:latin typeface="B Nazanin"/>
-                <a:ea typeface="B Nazanin"/>
-                <a:cs typeface="B Nazanin"/>
-                <a:solidFill>
-                  <a:srgbClr val="F4F6FB"/>
-                </a:solidFill>
+                <a:solidFill>
+                  <a:srgbClr val="F4F6FB"/>
+                </a:solidFill>
+                <a:latin typeface="B Nazanin"/>
+                <a:ea typeface="B Nazanin"/>
+                <a:cs typeface="B Nazanin"/>
               </a:defRPr>
             </a:pPr>
             <a:r>
               <a:rPr lang="fa-IR" sz="1700" b="1">
-                <a:latin typeface="B Nazanin"/>
-                <a:ea typeface="B Nazanin"/>
-                <a:cs typeface="B Nazanin"/>
-                <a:solidFill>
-                  <a:srgbClr val="F4F6FB"/>
-                </a:solidFill>
+                <a:solidFill>
+                  <a:srgbClr val="F4F6FB"/>
+                </a:solidFill>
+                <a:latin typeface="B Nazanin"/>
+                <a:ea typeface="B Nazanin"/>
+                <a:cs typeface="B Nazanin"/>
               </a:rPr>
               <a:t>۴۹٫۴۹٪</a:t>
             </a:r>
@@ -3606,22 +3606,22 @@
           <a:p>
             <a:pPr algn="ctr" rtl="1" marL="0" indent="0">
               <a:defRPr lang="fa-IR" sz="1700" b="1">
-                <a:latin typeface="B Nazanin"/>
-                <a:ea typeface="B Nazanin"/>
-                <a:cs typeface="B Nazanin"/>
                 <a:solidFill>
                   <a:srgbClr val="08101F"/>
                 </a:solidFill>
+                <a:latin typeface="B Nazanin"/>
+                <a:ea typeface="B Nazanin"/>
+                <a:cs typeface="B Nazanin"/>
               </a:defRPr>
             </a:pPr>
             <a:r>
               <a:rPr lang="fa-IR" sz="1700" b="1">
-                <a:latin typeface="B Nazanin"/>
-                <a:ea typeface="B Nazanin"/>
-                <a:cs typeface="B Nazanin"/>
                 <a:solidFill>
                   <a:srgbClr val="08101F"/>
                 </a:solidFill>
+                <a:latin typeface="B Nazanin"/>
+                <a:ea typeface="B Nazanin"/>
+                <a:cs typeface="B Nazanin"/>
               </a:rPr>
               <a:t>۵۱٫۰۲٪</a:t>
             </a:r>
@@ -3680,22 +3680,22 @@
           <a:p>
             <a:pPr algn="ctr" rtl="1" marL="0" indent="0">
               <a:defRPr lang="fa-IR" sz="1700" b="1">
-                <a:latin typeface="B Nazanin"/>
-                <a:ea typeface="B Nazanin"/>
-                <a:cs typeface="B Nazanin"/>
-                <a:solidFill>
-                  <a:srgbClr val="F4F6FB"/>
-                </a:solidFill>
+                <a:solidFill>
+                  <a:srgbClr val="F4F6FB"/>
+                </a:solidFill>
+                <a:latin typeface="B Nazanin"/>
+                <a:ea typeface="B Nazanin"/>
+                <a:cs typeface="B Nazanin"/>
               </a:defRPr>
             </a:pPr>
             <a:r>
               <a:rPr lang="fa-IR" sz="1700" b="1">
-                <a:latin typeface="B Nazanin"/>
-                <a:ea typeface="B Nazanin"/>
-                <a:cs typeface="B Nazanin"/>
-                <a:solidFill>
-                  <a:srgbClr val="F4F6FB"/>
-                </a:solidFill>
+                <a:solidFill>
+                  <a:srgbClr val="F4F6FB"/>
+                </a:solidFill>
+                <a:latin typeface="B Nazanin"/>
+                <a:ea typeface="B Nazanin"/>
+                <a:cs typeface="B Nazanin"/>
               </a:rPr>
               <a:t>۴۷٫۶۴٪</a:t>
             </a:r>
@@ -3754,22 +3754,22 @@
           <a:p>
             <a:pPr algn="ctr" rtl="1" marL="0" indent="0">
               <a:defRPr lang="fa-IR" sz="1700" b="1">
-                <a:latin typeface="B Nazanin"/>
-                <a:ea typeface="B Nazanin"/>
-                <a:cs typeface="B Nazanin"/>
-                <a:solidFill>
-                  <a:srgbClr val="F4F6FB"/>
-                </a:solidFill>
+                <a:solidFill>
+                  <a:srgbClr val="F4F6FB"/>
+                </a:solidFill>
+                <a:latin typeface="B Nazanin"/>
+                <a:ea typeface="B Nazanin"/>
+                <a:cs typeface="B Nazanin"/>
               </a:defRPr>
             </a:pPr>
             <a:r>
               <a:rPr lang="fa-IR" sz="1700" b="1">
-                <a:latin typeface="B Nazanin"/>
-                <a:ea typeface="B Nazanin"/>
-                <a:cs typeface="B Nazanin"/>
-                <a:solidFill>
-                  <a:srgbClr val="F4F6FB"/>
-                </a:solidFill>
+                <a:solidFill>
+                  <a:srgbClr val="F4F6FB"/>
+                </a:solidFill>
+                <a:latin typeface="B Nazanin"/>
+                <a:ea typeface="B Nazanin"/>
+                <a:cs typeface="B Nazanin"/>
               </a:rPr>
               <a:t>۵۰٫۷۸٪</a:t>
             </a:r>
@@ -3806,22 +3806,22 @@
           <a:p>
             <a:pPr algn="ctr" rtl="1" marL="0" indent="0">
               <a:defRPr lang="fa-IR" sz="1600" b="1">
-                <a:latin typeface="B Nazanin"/>
-                <a:ea typeface="B Nazanin"/>
-                <a:cs typeface="B Nazanin"/>
                 <a:solidFill>
                   <a:srgbClr val="E0B24A"/>
                 </a:solidFill>
+                <a:latin typeface="B Nazanin"/>
+                <a:ea typeface="B Nazanin"/>
+                <a:cs typeface="B Nazanin"/>
               </a:defRPr>
             </a:pPr>
             <a:r>
               <a:rPr lang="fa-IR" sz="1600" b="1">
-                <a:latin typeface="B Nazanin"/>
-                <a:ea typeface="B Nazanin"/>
-                <a:cs typeface="B Nazanin"/>
                 <a:solidFill>
                   <a:srgbClr val="E0B24A"/>
                 </a:solidFill>
+                <a:latin typeface="B Nazanin"/>
+                <a:ea typeface="B Nazanin"/>
+                <a:cs typeface="B Nazanin"/>
               </a:rPr>
               <a:t>۳ بازو × ۴ افق = ۱۲ آزمایش اصلی | معیار پذیرش: دقت متوازن ۶۰٪ | اصلاح چندآزمونی Holm</a:t>
             </a:r>
@@ -3891,22 +3891,22 @@
           <a:p>
             <a:pPr algn="r" rtl="1" marL="0" indent="0">
               <a:defRPr lang="fa-IR" sz="2700" b="1">
-                <a:latin typeface="B Nazanin"/>
-                <a:ea typeface="B Nazanin"/>
-                <a:cs typeface="B Nazanin"/>
-                <a:solidFill>
-                  <a:srgbClr val="F4F6FB"/>
-                </a:solidFill>
+                <a:solidFill>
+                  <a:srgbClr val="F4F6FB"/>
+                </a:solidFill>
+                <a:latin typeface="B Nazanin"/>
+                <a:ea typeface="B Nazanin"/>
+                <a:cs typeface="B Nazanin"/>
               </a:defRPr>
             </a:pPr>
             <a:r>
               <a:rPr lang="fa-IR" sz="2700" b="1">
-                <a:latin typeface="B Nazanin"/>
-                <a:ea typeface="B Nazanin"/>
-                <a:cs typeface="B Nazanin"/>
-                <a:solidFill>
-                  <a:srgbClr val="F4F6FB"/>
-                </a:solidFill>
+                <a:solidFill>
+                  <a:srgbClr val="F4F6FB"/>
+                </a:solidFill>
+                <a:latin typeface="B Nazanin"/>
+                <a:ea typeface="B Nazanin"/>
+                <a:cs typeface="B Nazanin"/>
               </a:rPr>
               <a:t>۱۲. نتایج آماری اصلی</a:t>
             </a:r>
@@ -3965,22 +3965,22 @@
           <a:p>
             <a:pPr algn="r" rtl="1" marL="0" indent="0">
               <a:defRPr lang="fa-IR" sz="1000" b="0">
-                <a:latin typeface="B Nazanin"/>
-                <a:ea typeface="B Nazanin"/>
-                <a:cs typeface="B Nazanin"/>
                 <a:solidFill>
                   <a:srgbClr val="AAB4C8"/>
                 </a:solidFill>
+                <a:latin typeface="B Nazanin"/>
+                <a:ea typeface="B Nazanin"/>
+                <a:cs typeface="B Nazanin"/>
               </a:defRPr>
             </a:pPr>
             <a:r>
               <a:rPr lang="fa-IR" sz="1000" b="0">
-                <a:latin typeface="B Nazanin"/>
-                <a:ea typeface="B Nazanin"/>
-                <a:cs typeface="B Nazanin"/>
                 <a:solidFill>
                   <a:srgbClr val="AAB4C8"/>
                 </a:solidFill>
+                <a:latin typeface="B Nazanin"/>
+                <a:ea typeface="B Nazanin"/>
+                <a:cs typeface="B Nazanin"/>
               </a:rPr>
               <a:t>ارائه پژوهش | اسلاید 13 | B Nazanin</a:t>
             </a:r>
@@ -4039,22 +4039,22 @@
           <a:p>
             <a:pPr algn="r" rtl="1" marL="0" indent="0">
               <a:defRPr lang="fa-IR" sz="2100" b="1">
-                <a:latin typeface="B Nazanin"/>
-                <a:ea typeface="B Nazanin"/>
-                <a:cs typeface="B Nazanin"/>
                 <a:solidFill>
                   <a:srgbClr val="E0B24A"/>
                 </a:solidFill>
+                <a:latin typeface="B Nazanin"/>
+                <a:ea typeface="B Nazanin"/>
+                <a:cs typeface="B Nazanin"/>
               </a:defRPr>
             </a:pPr>
             <a:r>
               <a:rPr lang="fa-IR" sz="2100" b="1">
-                <a:latin typeface="B Nazanin"/>
-                <a:ea typeface="B Nazanin"/>
-                <a:cs typeface="B Nazanin"/>
                 <a:solidFill>
                   <a:srgbClr val="E0B24A"/>
                 </a:solidFill>
+                <a:latin typeface="B Nazanin"/>
+                <a:ea typeface="B Nazanin"/>
+                <a:cs typeface="B Nazanin"/>
               </a:rPr>
               <a:t>نتیجه مقایسه اصلی</a:t>
             </a:r>
@@ -4091,22 +4091,22 @@
           <a:p>
             <a:pPr algn="r" rtl="1" marL="0" indent="0">
               <a:defRPr lang="fa-IR" sz="1700" b="0">
-                <a:latin typeface="B Nazanin"/>
-                <a:ea typeface="B Nazanin"/>
-                <a:cs typeface="B Nazanin"/>
-                <a:solidFill>
-                  <a:srgbClr val="F4F6FB"/>
-                </a:solidFill>
+                <a:solidFill>
+                  <a:srgbClr val="F4F6FB"/>
+                </a:solidFill>
+                <a:latin typeface="B Nazanin"/>
+                <a:ea typeface="B Nazanin"/>
+                <a:cs typeface="B Nazanin"/>
               </a:defRPr>
             </a:pPr>
             <a:r>
               <a:rPr lang="fa-IR" sz="1700" b="0">
-                <a:latin typeface="B Nazanin"/>
-                <a:ea typeface="B Nazanin"/>
-                <a:cs typeface="B Nazanin"/>
-                <a:solidFill>
-                  <a:srgbClr val="F4F6FB"/>
-                </a:solidFill>
+                <a:solidFill>
+                  <a:srgbClr val="F4F6FB"/>
+                </a:solidFill>
+                <a:latin typeface="B Nazanin"/>
+                <a:ea typeface="B Nazanin"/>
+                <a:cs typeface="B Nazanin"/>
               </a:rPr>
               <a:t>• اختلاف DFA1 − بدون Hurst در هر چهار افق منفی بود.</a:t>
             </a:r>
@@ -4119,22 +4119,22 @@
           <a:p>
             <a:pPr algn="r" rtl="1" marL="0" indent="0">
               <a:defRPr lang="fa-IR" sz="1700" b="0">
-                <a:latin typeface="B Nazanin"/>
-                <a:ea typeface="B Nazanin"/>
-                <a:cs typeface="B Nazanin"/>
-                <a:solidFill>
-                  <a:srgbClr val="F4F6FB"/>
-                </a:solidFill>
+                <a:solidFill>
+                  <a:srgbClr val="F4F6FB"/>
+                </a:solidFill>
+                <a:latin typeface="B Nazanin"/>
+                <a:ea typeface="B Nazanin"/>
+                <a:cs typeface="B Nazanin"/>
               </a:defRPr>
             </a:pPr>
             <a:r>
               <a:rPr lang="fa-IR" sz="1700" b="0">
-                <a:latin typeface="B Nazanin"/>
-                <a:ea typeface="B Nazanin"/>
-                <a:cs typeface="B Nazanin"/>
-                <a:solidFill>
-                  <a:srgbClr val="F4F6FB"/>
-                </a:solidFill>
+                <a:solidFill>
+                  <a:srgbClr val="F4F6FB"/>
+                </a:solidFill>
+                <a:latin typeface="B Nazanin"/>
+                <a:ea typeface="B Nazanin"/>
+                <a:cs typeface="B Nazanin"/>
               </a:rPr>
               <a:t>• بازه‌های اطمینان ۹۵٪ اختلاف، صفر را پوشش دادند.</a:t>
             </a:r>
@@ -4147,22 +4147,22 @@
           <a:p>
             <a:pPr algn="r" rtl="1" marL="0" indent="0">
               <a:defRPr lang="fa-IR" sz="1700" b="0">
-                <a:latin typeface="B Nazanin"/>
-                <a:ea typeface="B Nazanin"/>
-                <a:cs typeface="B Nazanin"/>
-                <a:solidFill>
-                  <a:srgbClr val="F4F6FB"/>
-                </a:solidFill>
+                <a:solidFill>
+                  <a:srgbClr val="F4F6FB"/>
+                </a:solidFill>
+                <a:latin typeface="B Nazanin"/>
+                <a:ea typeface="B Nazanin"/>
+                <a:cs typeface="B Nazanin"/>
               </a:defRPr>
             </a:pPr>
             <a:r>
               <a:rPr lang="fa-IR" sz="1700" b="0">
-                <a:latin typeface="B Nazanin"/>
-                <a:ea typeface="B Nazanin"/>
-                <a:cs typeface="B Nazanin"/>
-                <a:solidFill>
-                  <a:srgbClr val="F4F6FB"/>
-                </a:solidFill>
+                <a:solidFill>
+                  <a:srgbClr val="F4F6FB"/>
+                </a:solidFill>
+                <a:latin typeface="B Nazanin"/>
+                <a:ea typeface="B Nazanin"/>
+                <a:cs typeface="B Nazanin"/>
               </a:rPr>
               <a:t>• p تعدیل‌شده Holm در هر چهار افق حدود ۰٫۴۵ بود.</a:t>
             </a:r>
@@ -4175,22 +4175,22 @@
           <a:p>
             <a:pPr algn="r" rtl="1" marL="0" indent="0">
               <a:defRPr lang="fa-IR" sz="1700" b="0">
-                <a:latin typeface="B Nazanin"/>
-                <a:ea typeface="B Nazanin"/>
-                <a:cs typeface="B Nazanin"/>
-                <a:solidFill>
-                  <a:srgbClr val="F4F6FB"/>
-                </a:solidFill>
+                <a:solidFill>
+                  <a:srgbClr val="F4F6FB"/>
+                </a:solidFill>
+                <a:latin typeface="B Nazanin"/>
+                <a:ea typeface="B Nazanin"/>
+                <a:cs typeface="B Nazanin"/>
               </a:defRPr>
             </a:pPr>
             <a:r>
               <a:rPr lang="fa-IR" sz="1700" b="0">
-                <a:latin typeface="B Nazanin"/>
-                <a:ea typeface="B Nazanin"/>
-                <a:cs typeface="B Nazanin"/>
-                <a:solidFill>
-                  <a:srgbClr val="F4F6FB"/>
-                </a:solidFill>
+                <a:solidFill>
+                  <a:srgbClr val="F4F6FB"/>
+                </a:solidFill>
+                <a:latin typeface="B Nazanin"/>
+                <a:ea typeface="B Nazanin"/>
+                <a:cs typeface="B Nazanin"/>
               </a:rPr>
               <a:t>• هر ۱۲ پیکربندی از دروازه ارتقا عبور نکردند.</a:t>
             </a:r>
@@ -4249,22 +4249,22 @@
           <a:p>
             <a:pPr algn="r" rtl="1" marL="0" indent="0">
               <a:defRPr lang="fa-IR" sz="2100" b="1">
-                <a:latin typeface="B Nazanin"/>
-                <a:ea typeface="B Nazanin"/>
-                <a:cs typeface="B Nazanin"/>
                 <a:solidFill>
                   <a:srgbClr val="21C4B1"/>
                 </a:solidFill>
+                <a:latin typeface="B Nazanin"/>
+                <a:ea typeface="B Nazanin"/>
+                <a:cs typeface="B Nazanin"/>
               </a:defRPr>
             </a:pPr>
             <a:r>
               <a:rPr lang="fa-IR" sz="2100" b="1">
-                <a:latin typeface="B Nazanin"/>
-                <a:ea typeface="B Nazanin"/>
-                <a:cs typeface="B Nazanin"/>
                 <a:solidFill>
                   <a:srgbClr val="21C4B1"/>
                 </a:solidFill>
+                <a:latin typeface="B Nazanin"/>
+                <a:ea typeface="B Nazanin"/>
+                <a:cs typeface="B Nazanin"/>
               </a:rPr>
               <a:t>دقت متوازن (%)</a:t>
             </a:r>
@@ -4301,22 +4301,22 @@
           <a:p>
             <a:pPr algn="r" rtl="1" marL="0" indent="0">
               <a:defRPr lang="fa-IR" sz="1400" b="1">
-                <a:latin typeface="B Nazanin"/>
-                <a:ea typeface="B Nazanin"/>
-                <a:cs typeface="B Nazanin"/>
                 <a:solidFill>
                   <a:srgbClr val="AAB4C8"/>
                 </a:solidFill>
+                <a:latin typeface="B Nazanin"/>
+                <a:ea typeface="B Nazanin"/>
+                <a:cs typeface="B Nazanin"/>
               </a:defRPr>
             </a:pPr>
             <a:r>
               <a:rPr lang="fa-IR" sz="1400" b="1">
-                <a:latin typeface="B Nazanin"/>
-                <a:ea typeface="B Nazanin"/>
-                <a:cs typeface="B Nazanin"/>
                 <a:solidFill>
                   <a:srgbClr val="AAB4C8"/>
                 </a:solidFill>
+                <a:latin typeface="B Nazanin"/>
+                <a:ea typeface="B Nazanin"/>
+                <a:cs typeface="B Nazanin"/>
               </a:rPr>
               <a:t>H1</a:t>
             </a:r>
@@ -4397,22 +4397,22 @@
           <a:p>
             <a:pPr algn="r" rtl="1" marL="0" indent="0">
               <a:defRPr lang="fa-IR" sz="1200" b="0">
-                <a:latin typeface="B Nazanin"/>
-                <a:ea typeface="B Nazanin"/>
-                <a:cs typeface="B Nazanin"/>
-                <a:solidFill>
-                  <a:srgbClr val="F4F6FB"/>
-                </a:solidFill>
+                <a:solidFill>
+                  <a:srgbClr val="F4F6FB"/>
+                </a:solidFill>
+                <a:latin typeface="B Nazanin"/>
+                <a:ea typeface="B Nazanin"/>
+                <a:cs typeface="B Nazanin"/>
               </a:defRPr>
             </a:pPr>
             <a:r>
               <a:rPr lang="fa-IR" sz="1200" b="0">
-                <a:latin typeface="B Nazanin"/>
-                <a:ea typeface="B Nazanin"/>
-                <a:cs typeface="B Nazanin"/>
-                <a:solidFill>
-                  <a:srgbClr val="F4F6FB"/>
-                </a:solidFill>
+                <a:solidFill>
+                  <a:srgbClr val="F4F6FB"/>
+                </a:solidFill>
+                <a:latin typeface="B Nazanin"/>
+                <a:ea typeface="B Nazanin"/>
+                <a:cs typeface="B Nazanin"/>
               </a:rPr>
               <a:t>۵۲٫۳۱ / ۵۰٫۸۲</a:t>
             </a:r>
@@ -4449,22 +4449,22 @@
           <a:p>
             <a:pPr algn="r" rtl="1" marL="0" indent="0">
               <a:defRPr lang="fa-IR" sz="1400" b="1">
-                <a:latin typeface="B Nazanin"/>
-                <a:ea typeface="B Nazanin"/>
-                <a:cs typeface="B Nazanin"/>
                 <a:solidFill>
                   <a:srgbClr val="AAB4C8"/>
                 </a:solidFill>
+                <a:latin typeface="B Nazanin"/>
+                <a:ea typeface="B Nazanin"/>
+                <a:cs typeface="B Nazanin"/>
               </a:defRPr>
             </a:pPr>
             <a:r>
               <a:rPr lang="fa-IR" sz="1400" b="1">
-                <a:latin typeface="B Nazanin"/>
-                <a:ea typeface="B Nazanin"/>
-                <a:cs typeface="B Nazanin"/>
                 <a:solidFill>
                   <a:srgbClr val="AAB4C8"/>
                 </a:solidFill>
+                <a:latin typeface="B Nazanin"/>
+                <a:ea typeface="B Nazanin"/>
+                <a:cs typeface="B Nazanin"/>
               </a:rPr>
               <a:t>H5</a:t>
             </a:r>
@@ -4545,22 +4545,22 @@
           <a:p>
             <a:pPr algn="r" rtl="1" marL="0" indent="0">
               <a:defRPr lang="fa-IR" sz="1200" b="0">
-                <a:latin typeface="B Nazanin"/>
-                <a:ea typeface="B Nazanin"/>
-                <a:cs typeface="B Nazanin"/>
-                <a:solidFill>
-                  <a:srgbClr val="F4F6FB"/>
-                </a:solidFill>
+                <a:solidFill>
+                  <a:srgbClr val="F4F6FB"/>
+                </a:solidFill>
+                <a:latin typeface="B Nazanin"/>
+                <a:ea typeface="B Nazanin"/>
+                <a:cs typeface="B Nazanin"/>
               </a:defRPr>
             </a:pPr>
             <a:r>
               <a:rPr lang="fa-IR" sz="1200" b="0">
-                <a:latin typeface="B Nazanin"/>
-                <a:ea typeface="B Nazanin"/>
-                <a:cs typeface="B Nazanin"/>
-                <a:solidFill>
-                  <a:srgbClr val="F4F6FB"/>
-                </a:solidFill>
+                <a:solidFill>
+                  <a:srgbClr val="F4F6FB"/>
+                </a:solidFill>
+                <a:latin typeface="B Nazanin"/>
+                <a:ea typeface="B Nazanin"/>
+                <a:cs typeface="B Nazanin"/>
               </a:rPr>
               <a:t>۴۹٫۷۲ / ۴۸٫۷۸</a:t>
             </a:r>
@@ -4597,22 +4597,22 @@
           <a:p>
             <a:pPr algn="r" rtl="1" marL="0" indent="0">
               <a:defRPr lang="fa-IR" sz="1400" b="1">
-                <a:latin typeface="B Nazanin"/>
-                <a:ea typeface="B Nazanin"/>
-                <a:cs typeface="B Nazanin"/>
                 <a:solidFill>
                   <a:srgbClr val="AAB4C8"/>
                 </a:solidFill>
+                <a:latin typeface="B Nazanin"/>
+                <a:ea typeface="B Nazanin"/>
+                <a:cs typeface="B Nazanin"/>
               </a:defRPr>
             </a:pPr>
             <a:r>
               <a:rPr lang="fa-IR" sz="1400" b="1">
-                <a:latin typeface="B Nazanin"/>
-                <a:ea typeface="B Nazanin"/>
-                <a:cs typeface="B Nazanin"/>
                 <a:solidFill>
                   <a:srgbClr val="AAB4C8"/>
                 </a:solidFill>
+                <a:latin typeface="B Nazanin"/>
+                <a:ea typeface="B Nazanin"/>
+                <a:cs typeface="B Nazanin"/>
               </a:rPr>
               <a:t>H10</a:t>
             </a:r>
@@ -4693,22 +4693,22 @@
           <a:p>
             <a:pPr algn="r" rtl="1" marL="0" indent="0">
               <a:defRPr lang="fa-IR" sz="1200" b="0">
-                <a:latin typeface="B Nazanin"/>
-                <a:ea typeface="B Nazanin"/>
-                <a:cs typeface="B Nazanin"/>
-                <a:solidFill>
-                  <a:srgbClr val="F4F6FB"/>
-                </a:solidFill>
+                <a:solidFill>
+                  <a:srgbClr val="F4F6FB"/>
+                </a:solidFill>
+                <a:latin typeface="B Nazanin"/>
+                <a:ea typeface="B Nazanin"/>
+                <a:cs typeface="B Nazanin"/>
               </a:defRPr>
             </a:pPr>
             <a:r>
               <a:rPr lang="fa-IR" sz="1200" b="0">
-                <a:latin typeface="B Nazanin"/>
-                <a:ea typeface="B Nazanin"/>
-                <a:cs typeface="B Nazanin"/>
-                <a:solidFill>
-                  <a:srgbClr val="F4F6FB"/>
-                </a:solidFill>
+                <a:solidFill>
+                  <a:srgbClr val="F4F6FB"/>
+                </a:solidFill>
+                <a:latin typeface="B Nazanin"/>
+                <a:ea typeface="B Nazanin"/>
+                <a:cs typeface="B Nazanin"/>
               </a:rPr>
               <a:t>۵۰٫۷۴ / ۴۷٫۵۲</a:t>
             </a:r>
@@ -4745,22 +4745,22 @@
           <a:p>
             <a:pPr algn="r" rtl="1" marL="0" indent="0">
               <a:defRPr lang="fa-IR" sz="1400" b="1">
-                <a:latin typeface="B Nazanin"/>
-                <a:ea typeface="B Nazanin"/>
-                <a:cs typeface="B Nazanin"/>
                 <a:solidFill>
                   <a:srgbClr val="AAB4C8"/>
                 </a:solidFill>
+                <a:latin typeface="B Nazanin"/>
+                <a:ea typeface="B Nazanin"/>
+                <a:cs typeface="B Nazanin"/>
               </a:defRPr>
             </a:pPr>
             <a:r>
               <a:rPr lang="fa-IR" sz="1400" b="1">
-                <a:latin typeface="B Nazanin"/>
-                <a:ea typeface="B Nazanin"/>
-                <a:cs typeface="B Nazanin"/>
                 <a:solidFill>
                   <a:srgbClr val="AAB4C8"/>
                 </a:solidFill>
+                <a:latin typeface="B Nazanin"/>
+                <a:ea typeface="B Nazanin"/>
+                <a:cs typeface="B Nazanin"/>
               </a:rPr>
               <a:t>H20</a:t>
             </a:r>
@@ -4841,22 +4841,22 @@
           <a:p>
             <a:pPr algn="r" rtl="1" marL="0" indent="0">
               <a:defRPr lang="fa-IR" sz="1200" b="0">
-                <a:latin typeface="B Nazanin"/>
-                <a:ea typeface="B Nazanin"/>
-                <a:cs typeface="B Nazanin"/>
-                <a:solidFill>
-                  <a:srgbClr val="F4F6FB"/>
-                </a:solidFill>
+                <a:solidFill>
+                  <a:srgbClr val="F4F6FB"/>
+                </a:solidFill>
+                <a:latin typeface="B Nazanin"/>
+                <a:ea typeface="B Nazanin"/>
+                <a:cs typeface="B Nazanin"/>
               </a:defRPr>
             </a:pPr>
             <a:r>
               <a:rPr lang="fa-IR" sz="1200" b="0">
-                <a:latin typeface="B Nazanin"/>
-                <a:ea typeface="B Nazanin"/>
-                <a:cs typeface="B Nazanin"/>
-                <a:solidFill>
-                  <a:srgbClr val="F4F6FB"/>
-                </a:solidFill>
+                <a:solidFill>
+                  <a:srgbClr val="F4F6FB"/>
+                </a:solidFill>
+                <a:latin typeface="B Nazanin"/>
+                <a:ea typeface="B Nazanin"/>
+                <a:cs typeface="B Nazanin"/>
               </a:rPr>
               <a:t>۴۹٫۹۳ / ۴۷٫۳۱</a:t>
             </a:r>
@@ -4893,22 +4893,22 @@
           <a:p>
             <a:pPr algn="ctr" rtl="1" marL="0" indent="0">
               <a:defRPr lang="fa-IR" sz="1200" b="0">
-                <a:latin typeface="B Nazanin"/>
-                <a:ea typeface="B Nazanin"/>
-                <a:cs typeface="B Nazanin"/>
                 <a:solidFill>
                   <a:srgbClr val="AAB4C8"/>
                 </a:solidFill>
+                <a:latin typeface="B Nazanin"/>
+                <a:ea typeface="B Nazanin"/>
+                <a:cs typeface="B Nazanin"/>
               </a:defRPr>
             </a:pPr>
             <a:r>
               <a:rPr lang="fa-IR" sz="1200" b="0">
-                <a:latin typeface="B Nazanin"/>
-                <a:ea typeface="B Nazanin"/>
-                <a:cs typeface="B Nazanin"/>
                 <a:solidFill>
                   <a:srgbClr val="AAB4C8"/>
                 </a:solidFill>
+                <a:latin typeface="B Nazanin"/>
+                <a:ea typeface="B Nazanin"/>
+                <a:cs typeface="B Nazanin"/>
               </a:rPr>
               <a:t>آبی: بدون Hurst | قرمز: DFA1 جاری</a:t>
             </a:r>
@@ -4978,22 +4978,22 @@
           <a:p>
             <a:pPr algn="r" rtl="1" marL="0" indent="0">
               <a:defRPr lang="fa-IR" sz="2700" b="1">
-                <a:latin typeface="B Nazanin"/>
-                <a:ea typeface="B Nazanin"/>
-                <a:cs typeface="B Nazanin"/>
-                <a:solidFill>
-                  <a:srgbClr val="F4F6FB"/>
-                </a:solidFill>
+                <a:solidFill>
+                  <a:srgbClr val="F4F6FB"/>
+                </a:solidFill>
+                <a:latin typeface="B Nazanin"/>
+                <a:ea typeface="B Nazanin"/>
+                <a:cs typeface="B Nazanin"/>
               </a:defRPr>
             </a:pPr>
             <a:r>
               <a:rPr lang="fa-IR" sz="2700" b="1">
-                <a:latin typeface="B Nazanin"/>
-                <a:ea typeface="B Nazanin"/>
-                <a:cs typeface="B Nazanin"/>
-                <a:solidFill>
-                  <a:srgbClr val="F4F6FB"/>
-                </a:solidFill>
+                <a:solidFill>
+                  <a:srgbClr val="F4F6FB"/>
+                </a:solidFill>
+                <a:latin typeface="B Nazanin"/>
+                <a:ea typeface="B Nazanin"/>
+                <a:cs typeface="B Nazanin"/>
               </a:rPr>
               <a:t>۱۳. ارزیابی اقتصادی و بازپخش MT5</a:t>
             </a:r>
@@ -5052,22 +5052,22 @@
           <a:p>
             <a:pPr algn="r" rtl="1" marL="0" indent="0">
               <a:defRPr lang="fa-IR" sz="1000" b="0">
-                <a:latin typeface="B Nazanin"/>
-                <a:ea typeface="B Nazanin"/>
-                <a:cs typeface="B Nazanin"/>
                 <a:solidFill>
                   <a:srgbClr val="AAB4C8"/>
                 </a:solidFill>
+                <a:latin typeface="B Nazanin"/>
+                <a:ea typeface="B Nazanin"/>
+                <a:cs typeface="B Nazanin"/>
               </a:defRPr>
             </a:pPr>
             <a:r>
               <a:rPr lang="fa-IR" sz="1000" b="0">
-                <a:latin typeface="B Nazanin"/>
-                <a:ea typeface="B Nazanin"/>
-                <a:cs typeface="B Nazanin"/>
                 <a:solidFill>
                   <a:srgbClr val="AAB4C8"/>
                 </a:solidFill>
+                <a:latin typeface="B Nazanin"/>
+                <a:ea typeface="B Nazanin"/>
+                <a:cs typeface="B Nazanin"/>
               </a:rPr>
               <a:t>ارائه پژوهش | اسلاید 14 | B Nazanin</a:t>
             </a:r>
@@ -5104,22 +5104,22 @@
           <a:p>
             <a:pPr algn="ctr" rtl="1" marL="0" indent="0">
               <a:defRPr lang="fa-IR" sz="1700" b="1">
-                <a:latin typeface="B Nazanin"/>
-                <a:ea typeface="B Nazanin"/>
-                <a:cs typeface="B Nazanin"/>
                 <a:solidFill>
                   <a:srgbClr val="E0B24A"/>
                 </a:solidFill>
+                <a:latin typeface="B Nazanin"/>
+                <a:ea typeface="B Nazanin"/>
+                <a:cs typeface="B Nazanin"/>
               </a:defRPr>
             </a:pPr>
             <a:r>
               <a:rPr lang="fa-IR" sz="1700" b="1">
-                <a:latin typeface="B Nazanin"/>
-                <a:ea typeface="B Nazanin"/>
-                <a:cs typeface="B Nazanin"/>
                 <a:solidFill>
                   <a:srgbClr val="E0B24A"/>
                 </a:solidFill>
+                <a:latin typeface="B Nazanin"/>
+                <a:ea typeface="B Nazanin"/>
+                <a:cs typeface="B Nazanin"/>
               </a:rPr>
               <a:t>بازپخش اقتصادی برای سنجش قابلیت اجراست؛ نتیجه آن با دقت آماری یا سودآوری زنده یکی نیست.</a:t>
             </a:r>
@@ -5200,22 +5200,22 @@
           <a:p>
             <a:pPr algn="r" rtl="1" marL="0" indent="0">
               <a:defRPr lang="fa-IR" sz="1700" b="1">
-                <a:latin typeface="B Nazanin"/>
-                <a:ea typeface="B Nazanin"/>
-                <a:cs typeface="B Nazanin"/>
                 <a:solidFill>
                   <a:srgbClr val="62D394"/>
                 </a:solidFill>
+                <a:latin typeface="B Nazanin"/>
+                <a:ea typeface="B Nazanin"/>
+                <a:cs typeface="B Nazanin"/>
               </a:defRPr>
             </a:pPr>
             <a:r>
               <a:rPr lang="fa-IR" sz="1700" b="1">
-                <a:latin typeface="B Nazanin"/>
-                <a:ea typeface="B Nazanin"/>
-                <a:cs typeface="B Nazanin"/>
                 <a:solidFill>
                   <a:srgbClr val="62D394"/>
                 </a:solidFill>
+                <a:latin typeface="B Nazanin"/>
+                <a:ea typeface="B Nazanin"/>
+                <a:cs typeface="B Nazanin"/>
               </a:rPr>
               <a:t>H=۵</a:t>
             </a:r>
@@ -5252,22 +5252,22 @@
           <a:p>
             <a:pPr algn="r" rtl="1" marL="0" indent="0">
               <a:defRPr lang="fa-IR" sz="1400" b="0">
-                <a:latin typeface="B Nazanin"/>
-                <a:ea typeface="B Nazanin"/>
-                <a:cs typeface="B Nazanin"/>
-                <a:solidFill>
-                  <a:srgbClr val="F4F6FB"/>
-                </a:solidFill>
+                <a:solidFill>
+                  <a:srgbClr val="F4F6FB"/>
+                </a:solidFill>
+                <a:latin typeface="B Nazanin"/>
+                <a:ea typeface="B Nazanin"/>
+                <a:cs typeface="B Nazanin"/>
               </a:defRPr>
             </a:pPr>
             <a:r>
               <a:rPr lang="fa-IR" sz="1400" b="0">
-                <a:latin typeface="B Nazanin"/>
-                <a:ea typeface="B Nazanin"/>
-                <a:cs typeface="B Nazanin"/>
-                <a:solidFill>
-                  <a:srgbClr val="F4F6FB"/>
-                </a:solidFill>
+                <a:solidFill>
+                  <a:srgbClr val="F4F6FB"/>
+                </a:solidFill>
+                <a:latin typeface="B Nazanin"/>
+                <a:ea typeface="B Nazanin"/>
+                <a:cs typeface="B Nazanin"/>
               </a:rPr>
               <a:t>سود اسمی</a:t>
             </a:r>
@@ -5280,22 +5280,22 @@
           <a:p>
             <a:pPr algn="r" rtl="1" marL="0" indent="0">
               <a:defRPr lang="fa-IR" sz="1400" b="0">
-                <a:latin typeface="B Nazanin"/>
-                <a:ea typeface="B Nazanin"/>
-                <a:cs typeface="B Nazanin"/>
-                <a:solidFill>
-                  <a:srgbClr val="F4F6FB"/>
-                </a:solidFill>
+                <a:solidFill>
+                  <a:srgbClr val="F4F6FB"/>
+                </a:solidFill>
+                <a:latin typeface="B Nazanin"/>
+                <a:ea typeface="B Nazanin"/>
+                <a:cs typeface="B Nazanin"/>
               </a:defRPr>
             </a:pPr>
             <a:r>
               <a:rPr lang="fa-IR" sz="1400" b="0">
-                <a:latin typeface="B Nazanin"/>
-                <a:ea typeface="B Nazanin"/>
-                <a:cs typeface="B Nazanin"/>
-                <a:solidFill>
-                  <a:srgbClr val="F4F6FB"/>
-                </a:solidFill>
+                <a:solidFill>
+                  <a:srgbClr val="F4F6FB"/>
+                </a:solidFill>
+                <a:latin typeface="B Nazanin"/>
+                <a:ea typeface="B Nazanin"/>
+                <a:cs typeface="B Nazanin"/>
               </a:rPr>
               <a:t>+۳۵٫۷۳ دلار</a:t>
             </a:r>
@@ -5376,22 +5376,22 @@
           <a:p>
             <a:pPr algn="r" rtl="1" marL="0" indent="0">
               <a:defRPr lang="fa-IR" sz="1700" b="1">
-                <a:latin typeface="B Nazanin"/>
-                <a:ea typeface="B Nazanin"/>
-                <a:cs typeface="B Nazanin"/>
                 <a:solidFill>
                   <a:srgbClr val="E0B24A"/>
                 </a:solidFill>
+                <a:latin typeface="B Nazanin"/>
+                <a:ea typeface="B Nazanin"/>
+                <a:cs typeface="B Nazanin"/>
               </a:defRPr>
             </a:pPr>
             <a:r>
               <a:rPr lang="fa-IR" sz="1700" b="1">
-                <a:latin typeface="B Nazanin"/>
-                <a:ea typeface="B Nazanin"/>
-                <a:cs typeface="B Nazanin"/>
                 <a:solidFill>
                   <a:srgbClr val="E0B24A"/>
                 </a:solidFill>
+                <a:latin typeface="B Nazanin"/>
+                <a:ea typeface="B Nazanin"/>
+                <a:cs typeface="B Nazanin"/>
               </a:rPr>
               <a:t>Profit Factor</a:t>
             </a:r>
@@ -5428,22 +5428,22 @@
           <a:p>
             <a:pPr algn="r" rtl="1" marL="0" indent="0">
               <a:defRPr lang="fa-IR" sz="1400" b="0">
-                <a:latin typeface="B Nazanin"/>
-                <a:ea typeface="B Nazanin"/>
-                <a:cs typeface="B Nazanin"/>
-                <a:solidFill>
-                  <a:srgbClr val="F4F6FB"/>
-                </a:solidFill>
+                <a:solidFill>
+                  <a:srgbClr val="F4F6FB"/>
+                </a:solidFill>
+                <a:latin typeface="B Nazanin"/>
+                <a:ea typeface="B Nazanin"/>
+                <a:cs typeface="B Nazanin"/>
               </a:defRPr>
             </a:pPr>
             <a:r>
               <a:rPr lang="fa-IR" sz="1400" b="0">
-                <a:latin typeface="B Nazanin"/>
-                <a:ea typeface="B Nazanin"/>
-                <a:cs typeface="B Nazanin"/>
-                <a:solidFill>
-                  <a:srgbClr val="F4F6FB"/>
-                </a:solidFill>
+                <a:solidFill>
+                  <a:srgbClr val="F4F6FB"/>
+                </a:solidFill>
+                <a:latin typeface="B Nazanin"/>
+                <a:ea typeface="B Nazanin"/>
+                <a:cs typeface="B Nazanin"/>
               </a:rPr>
               <a:t>۱٫۰۱</a:t>
             </a:r>
@@ -5456,22 +5456,22 @@
           <a:p>
             <a:pPr algn="r" rtl="1" marL="0" indent="0">
               <a:defRPr lang="fa-IR" sz="1400" b="0">
-                <a:latin typeface="B Nazanin"/>
-                <a:ea typeface="B Nazanin"/>
-                <a:cs typeface="B Nazanin"/>
-                <a:solidFill>
-                  <a:srgbClr val="F4F6FB"/>
-                </a:solidFill>
+                <a:solidFill>
+                  <a:srgbClr val="F4F6FB"/>
+                </a:solidFill>
+                <a:latin typeface="B Nazanin"/>
+                <a:ea typeface="B Nazanin"/>
+                <a:cs typeface="B Nazanin"/>
               </a:defRPr>
             </a:pPr>
             <a:r>
               <a:rPr lang="fa-IR" sz="1400" b="0">
-                <a:latin typeface="B Nazanin"/>
-                <a:ea typeface="B Nazanin"/>
-                <a:cs typeface="B Nazanin"/>
-                <a:solidFill>
-                  <a:srgbClr val="F4F6FB"/>
-                </a:solidFill>
+                <a:solidFill>
+                  <a:srgbClr val="F4F6FB"/>
+                </a:solidFill>
+                <a:latin typeface="B Nazanin"/>
+                <a:ea typeface="B Nazanin"/>
+                <a:cs typeface="B Nazanin"/>
               </a:rPr>
               <a:t>شاهد ضعیف</a:t>
             </a:r>
@@ -5552,22 +5552,22 @@
           <a:p>
             <a:pPr algn="r" rtl="1" marL="0" indent="0">
               <a:defRPr lang="fa-IR" sz="1700" b="1">
-                <a:latin typeface="B Nazanin"/>
-                <a:ea typeface="B Nazanin"/>
-                <a:cs typeface="B Nazanin"/>
                 <a:solidFill>
                   <a:srgbClr val="21C4B1"/>
                 </a:solidFill>
+                <a:latin typeface="B Nazanin"/>
+                <a:ea typeface="B Nazanin"/>
+                <a:cs typeface="B Nazanin"/>
               </a:defRPr>
             </a:pPr>
             <a:r>
               <a:rPr lang="fa-IR" sz="1700" b="1">
-                <a:latin typeface="B Nazanin"/>
-                <a:ea typeface="B Nazanin"/>
-                <a:cs typeface="B Nazanin"/>
                 <a:solidFill>
                   <a:srgbClr val="21C4B1"/>
                 </a:solidFill>
+                <a:latin typeface="B Nazanin"/>
+                <a:ea typeface="B Nazanin"/>
+                <a:cs typeface="B Nazanin"/>
               </a:rPr>
               <a:t>Sharpe</a:t>
             </a:r>
@@ -5604,22 +5604,22 @@
           <a:p>
             <a:pPr algn="r" rtl="1" marL="0" indent="0">
               <a:defRPr lang="fa-IR" sz="1400" b="0">
-                <a:latin typeface="B Nazanin"/>
-                <a:ea typeface="B Nazanin"/>
-                <a:cs typeface="B Nazanin"/>
-                <a:solidFill>
-                  <a:srgbClr val="F4F6FB"/>
-                </a:solidFill>
+                <a:solidFill>
+                  <a:srgbClr val="F4F6FB"/>
+                </a:solidFill>
+                <a:latin typeface="B Nazanin"/>
+                <a:ea typeface="B Nazanin"/>
+                <a:cs typeface="B Nazanin"/>
               </a:defRPr>
             </a:pPr>
             <a:r>
               <a:rPr lang="fa-IR" sz="1400" b="0">
-                <a:latin typeface="B Nazanin"/>
-                <a:ea typeface="B Nazanin"/>
-                <a:cs typeface="B Nazanin"/>
-                <a:solidFill>
-                  <a:srgbClr val="F4F6FB"/>
-                </a:solidFill>
+                <a:solidFill>
+                  <a:srgbClr val="F4F6FB"/>
+                </a:solidFill>
+                <a:latin typeface="B Nazanin"/>
+                <a:ea typeface="B Nazanin"/>
+                <a:cs typeface="B Nazanin"/>
               </a:rPr>
               <a:t>۰٫۰۱</a:t>
             </a:r>
@@ -5632,22 +5632,22 @@
           <a:p>
             <a:pPr algn="r" rtl="1" marL="0" indent="0">
               <a:defRPr lang="fa-IR" sz="1400" b="0">
-                <a:latin typeface="B Nazanin"/>
-                <a:ea typeface="B Nazanin"/>
-                <a:cs typeface="B Nazanin"/>
-                <a:solidFill>
-                  <a:srgbClr val="F4F6FB"/>
-                </a:solidFill>
+                <a:solidFill>
+                  <a:srgbClr val="F4F6FB"/>
+                </a:solidFill>
+                <a:latin typeface="B Nazanin"/>
+                <a:ea typeface="B Nazanin"/>
+                <a:cs typeface="B Nazanin"/>
               </a:defRPr>
             </a:pPr>
             <a:r>
               <a:rPr lang="fa-IR" sz="1400" b="0">
-                <a:latin typeface="B Nazanin"/>
-                <a:ea typeface="B Nazanin"/>
-                <a:cs typeface="B Nazanin"/>
-                <a:solidFill>
-                  <a:srgbClr val="F4F6FB"/>
-                </a:solidFill>
+                <a:solidFill>
+                  <a:srgbClr val="F4F6FB"/>
+                </a:solidFill>
+                <a:latin typeface="B Nazanin"/>
+                <a:ea typeface="B Nazanin"/>
+                <a:cs typeface="B Nazanin"/>
               </a:rPr>
               <a:t>تقریباً صفر</a:t>
             </a:r>
@@ -5728,22 +5728,22 @@
           <a:p>
             <a:pPr algn="r" rtl="1" marL="0" indent="0">
               <a:defRPr lang="fa-IR" sz="1700" b="1">
-                <a:latin typeface="B Nazanin"/>
-                <a:ea typeface="B Nazanin"/>
-                <a:cs typeface="B Nazanin"/>
                 <a:solidFill>
                   <a:srgbClr val="D96565"/>
                 </a:solidFill>
+                <a:latin typeface="B Nazanin"/>
+                <a:ea typeface="B Nazanin"/>
+                <a:cs typeface="B Nazanin"/>
               </a:defRPr>
             </a:pPr>
             <a:r>
               <a:rPr lang="fa-IR" sz="1700" b="1">
-                <a:latin typeface="B Nazanin"/>
-                <a:ea typeface="B Nazanin"/>
-                <a:cs typeface="B Nazanin"/>
                 <a:solidFill>
                   <a:srgbClr val="D96565"/>
                 </a:solidFill>
+                <a:latin typeface="B Nazanin"/>
+                <a:ea typeface="B Nazanin"/>
+                <a:cs typeface="B Nazanin"/>
               </a:rPr>
               <a:t>افت سرمایه</a:t>
             </a:r>
@@ -5780,22 +5780,22 @@
           <a:p>
             <a:pPr algn="r" rtl="1" marL="0" indent="0">
               <a:defRPr lang="fa-IR" sz="1400" b="0">
-                <a:latin typeface="B Nazanin"/>
-                <a:ea typeface="B Nazanin"/>
-                <a:cs typeface="B Nazanin"/>
-                <a:solidFill>
-                  <a:srgbClr val="F4F6FB"/>
-                </a:solidFill>
+                <a:solidFill>
+                  <a:srgbClr val="F4F6FB"/>
+                </a:solidFill>
+                <a:latin typeface="B Nazanin"/>
+                <a:ea typeface="B Nazanin"/>
+                <a:cs typeface="B Nazanin"/>
               </a:defRPr>
             </a:pPr>
             <a:r>
               <a:rPr lang="fa-IR" sz="1400" b="0">
-                <a:latin typeface="B Nazanin"/>
-                <a:ea typeface="B Nazanin"/>
-                <a:cs typeface="B Nazanin"/>
-                <a:solidFill>
-                  <a:srgbClr val="F4F6FB"/>
-                </a:solidFill>
+                <a:solidFill>
+                  <a:srgbClr val="F4F6FB"/>
+                </a:solidFill>
+                <a:latin typeface="B Nazanin"/>
+                <a:ea typeface="B Nazanin"/>
+                <a:cs typeface="B Nazanin"/>
               </a:rPr>
               <a:t>حدود ۱۷٫۷۴٪</a:t>
             </a:r>
@@ -5854,22 +5854,22 @@
           <a:p>
             <a:pPr algn="r" rtl="1" marL="0" indent="0">
               <a:defRPr lang="fa-IR" sz="1500" b="0">
-                <a:latin typeface="B Nazanin"/>
-                <a:ea typeface="B Nazanin"/>
-                <a:cs typeface="B Nazanin"/>
-                <a:solidFill>
-                  <a:srgbClr val="F4F6FB"/>
-                </a:solidFill>
+                <a:solidFill>
+                  <a:srgbClr val="F4F6FB"/>
+                </a:solidFill>
+                <a:latin typeface="B Nazanin"/>
+                <a:ea typeface="B Nazanin"/>
+                <a:cs typeface="B Nazanin"/>
               </a:defRPr>
             </a:pPr>
             <a:r>
               <a:rPr lang="fa-IR" sz="1500" b="0">
-                <a:latin typeface="B Nazanin"/>
-                <a:ea typeface="B Nazanin"/>
-                <a:cs typeface="B Nazanin"/>
-                <a:solidFill>
-                  <a:srgbClr val="F4F6FB"/>
-                </a:solidFill>
+                <a:solidFill>
+                  <a:srgbClr val="F4F6FB"/>
+                </a:solidFill>
+                <a:latin typeface="B Nazanin"/>
+                <a:ea typeface="B Nazanin"/>
+                <a:cs typeface="B Nazanin"/>
               </a:rPr>
               <a:t>ورود Open روز بعد | زمان‌بندی غیرهم‌پوشان | هزینه رفت‌وبرگشت ۵ واحد پایه | حجم ثابت ۰٫۰۱ لات</a:t>
             </a:r>
@@ -5882,22 +5882,22 @@
           <a:p>
             <a:pPr algn="r" rtl="1" marL="0" indent="0">
               <a:defRPr lang="fa-IR" sz="1500" b="0">
-                <a:latin typeface="B Nazanin"/>
-                <a:ea typeface="B Nazanin"/>
-                <a:cs typeface="B Nazanin"/>
-                <a:solidFill>
-                  <a:srgbClr val="F4F6FB"/>
-                </a:solidFill>
+                <a:solidFill>
+                  <a:srgbClr val="F4F6FB"/>
+                </a:solidFill>
+                <a:latin typeface="B Nazanin"/>
+                <a:ea typeface="B Nazanin"/>
+                <a:cs typeface="B Nazanin"/>
               </a:defRPr>
             </a:pPr>
             <a:r>
               <a:rPr lang="fa-IR" sz="1500" b="0">
-                <a:latin typeface="B Nazanin"/>
-                <a:ea typeface="B Nazanin"/>
-                <a:cs typeface="B Nazanin"/>
-                <a:solidFill>
-                  <a:srgbClr val="F4F6FB"/>
-                </a:solidFill>
+                <a:solidFill>
+                  <a:srgbClr val="F4F6FB"/>
+                </a:solidFill>
+                <a:latin typeface="B Nazanin"/>
+                <a:ea typeface="B Nazanin"/>
+                <a:cs typeface="B Nazanin"/>
               </a:rPr>
               <a:t>افق‌های ۱۰ و ۲۰ روزه زیان‌ده بودند؛ هیچ مدل برای استقرار تأیید نشد.</a:t>
             </a:r>
@@ -5967,22 +5967,22 @@
           <a:p>
             <a:pPr algn="r" rtl="1" marL="0" indent="0">
               <a:defRPr lang="fa-IR" sz="2700" b="1">
-                <a:latin typeface="B Nazanin"/>
-                <a:ea typeface="B Nazanin"/>
-                <a:cs typeface="B Nazanin"/>
-                <a:solidFill>
-                  <a:srgbClr val="F4F6FB"/>
-                </a:solidFill>
+                <a:solidFill>
+                  <a:srgbClr val="F4F6FB"/>
+                </a:solidFill>
+                <a:latin typeface="B Nazanin"/>
+                <a:ea typeface="B Nazanin"/>
+                <a:cs typeface="B Nazanin"/>
               </a:defRPr>
             </a:pPr>
             <a:r>
               <a:rPr lang="fa-IR" sz="2700" b="1">
-                <a:latin typeface="B Nazanin"/>
-                <a:ea typeface="B Nazanin"/>
-                <a:cs typeface="B Nazanin"/>
-                <a:solidFill>
-                  <a:srgbClr val="F4F6FB"/>
-                </a:solidFill>
+                <a:solidFill>
+                  <a:srgbClr val="F4F6FB"/>
+                </a:solidFill>
+                <a:latin typeface="B Nazanin"/>
+                <a:ea typeface="B Nazanin"/>
+                <a:cs typeface="B Nazanin"/>
               </a:rPr>
               <a:t>۱۴. محدودیت‌ها و مرز تفسیر</a:t>
             </a:r>
@@ -6041,22 +6041,22 @@
           <a:p>
             <a:pPr algn="r" rtl="1" marL="0" indent="0">
               <a:defRPr lang="fa-IR" sz="1000" b="0">
-                <a:latin typeface="B Nazanin"/>
-                <a:ea typeface="B Nazanin"/>
-                <a:cs typeface="B Nazanin"/>
                 <a:solidFill>
                   <a:srgbClr val="AAB4C8"/>
                 </a:solidFill>
+                <a:latin typeface="B Nazanin"/>
+                <a:ea typeface="B Nazanin"/>
+                <a:cs typeface="B Nazanin"/>
               </a:defRPr>
             </a:pPr>
             <a:r>
               <a:rPr lang="fa-IR" sz="1000" b="0">
-                <a:latin typeface="B Nazanin"/>
-                <a:ea typeface="B Nazanin"/>
-                <a:cs typeface="B Nazanin"/>
                 <a:solidFill>
                   <a:srgbClr val="AAB4C8"/>
                 </a:solidFill>
+                <a:latin typeface="B Nazanin"/>
+                <a:ea typeface="B Nazanin"/>
+                <a:cs typeface="B Nazanin"/>
               </a:rPr>
               <a:t>ارائه پژوهش | اسلاید 15 | B Nazanin</a:t>
             </a:r>
@@ -6115,22 +6115,22 @@
           <a:p>
             <a:pPr algn="r" rtl="1" marL="0" indent="0">
               <a:defRPr lang="fa-IR" sz="2100" b="1">
-                <a:latin typeface="B Nazanin"/>
-                <a:ea typeface="B Nazanin"/>
-                <a:cs typeface="B Nazanin"/>
                 <a:solidFill>
                   <a:srgbClr val="E0B24A"/>
                 </a:solidFill>
+                <a:latin typeface="B Nazanin"/>
+                <a:ea typeface="B Nazanin"/>
+                <a:cs typeface="B Nazanin"/>
               </a:defRPr>
             </a:pPr>
             <a:r>
               <a:rPr lang="fa-IR" sz="2100" b="1">
-                <a:latin typeface="B Nazanin"/>
-                <a:ea typeface="B Nazanin"/>
-                <a:cs typeface="B Nazanin"/>
                 <a:solidFill>
                   <a:srgbClr val="E0B24A"/>
                 </a:solidFill>
+                <a:latin typeface="B Nazanin"/>
+                <a:ea typeface="B Nazanin"/>
+                <a:cs typeface="B Nazanin"/>
               </a:rPr>
               <a:t>محدودیت داده و بازار</a:t>
             </a:r>
@@ -6167,22 +6167,22 @@
           <a:p>
             <a:pPr algn="r" rtl="1" marL="0" indent="0">
               <a:defRPr lang="fa-IR" sz="1700" b="0">
-                <a:latin typeface="B Nazanin"/>
-                <a:ea typeface="B Nazanin"/>
-                <a:cs typeface="B Nazanin"/>
-                <a:solidFill>
-                  <a:srgbClr val="F4F6FB"/>
-                </a:solidFill>
+                <a:solidFill>
+                  <a:srgbClr val="F4F6FB"/>
+                </a:solidFill>
+                <a:latin typeface="B Nazanin"/>
+                <a:ea typeface="B Nazanin"/>
+                <a:cs typeface="B Nazanin"/>
               </a:defRPr>
             </a:pPr>
             <a:r>
               <a:rPr lang="fa-IR" sz="1700" b="0">
-                <a:latin typeface="B Nazanin"/>
-                <a:ea typeface="B Nazanin"/>
-                <a:cs typeface="B Nazanin"/>
-                <a:solidFill>
-                  <a:srgbClr val="F4F6FB"/>
-                </a:solidFill>
+                <a:solidFill>
+                  <a:srgbClr val="F4F6FB"/>
+                </a:solidFill>
+                <a:latin typeface="B Nazanin"/>
+                <a:ea typeface="B Nazanin"/>
+                <a:cs typeface="B Nazanin"/>
               </a:rPr>
               <a:t>• یک نماد، یک feed و تناوب روزانه</a:t>
             </a:r>
@@ -6195,22 +6195,22 @@
           <a:p>
             <a:pPr algn="r" rtl="1" marL="0" indent="0">
               <a:defRPr lang="fa-IR" sz="1700" b="0">
-                <a:latin typeface="B Nazanin"/>
-                <a:ea typeface="B Nazanin"/>
-                <a:cs typeface="B Nazanin"/>
-                <a:solidFill>
-                  <a:srgbClr val="F4F6FB"/>
-                </a:solidFill>
+                <a:solidFill>
+                  <a:srgbClr val="F4F6FB"/>
+                </a:solidFill>
+                <a:latin typeface="B Nazanin"/>
+                <a:ea typeface="B Nazanin"/>
+                <a:cs typeface="B Nazanin"/>
               </a:defRPr>
             </a:pPr>
             <a:r>
               <a:rPr lang="fa-IR" sz="1700" b="0">
-                <a:latin typeface="B Nazanin"/>
-                <a:ea typeface="B Nazanin"/>
-                <a:cs typeface="B Nazanin"/>
-                <a:solidFill>
-                  <a:srgbClr val="F4F6FB"/>
-                </a:solidFill>
+                <a:solidFill>
+                  <a:srgbClr val="F4F6FB"/>
+                </a:solidFill>
+                <a:latin typeface="B Nazanin"/>
+                <a:ea typeface="B Nazanin"/>
+                <a:cs typeface="B Nazanin"/>
               </a:rPr>
               <a:t>• Tick Volume به‌جای حجم متمرکز</a:t>
             </a:r>
@@ -6223,22 +6223,22 @@
           <a:p>
             <a:pPr algn="r" rtl="1" marL="0" indent="0">
               <a:defRPr lang="fa-IR" sz="1700" b="0">
-                <a:latin typeface="B Nazanin"/>
-                <a:ea typeface="B Nazanin"/>
-                <a:cs typeface="B Nazanin"/>
-                <a:solidFill>
-                  <a:srgbClr val="F4F6FB"/>
-                </a:solidFill>
+                <a:solidFill>
+                  <a:srgbClr val="F4F6FB"/>
+                </a:solidFill>
+                <a:latin typeface="B Nazanin"/>
+                <a:ea typeface="B Nazanin"/>
+                <a:cs typeface="B Nazanin"/>
               </a:defRPr>
             </a:pPr>
             <a:r>
               <a:rPr lang="fa-IR" sz="1700" b="0">
-                <a:latin typeface="B Nazanin"/>
-                <a:ea typeface="B Nazanin"/>
-                <a:cs typeface="B Nazanin"/>
-                <a:solidFill>
-                  <a:srgbClr val="F4F6FB"/>
-                </a:solidFill>
+                <a:solidFill>
+                  <a:srgbClr val="F4F6FB"/>
+                </a:solidFill>
+                <a:latin typeface="B Nazanin"/>
+                <a:ea typeface="B Nazanin"/>
+                <a:cs typeface="B Nazanin"/>
               </a:rPr>
               <a:t>• حساسیت به منطقه زمانی و مرز کندل</a:t>
             </a:r>
@@ -6251,22 +6251,22 @@
           <a:p>
             <a:pPr algn="r" rtl="1" marL="0" indent="0">
               <a:defRPr lang="fa-IR" sz="1700" b="0">
-                <a:latin typeface="B Nazanin"/>
-                <a:ea typeface="B Nazanin"/>
-                <a:cs typeface="B Nazanin"/>
-                <a:solidFill>
-                  <a:srgbClr val="F4F6FB"/>
-                </a:solidFill>
+                <a:solidFill>
+                  <a:srgbClr val="F4F6FB"/>
+                </a:solidFill>
+                <a:latin typeface="B Nazanin"/>
+                <a:ea typeface="B Nazanin"/>
+                <a:cs typeface="B Nazanin"/>
               </a:defRPr>
             </a:pPr>
             <a:r>
               <a:rPr lang="fa-IR" sz="1700" b="0">
-                <a:latin typeface="B Nazanin"/>
-                <a:ea typeface="B Nazanin"/>
-                <a:cs typeface="B Nazanin"/>
-                <a:solidFill>
-                  <a:srgbClr val="F4F6FB"/>
-                </a:solidFill>
+                <a:solidFill>
+                  <a:srgbClr val="F4F6FB"/>
+                </a:solidFill>
+                <a:latin typeface="B Nazanin"/>
+                <a:ea typeface="B Nazanin"/>
+                <a:cs typeface="B Nazanin"/>
               </a:rPr>
               <a:t>• حساسیت کامل به برآوردگرهای جایگزین هنوز انجام نشده است.</a:t>
             </a:r>
@@ -6325,22 +6325,22 @@
           <a:p>
             <a:pPr algn="r" rtl="1" marL="0" indent="0">
               <a:defRPr lang="fa-IR" sz="2100" b="1">
-                <a:latin typeface="B Nazanin"/>
-                <a:ea typeface="B Nazanin"/>
-                <a:cs typeface="B Nazanin"/>
                 <a:solidFill>
                   <a:srgbClr val="21C4B1"/>
                 </a:solidFill>
+                <a:latin typeface="B Nazanin"/>
+                <a:ea typeface="B Nazanin"/>
+                <a:cs typeface="B Nazanin"/>
               </a:defRPr>
             </a:pPr>
             <a:r>
               <a:rPr lang="fa-IR" sz="2100" b="1">
-                <a:latin typeface="B Nazanin"/>
-                <a:ea typeface="B Nazanin"/>
-                <a:cs typeface="B Nazanin"/>
                 <a:solidFill>
                   <a:srgbClr val="21C4B1"/>
                 </a:solidFill>
+                <a:latin typeface="B Nazanin"/>
+                <a:ea typeface="B Nazanin"/>
+                <a:cs typeface="B Nazanin"/>
               </a:rPr>
               <a:t>محدودیت ارزیابی و اجرا</a:t>
             </a:r>
@@ -6377,22 +6377,22 @@
           <a:p>
             <a:pPr algn="r" rtl="1" marL="0" indent="0">
               <a:defRPr lang="fa-IR" sz="1700" b="0">
-                <a:latin typeface="B Nazanin"/>
-                <a:ea typeface="B Nazanin"/>
-                <a:cs typeface="B Nazanin"/>
-                <a:solidFill>
-                  <a:srgbClr val="F4F6FB"/>
-                </a:solidFill>
+                <a:solidFill>
+                  <a:srgbClr val="F4F6FB"/>
+                </a:solidFill>
+                <a:latin typeface="B Nazanin"/>
+                <a:ea typeface="B Nazanin"/>
+                <a:cs typeface="B Nazanin"/>
               </a:defRPr>
             </a:pPr>
             <a:r>
               <a:rPr lang="fa-IR" sz="1700" b="0">
-                <a:latin typeface="B Nazanin"/>
-                <a:ea typeface="B Nazanin"/>
-                <a:cs typeface="B Nazanin"/>
-                <a:solidFill>
-                  <a:srgbClr val="F4F6FB"/>
-                </a:solidFill>
+                <a:solidFill>
+                  <a:srgbClr val="F4F6FB"/>
+                </a:solidFill>
+                <a:latin typeface="B Nazanin"/>
+                <a:ea typeface="B Nazanin"/>
+                <a:cs typeface="B Nazanin"/>
               </a:rPr>
               <a:t>• دوره ۲۰۲۳–۲۰۲۶ قبلاً مشاهده شده است.</a:t>
             </a:r>
@@ -6405,22 +6405,22 @@
           <a:p>
             <a:pPr algn="r" rtl="1" marL="0" indent="0">
               <a:defRPr lang="fa-IR" sz="1700" b="0">
-                <a:latin typeface="B Nazanin"/>
-                <a:ea typeface="B Nazanin"/>
-                <a:cs typeface="B Nazanin"/>
-                <a:solidFill>
-                  <a:srgbClr val="F4F6FB"/>
-                </a:solidFill>
+                <a:solidFill>
+                  <a:srgbClr val="F4F6FB"/>
+                </a:solidFill>
+                <a:latin typeface="B Nazanin"/>
+                <a:ea typeface="B Nazanin"/>
+                <a:cs typeface="B Nazanin"/>
               </a:defRPr>
             </a:pPr>
             <a:r>
               <a:rPr lang="fa-IR" sz="1700" b="0">
-                <a:latin typeface="B Nazanin"/>
-                <a:ea typeface="B Nazanin"/>
-                <a:cs typeface="B Nazanin"/>
-                <a:solidFill>
-                  <a:srgbClr val="F4F6FB"/>
-                </a:solidFill>
+                <a:solidFill>
+                  <a:srgbClr val="F4F6FB"/>
+                </a:solidFill>
+                <a:latin typeface="B Nazanin"/>
+                <a:ea typeface="B Nazanin"/>
+                <a:cs typeface="B Nazanin"/>
               </a:rPr>
               <a:t>• MT5 فقط سیگنال فریز‌شده Python را replay می‌کند.</a:t>
             </a:r>
@@ -6433,22 +6433,22 @@
           <a:p>
             <a:pPr algn="r" rtl="1" marL="0" indent="0">
               <a:defRPr lang="fa-IR" sz="1700" b="0">
-                <a:latin typeface="B Nazanin"/>
-                <a:ea typeface="B Nazanin"/>
-                <a:cs typeface="B Nazanin"/>
-                <a:solidFill>
-                  <a:srgbClr val="F4F6FB"/>
-                </a:solidFill>
+                <a:solidFill>
+                  <a:srgbClr val="F4F6FB"/>
+                </a:solidFill>
+                <a:latin typeface="B Nazanin"/>
+                <a:ea typeface="B Nazanin"/>
+                <a:cs typeface="B Nazanin"/>
               </a:defRPr>
             </a:pPr>
             <a:r>
               <a:rPr lang="fa-IR" sz="1700" b="0">
-                <a:latin typeface="B Nazanin"/>
-                <a:ea typeface="B Nazanin"/>
-                <a:cs typeface="B Nazanin"/>
-                <a:solidFill>
-                  <a:srgbClr val="F4F6FB"/>
-                </a:solidFill>
+                <a:solidFill>
+                  <a:srgbClr val="F4F6FB"/>
+                </a:solidFill>
+                <a:latin typeface="B Nazanin"/>
+                <a:ea typeface="B Nazanin"/>
+                <a:cs typeface="B Nazanin"/>
               </a:rPr>
               <a:t>• inference بومی MQL5 و real-tick انجام نشده است.</a:t>
             </a:r>
@@ -6461,22 +6461,22 @@
           <a:p>
             <a:pPr algn="r" rtl="1" marL="0" indent="0">
               <a:defRPr lang="fa-IR" sz="1700" b="0">
-                <a:latin typeface="B Nazanin"/>
-                <a:ea typeface="B Nazanin"/>
-                <a:cs typeface="B Nazanin"/>
-                <a:solidFill>
-                  <a:srgbClr val="F4F6FB"/>
-                </a:solidFill>
+                <a:solidFill>
+                  <a:srgbClr val="F4F6FB"/>
+                </a:solidFill>
+                <a:latin typeface="B Nazanin"/>
+                <a:ea typeface="B Nazanin"/>
+                <a:cs typeface="B Nazanin"/>
               </a:defRPr>
             </a:pPr>
             <a:r>
               <a:rPr lang="fa-IR" sz="1700" b="0">
-                <a:latin typeface="B Nazanin"/>
-                <a:ea typeface="B Nazanin"/>
-                <a:cs typeface="B Nazanin"/>
-                <a:solidFill>
-                  <a:srgbClr val="F4F6FB"/>
-                </a:solidFill>
+                <a:solidFill>
+                  <a:srgbClr val="F4F6FB"/>
+                </a:solidFill>
+                <a:latin typeface="B Nazanin"/>
+                <a:ea typeface="B Nazanin"/>
+                <a:cs typeface="B Nazanin"/>
               </a:rPr>
               <a:t>• نبود شواهد در این نمونه، نبود سیگنال در همه بازارها را اثبات نمی‌کند.</a:t>
             </a:r>
@@ -6546,22 +6546,22 @@
           <a:p>
             <a:pPr algn="r" rtl="1" marL="0" indent="0">
               <a:defRPr lang="fa-IR" sz="2700" b="1">
-                <a:latin typeface="B Nazanin"/>
-                <a:ea typeface="B Nazanin"/>
-                <a:cs typeface="B Nazanin"/>
-                <a:solidFill>
-                  <a:srgbClr val="F4F6FB"/>
-                </a:solidFill>
+                <a:solidFill>
+                  <a:srgbClr val="F4F6FB"/>
+                </a:solidFill>
+                <a:latin typeface="B Nazanin"/>
+                <a:ea typeface="B Nazanin"/>
+                <a:cs typeface="B Nazanin"/>
               </a:defRPr>
             </a:pPr>
             <a:r>
               <a:rPr lang="fa-IR" sz="2700" b="1">
-                <a:latin typeface="B Nazanin"/>
-                <a:ea typeface="B Nazanin"/>
-                <a:cs typeface="B Nazanin"/>
-                <a:solidFill>
-                  <a:srgbClr val="F4F6FB"/>
-                </a:solidFill>
+                <a:solidFill>
+                  <a:srgbClr val="F4F6FB"/>
+                </a:solidFill>
+                <a:latin typeface="B Nazanin"/>
+                <a:ea typeface="B Nazanin"/>
+                <a:cs typeface="B Nazanin"/>
               </a:rPr>
               <a:t>۱۵. جمع‌بندی و پاسخ به پرسش پژوهش</a:t>
             </a:r>
@@ -6620,22 +6620,22 @@
           <a:p>
             <a:pPr algn="r" rtl="1" marL="0" indent="0">
               <a:defRPr lang="fa-IR" sz="1000" b="0">
-                <a:latin typeface="B Nazanin"/>
-                <a:ea typeface="B Nazanin"/>
-                <a:cs typeface="B Nazanin"/>
                 <a:solidFill>
                   <a:srgbClr val="AAB4C8"/>
                 </a:solidFill>
+                <a:latin typeface="B Nazanin"/>
+                <a:ea typeface="B Nazanin"/>
+                <a:cs typeface="B Nazanin"/>
               </a:defRPr>
             </a:pPr>
             <a:r>
               <a:rPr lang="fa-IR" sz="1000" b="0">
-                <a:latin typeface="B Nazanin"/>
-                <a:ea typeface="B Nazanin"/>
-                <a:cs typeface="B Nazanin"/>
                 <a:solidFill>
                   <a:srgbClr val="AAB4C8"/>
                 </a:solidFill>
+                <a:latin typeface="B Nazanin"/>
+                <a:ea typeface="B Nazanin"/>
+                <a:cs typeface="B Nazanin"/>
               </a:rPr>
               <a:t>ارائه پژوهش | اسلاید 16 | B Nazanin</a:t>
             </a:r>
@@ -6694,22 +6694,22 @@
           <a:p>
             <a:pPr algn="ctr" rtl="1" marL="0" indent="0">
               <a:defRPr lang="fa-IR" sz="2400" b="1">
-                <a:latin typeface="B Nazanin"/>
-                <a:ea typeface="B Nazanin"/>
-                <a:cs typeface="B Nazanin"/>
                 <a:solidFill>
                   <a:srgbClr val="E0B24A"/>
                 </a:solidFill>
+                <a:latin typeface="B Nazanin"/>
+                <a:ea typeface="B Nazanin"/>
+                <a:cs typeface="B Nazanin"/>
               </a:defRPr>
             </a:pPr>
             <a:r>
               <a:rPr lang="fa-IR" sz="2400" b="1">
-                <a:latin typeface="B Nazanin"/>
-                <a:ea typeface="B Nazanin"/>
-                <a:cs typeface="B Nazanin"/>
                 <a:solidFill>
                   <a:srgbClr val="E0B24A"/>
                 </a:solidFill>
+                <a:latin typeface="B Nazanin"/>
+                <a:ea typeface="B Nazanin"/>
+                <a:cs typeface="B Nazanin"/>
               </a:rPr>
               <a:t>پاسخ کوتاه: در این داده و این پروتکل، ارزش افزوده پایدار Hurst تأیید نشد.</a:t>
             </a:r>
@@ -6746,22 +6746,22 @@
           <a:p>
             <a:pPr algn="ctr" rtl="1" marL="0" indent="0">
               <a:defRPr lang="fa-IR" sz="1900" b="0">
-                <a:latin typeface="B Nazanin"/>
-                <a:ea typeface="B Nazanin"/>
-                <a:cs typeface="B Nazanin"/>
-                <a:solidFill>
-                  <a:srgbClr val="F4F6FB"/>
-                </a:solidFill>
+                <a:solidFill>
+                  <a:srgbClr val="F4F6FB"/>
+                </a:solidFill>
+                <a:latin typeface="B Nazanin"/>
+                <a:ea typeface="B Nazanin"/>
+                <a:cs typeface="B Nazanin"/>
               </a:defRPr>
             </a:pPr>
             <a:r>
               <a:rPr lang="fa-IR" sz="1900" b="0">
-                <a:latin typeface="B Nazanin"/>
-                <a:ea typeface="B Nazanin"/>
-                <a:cs typeface="B Nazanin"/>
-                <a:solidFill>
-                  <a:srgbClr val="F4F6FB"/>
-                </a:solidFill>
+                <a:solidFill>
+                  <a:srgbClr val="F4F6FB"/>
+                </a:solidFill>
+                <a:latin typeface="B Nazanin"/>
+                <a:ea typeface="B Nazanin"/>
+                <a:cs typeface="B Nazanin"/>
               </a:rPr>
               <a:t>چارچوب پیشنهادی از نظر قرارداد داده، کنترل نشت، تفکیک هدف‌ها و آزمون حذف مؤلفه قابل بازتولید است.</a:t>
             </a:r>
@@ -6774,22 +6774,22 @@
           <a:p>
             <a:pPr algn="ctr" rtl="1" marL="0" indent="0">
               <a:defRPr lang="fa-IR" sz="1900" b="0">
-                <a:latin typeface="B Nazanin"/>
-                <a:ea typeface="B Nazanin"/>
-                <a:cs typeface="B Nazanin"/>
-                <a:solidFill>
-                  <a:srgbClr val="F4F6FB"/>
-                </a:solidFill>
+                <a:solidFill>
+                  <a:srgbClr val="F4F6FB"/>
+                </a:solidFill>
+                <a:latin typeface="B Nazanin"/>
+                <a:ea typeface="B Nazanin"/>
+                <a:cs typeface="B Nazanin"/>
               </a:defRPr>
             </a:pPr>
             <a:r>
               <a:rPr lang="fa-IR" sz="1900" b="0">
-                <a:latin typeface="B Nazanin"/>
-                <a:ea typeface="B Nazanin"/>
-                <a:cs typeface="B Nazanin"/>
-                <a:solidFill>
-                  <a:srgbClr val="F4F6FB"/>
-                </a:solidFill>
+                <a:solidFill>
+                  <a:srgbClr val="F4F6FB"/>
+                </a:solidFill>
+                <a:latin typeface="B Nazanin"/>
+                <a:ea typeface="B Nazanin"/>
+                <a:cs typeface="B Nazanin"/>
               </a:rPr>
               <a:t>اما هیچ مدل یا پیکربندی از معیار پذیرش عبور نکرد و شواهد کافی برای استقرار یا ادعای سودآوری به دست نیامد.</a:t>
             </a:r>
@@ -6848,22 +6848,22 @@
           <a:p>
             <a:pPr algn="ctr" rtl="1" marL="0" indent="0">
               <a:defRPr lang="fa-IR" sz="1600" b="1">
-                <a:latin typeface="B Nazanin"/>
-                <a:ea typeface="B Nazanin"/>
-                <a:cs typeface="B Nazanin"/>
                 <a:solidFill>
                   <a:srgbClr val="08101F"/>
                 </a:solidFill>
+                <a:latin typeface="B Nazanin"/>
+                <a:ea typeface="B Nazanin"/>
+                <a:cs typeface="B Nazanin"/>
               </a:defRPr>
             </a:pPr>
             <a:r>
               <a:rPr lang="fa-IR" sz="1600" b="1">
-                <a:latin typeface="B Nazanin"/>
-                <a:ea typeface="B Nazanin"/>
-                <a:cs typeface="B Nazanin"/>
                 <a:solidFill>
                   <a:srgbClr val="08101F"/>
                 </a:solidFill>
+                <a:latin typeface="B Nazanin"/>
+                <a:ea typeface="B Nazanin"/>
+                <a:cs typeface="B Nazanin"/>
               </a:rPr>
               <a:t>دستاورد اصلی: پروتکل شفاف و قابل ممیزی</a:t>
             </a:r>
@@ -6900,22 +6900,22 @@
           <a:p>
             <a:pPr algn="ctr" rtl="1" marL="0" indent="0">
               <a:defRPr lang="fa-IR" sz="1500" b="0">
-                <a:latin typeface="B Nazanin"/>
-                <a:ea typeface="B Nazanin"/>
-                <a:cs typeface="B Nazanin"/>
                 <a:solidFill>
                   <a:srgbClr val="AAB4C8"/>
                 </a:solidFill>
+                <a:latin typeface="B Nazanin"/>
+                <a:ea typeface="B Nazanin"/>
+                <a:cs typeface="B Nazanin"/>
               </a:defRPr>
             </a:pPr>
             <a:r>
               <a:rPr lang="fa-IR" sz="1500" b="0">
-                <a:latin typeface="B Nazanin"/>
-                <a:ea typeface="B Nazanin"/>
-                <a:cs typeface="B Nazanin"/>
                 <a:solidFill>
                   <a:srgbClr val="AAB4C8"/>
                 </a:solidFill>
+                <a:latin typeface="B Nazanin"/>
+                <a:ea typeface="B Nazanin"/>
+                <a:cs typeface="B Nazanin"/>
               </a:rPr>
               <a:t>این نتیجه منفی، دامنه ادعا را محدود می‌کند؛ نه اینکه همه بازارها و همه برآوردگرهای Hurst را رد کند.</a:t>
             </a:r>
@@ -7007,22 +7007,22 @@
           <a:p>
             <a:pPr algn="r" rtl="1" marL="0" indent="0">
               <a:defRPr lang="fa-IR" sz="1000" b="0">
-                <a:latin typeface="B Nazanin"/>
-                <a:ea typeface="B Nazanin"/>
-                <a:cs typeface="B Nazanin"/>
                 <a:solidFill>
                   <a:srgbClr val="AAB4C8"/>
                 </a:solidFill>
+                <a:latin typeface="B Nazanin"/>
+                <a:ea typeface="B Nazanin"/>
+                <a:cs typeface="B Nazanin"/>
               </a:defRPr>
             </a:pPr>
             <a:r>
               <a:rPr lang="fa-IR" sz="1000" b="0">
-                <a:latin typeface="B Nazanin"/>
-                <a:ea typeface="B Nazanin"/>
-                <a:cs typeface="B Nazanin"/>
                 <a:solidFill>
                   <a:srgbClr val="AAB4C8"/>
                 </a:solidFill>
+                <a:latin typeface="B Nazanin"/>
+                <a:ea typeface="B Nazanin"/>
+                <a:cs typeface="B Nazanin"/>
               </a:rPr>
               <a:t>ارائه پژوهش | اسلاید 17 | B Nazanin</a:t>
             </a:r>
@@ -7081,22 +7081,22 @@
           <a:p>
             <a:pPr algn="ctr" rtl="1" marL="0" indent="0">
               <a:defRPr lang="fa-IR" sz="3400" b="1">
-                <a:latin typeface="B Nazanin"/>
-                <a:ea typeface="B Nazanin"/>
-                <a:cs typeface="B Nazanin"/>
-                <a:solidFill>
-                  <a:srgbClr val="F4F6FB"/>
-                </a:solidFill>
+                <a:solidFill>
+                  <a:srgbClr val="F4F6FB"/>
+                </a:solidFill>
+                <a:latin typeface="B Nazanin"/>
+                <a:ea typeface="B Nazanin"/>
+                <a:cs typeface="B Nazanin"/>
               </a:defRPr>
             </a:pPr>
             <a:r>
               <a:rPr lang="fa-IR" sz="3400" b="1">
-                <a:latin typeface="B Nazanin"/>
-                <a:ea typeface="B Nazanin"/>
-                <a:cs typeface="B Nazanin"/>
-                <a:solidFill>
-                  <a:srgbClr val="F4F6FB"/>
-                </a:solidFill>
+                <a:solidFill>
+                  <a:srgbClr val="F4F6FB"/>
+                </a:solidFill>
+                <a:latin typeface="B Nazanin"/>
+                <a:ea typeface="B Nazanin"/>
+                <a:cs typeface="B Nazanin"/>
               </a:rPr>
               <a:t>سپاس از توجه شما</a:t>
             </a:r>
@@ -7155,22 +7155,22 @@
           <a:p>
             <a:pPr algn="ctr" rtl="1" marL="0" indent="0">
               <a:defRPr lang="fa-IR" sz="2400" b="1">
-                <a:latin typeface="B Nazanin"/>
-                <a:ea typeface="B Nazanin"/>
-                <a:cs typeface="B Nazanin"/>
                 <a:solidFill>
                   <a:srgbClr val="21C4B1"/>
                 </a:solidFill>
+                <a:latin typeface="B Nazanin"/>
+                <a:ea typeface="B Nazanin"/>
+                <a:cs typeface="B Nazanin"/>
               </a:defRPr>
             </a:pPr>
             <a:r>
               <a:rPr lang="fa-IR" sz="2400" b="1">
-                <a:latin typeface="B Nazanin"/>
-                <a:ea typeface="B Nazanin"/>
-                <a:cs typeface="B Nazanin"/>
                 <a:solidFill>
                   <a:srgbClr val="21C4B1"/>
                 </a:solidFill>
+                <a:latin typeface="B Nazanin"/>
+                <a:ea typeface="B Nazanin"/>
+                <a:cs typeface="B Nazanin"/>
               </a:rPr>
               <a:t>پرسش و پاسخ</a:t>
             </a:r>
@@ -7207,22 +7207,22 @@
           <a:p>
             <a:pPr algn="ctr" rtl="1" marL="0" indent="0">
               <a:defRPr lang="fa-IR" sz="1700" b="0">
-                <a:latin typeface="B Nazanin"/>
-                <a:ea typeface="B Nazanin"/>
-                <a:cs typeface="B Nazanin"/>
                 <a:solidFill>
                   <a:srgbClr val="AAB4C8"/>
                 </a:solidFill>
+                <a:latin typeface="B Nazanin"/>
+                <a:ea typeface="B Nazanin"/>
+                <a:cs typeface="B Nazanin"/>
               </a:defRPr>
             </a:pPr>
             <a:r>
               <a:rPr lang="fa-IR" sz="1700" b="0">
-                <a:latin typeface="B Nazanin"/>
-                <a:ea typeface="B Nazanin"/>
-                <a:cs typeface="B Nazanin"/>
                 <a:solidFill>
                   <a:srgbClr val="AAB4C8"/>
                 </a:solidFill>
+                <a:latin typeface="B Nazanin"/>
+                <a:ea typeface="B Nazanin"/>
+                <a:cs typeface="B Nazanin"/>
               </a:rPr>
               <a:t>برای پاسخ به داوران، مرجع عددی ارائه اجرای نهایی</a:t>
             </a:r>
@@ -7235,22 +7235,22 @@
           <a:p>
             <a:pPr algn="ctr" rtl="1" marL="0" indent="0">
               <a:defRPr lang="fa-IR" sz="1700" b="0">
-                <a:latin typeface="B Nazanin"/>
-                <a:ea typeface="B Nazanin"/>
-                <a:cs typeface="B Nazanin"/>
                 <a:solidFill>
                   <a:srgbClr val="AAB4C8"/>
                 </a:solidFill>
+                <a:latin typeface="B Nazanin"/>
+                <a:ea typeface="B Nazanin"/>
+                <a:cs typeface="B Nazanin"/>
               </a:defRPr>
             </a:pPr>
             <a:r>
               <a:rPr lang="fa-IR" sz="1700" b="0">
-                <a:latin typeface="B Nazanin"/>
-                <a:ea typeface="B Nazanin"/>
-                <a:cs typeface="B Nazanin"/>
                 <a:solidFill>
                   <a:srgbClr val="AAB4C8"/>
                 </a:solidFill>
+                <a:latin typeface="B Nazanin"/>
+                <a:ea typeface="B Nazanin"/>
+                <a:cs typeface="B Nazanin"/>
               </a:rPr>
               <a:t>executable_direction_hurst_ablation_v3 است.</a:t>
             </a:r>
@@ -7320,22 +7320,22 @@
           <a:p>
             <a:pPr algn="r" rtl="1" marL="0" indent="0">
               <a:defRPr lang="fa-IR" sz="2700" b="1">
-                <a:latin typeface="B Nazanin"/>
-                <a:ea typeface="B Nazanin"/>
-                <a:cs typeface="B Nazanin"/>
-                <a:solidFill>
-                  <a:srgbClr val="F4F6FB"/>
-                </a:solidFill>
+                <a:solidFill>
+                  <a:srgbClr val="F4F6FB"/>
+                </a:solidFill>
+                <a:latin typeface="B Nazanin"/>
+                <a:ea typeface="B Nazanin"/>
+                <a:cs typeface="B Nazanin"/>
               </a:defRPr>
             </a:pPr>
             <a:r>
               <a:rPr lang="fa-IR" sz="2700" b="1">
-                <a:latin typeface="B Nazanin"/>
-                <a:ea typeface="B Nazanin"/>
-                <a:cs typeface="B Nazanin"/>
-                <a:solidFill>
-                  <a:srgbClr val="F4F6FB"/>
-                </a:solidFill>
+                <a:solidFill>
+                  <a:srgbClr val="F4F6FB"/>
+                </a:solidFill>
+                <a:latin typeface="B Nazanin"/>
+                <a:ea typeface="B Nazanin"/>
+                <a:cs typeface="B Nazanin"/>
               </a:rPr>
               <a:t>۱. بازار مالی و جایگاه طلا در پژوهش</a:t>
             </a:r>
@@ -7394,22 +7394,22 @@
           <a:p>
             <a:pPr algn="r" rtl="1" marL="0" indent="0">
               <a:defRPr lang="fa-IR" sz="1000" b="0">
-                <a:latin typeface="B Nazanin"/>
-                <a:ea typeface="B Nazanin"/>
-                <a:cs typeface="B Nazanin"/>
                 <a:solidFill>
                   <a:srgbClr val="AAB4C8"/>
                 </a:solidFill>
+                <a:latin typeface="B Nazanin"/>
+                <a:ea typeface="B Nazanin"/>
+                <a:cs typeface="B Nazanin"/>
               </a:defRPr>
             </a:pPr>
             <a:r>
               <a:rPr lang="fa-IR" sz="1000" b="0">
-                <a:latin typeface="B Nazanin"/>
-                <a:ea typeface="B Nazanin"/>
-                <a:cs typeface="B Nazanin"/>
                 <a:solidFill>
                   <a:srgbClr val="AAB4C8"/>
                 </a:solidFill>
+                <a:latin typeface="B Nazanin"/>
+                <a:ea typeface="B Nazanin"/>
+                <a:cs typeface="B Nazanin"/>
               </a:rPr>
               <a:t>ارائه پژوهش | اسلاید 2 | B Nazanin</a:t>
             </a:r>
@@ -7468,22 +7468,22 @@
           <a:p>
             <a:pPr algn="r" rtl="1" marL="0" indent="0">
               <a:defRPr lang="fa-IR" sz="2100" b="1">
-                <a:latin typeface="B Nazanin"/>
-                <a:ea typeface="B Nazanin"/>
-                <a:cs typeface="B Nazanin"/>
                 <a:solidFill>
                   <a:srgbClr val="E0B24A"/>
                 </a:solidFill>
+                <a:latin typeface="B Nazanin"/>
+                <a:ea typeface="B Nazanin"/>
+                <a:cs typeface="B Nazanin"/>
               </a:defRPr>
             </a:pPr>
             <a:r>
               <a:rPr lang="fa-IR" sz="2100" b="1">
-                <a:latin typeface="B Nazanin"/>
-                <a:ea typeface="B Nazanin"/>
-                <a:cs typeface="B Nazanin"/>
                 <a:solidFill>
                   <a:srgbClr val="E0B24A"/>
                 </a:solidFill>
+                <a:latin typeface="B Nazanin"/>
+                <a:ea typeface="B Nazanin"/>
+                <a:cs typeface="B Nazanin"/>
               </a:rPr>
               <a:t>بازار مالی چیست؟</a:t>
             </a:r>
@@ -7520,22 +7520,22 @@
           <a:p>
             <a:pPr algn="r" rtl="1" marL="0" indent="0">
               <a:defRPr lang="fa-IR" sz="1700" b="0">
-                <a:latin typeface="B Nazanin"/>
-                <a:ea typeface="B Nazanin"/>
-                <a:cs typeface="B Nazanin"/>
-                <a:solidFill>
-                  <a:srgbClr val="F4F6FB"/>
-                </a:solidFill>
+                <a:solidFill>
+                  <a:srgbClr val="F4F6FB"/>
+                </a:solidFill>
+                <a:latin typeface="B Nazanin"/>
+                <a:ea typeface="B Nazanin"/>
+                <a:cs typeface="B Nazanin"/>
               </a:defRPr>
             </a:pPr>
             <a:r>
               <a:rPr lang="fa-IR" sz="1700" b="0">
-                <a:latin typeface="B Nazanin"/>
-                <a:ea typeface="B Nazanin"/>
-                <a:cs typeface="B Nazanin"/>
-                <a:solidFill>
-                  <a:srgbClr val="F4F6FB"/>
-                </a:solidFill>
+                <a:solidFill>
+                  <a:srgbClr val="F4F6FB"/>
+                </a:solidFill>
+                <a:latin typeface="B Nazanin"/>
+                <a:ea typeface="B Nazanin"/>
+                <a:cs typeface="B Nazanin"/>
               </a:rPr>
               <a:t>• سازوکار مبادله دارایی‌ها و انتقال ریسک</a:t>
             </a:r>
@@ -7548,22 +7548,22 @@
           <a:p>
             <a:pPr algn="r" rtl="1" marL="0" indent="0">
               <a:defRPr lang="fa-IR" sz="1700" b="0">
-                <a:latin typeface="B Nazanin"/>
-                <a:ea typeface="B Nazanin"/>
-                <a:cs typeface="B Nazanin"/>
-                <a:solidFill>
-                  <a:srgbClr val="F4F6FB"/>
-                </a:solidFill>
+                <a:solidFill>
+                  <a:srgbClr val="F4F6FB"/>
+                </a:solidFill>
+                <a:latin typeface="B Nazanin"/>
+                <a:ea typeface="B Nazanin"/>
+                <a:cs typeface="B Nazanin"/>
               </a:defRPr>
             </a:pPr>
             <a:r>
               <a:rPr lang="fa-IR" sz="1700" b="0">
-                <a:latin typeface="B Nazanin"/>
-                <a:ea typeface="B Nazanin"/>
-                <a:cs typeface="B Nazanin"/>
-                <a:solidFill>
-                  <a:srgbClr val="F4F6FB"/>
-                </a:solidFill>
+                <a:solidFill>
+                  <a:srgbClr val="F4F6FB"/>
+                </a:solidFill>
+                <a:latin typeface="B Nazanin"/>
+                <a:ea typeface="B Nazanin"/>
+                <a:cs typeface="B Nazanin"/>
               </a:rPr>
               <a:t>• قیمت‌ها حاصل برهم‌کنش عرضه، تقاضا و اطلاعات‌اند</a:t>
             </a:r>
@@ -7576,22 +7576,22 @@
           <a:p>
             <a:pPr algn="r" rtl="1" marL="0" indent="0">
               <a:defRPr lang="fa-IR" sz="1700" b="0">
-                <a:latin typeface="B Nazanin"/>
-                <a:ea typeface="B Nazanin"/>
-                <a:cs typeface="B Nazanin"/>
-                <a:solidFill>
-                  <a:srgbClr val="F4F6FB"/>
-                </a:solidFill>
+                <a:solidFill>
+                  <a:srgbClr val="F4F6FB"/>
+                </a:solidFill>
+                <a:latin typeface="B Nazanin"/>
+                <a:ea typeface="B Nazanin"/>
+                <a:cs typeface="B Nazanin"/>
               </a:defRPr>
             </a:pPr>
             <a:r>
               <a:rPr lang="fa-IR" sz="1700" b="0">
-                <a:latin typeface="B Nazanin"/>
-                <a:ea typeface="B Nazanin"/>
-                <a:cs typeface="B Nazanin"/>
-                <a:solidFill>
-                  <a:srgbClr val="F4F6FB"/>
-                </a:solidFill>
+                <a:solidFill>
+                  <a:srgbClr val="F4F6FB"/>
+                </a:solidFill>
+                <a:latin typeface="B Nazanin"/>
+                <a:ea typeface="B Nazanin"/>
+                <a:cs typeface="B Nazanin"/>
               </a:rPr>
               <a:t>• عدم‌قطعیت، نوسان و نقدشوندگی در زمان تغییر می‌کنند</a:t>
             </a:r>
@@ -7604,22 +7604,22 @@
           <a:p>
             <a:pPr algn="r" rtl="1" marL="0" indent="0">
               <a:defRPr lang="fa-IR" sz="1700" b="0">
-                <a:latin typeface="B Nazanin"/>
-                <a:ea typeface="B Nazanin"/>
-                <a:cs typeface="B Nazanin"/>
-                <a:solidFill>
-                  <a:srgbClr val="F4F6FB"/>
-                </a:solidFill>
+                <a:solidFill>
+                  <a:srgbClr val="F4F6FB"/>
+                </a:solidFill>
+                <a:latin typeface="B Nazanin"/>
+                <a:ea typeface="B Nazanin"/>
+                <a:cs typeface="B Nazanin"/>
               </a:defRPr>
             </a:pPr>
             <a:r>
               <a:rPr lang="fa-IR" sz="1700" b="0">
-                <a:latin typeface="B Nazanin"/>
-                <a:ea typeface="B Nazanin"/>
-                <a:cs typeface="B Nazanin"/>
-                <a:solidFill>
-                  <a:srgbClr val="F4F6FB"/>
-                </a:solidFill>
+                <a:solidFill>
+                  <a:srgbClr val="F4F6FB"/>
+                </a:solidFill>
+                <a:latin typeface="B Nazanin"/>
+                <a:ea typeface="B Nazanin"/>
+                <a:cs typeface="B Nazanin"/>
               </a:rPr>
               <a:t>• بازده گذشته تضمین‌کننده بازده آینده نیست</a:t>
             </a:r>
@@ -7678,22 +7678,22 @@
           <a:p>
             <a:pPr algn="r" rtl="1" marL="0" indent="0">
               <a:defRPr lang="fa-IR" sz="2100" b="1">
-                <a:latin typeface="B Nazanin"/>
-                <a:ea typeface="B Nazanin"/>
-                <a:cs typeface="B Nazanin"/>
                 <a:solidFill>
                   <a:srgbClr val="21C4B1"/>
                 </a:solidFill>
+                <a:latin typeface="B Nazanin"/>
+                <a:ea typeface="B Nazanin"/>
+                <a:cs typeface="B Nazanin"/>
               </a:defRPr>
             </a:pPr>
             <a:r>
               <a:rPr lang="fa-IR" sz="2100" b="1">
-                <a:latin typeface="B Nazanin"/>
-                <a:ea typeface="B Nazanin"/>
-                <a:cs typeface="B Nazanin"/>
                 <a:solidFill>
                   <a:srgbClr val="21C4B1"/>
                 </a:solidFill>
+                <a:latin typeface="B Nazanin"/>
+                <a:ea typeface="B Nazanin"/>
+                <a:cs typeface="B Nazanin"/>
               </a:rPr>
               <a:t>چرا طلا / XAUUSD؟</a:t>
             </a:r>
@@ -7730,22 +7730,22 @@
           <a:p>
             <a:pPr algn="r" rtl="1" marL="0" indent="0">
               <a:defRPr lang="fa-IR" sz="1700" b="0">
-                <a:latin typeface="B Nazanin"/>
-                <a:ea typeface="B Nazanin"/>
-                <a:cs typeface="B Nazanin"/>
-                <a:solidFill>
-                  <a:srgbClr val="F4F6FB"/>
-                </a:solidFill>
+                <a:solidFill>
+                  <a:srgbClr val="F4F6FB"/>
+                </a:solidFill>
+                <a:latin typeface="B Nazanin"/>
+                <a:ea typeface="B Nazanin"/>
+                <a:cs typeface="B Nazanin"/>
               </a:defRPr>
             </a:pPr>
             <a:r>
               <a:rPr lang="fa-IR" sz="1700" b="0">
-                <a:latin typeface="B Nazanin"/>
-                <a:ea typeface="B Nazanin"/>
-                <a:cs typeface="B Nazanin"/>
-                <a:solidFill>
-                  <a:srgbClr val="F4F6FB"/>
-                </a:solidFill>
+                <a:solidFill>
+                  <a:srgbClr val="F4F6FB"/>
+                </a:solidFill>
+                <a:latin typeface="B Nazanin"/>
+                <a:ea typeface="B Nazanin"/>
+                <a:cs typeface="B Nazanin"/>
               </a:rPr>
               <a:t>طلا هم‌زمان یک دارایی مالی، ذخیره ارزش و ابزار پوشش ریسک است.</a:t>
             </a:r>
@@ -7758,22 +7758,22 @@
           <a:p>
             <a:pPr algn="r" rtl="1" marL="0" indent="0">
               <a:defRPr lang="fa-IR" sz="1700" b="0">
-                <a:latin typeface="B Nazanin"/>
-                <a:ea typeface="B Nazanin"/>
-                <a:cs typeface="B Nazanin"/>
-                <a:solidFill>
-                  <a:srgbClr val="F4F6FB"/>
-                </a:solidFill>
+                <a:solidFill>
+                  <a:srgbClr val="F4F6FB"/>
+                </a:solidFill>
+                <a:latin typeface="B Nazanin"/>
+                <a:ea typeface="B Nazanin"/>
+                <a:cs typeface="B Nazanin"/>
               </a:defRPr>
             </a:pPr>
             <a:r>
               <a:rPr lang="fa-IR" sz="1700" b="0">
-                <a:latin typeface="B Nazanin"/>
-                <a:ea typeface="B Nazanin"/>
-                <a:cs typeface="B Nazanin"/>
-                <a:solidFill>
-                  <a:srgbClr val="F4F6FB"/>
-                </a:solidFill>
+                <a:solidFill>
+                  <a:srgbClr val="F4F6FB"/>
+                </a:solidFill>
+                <a:latin typeface="B Nazanin"/>
+                <a:ea typeface="B Nazanin"/>
+                <a:cs typeface="B Nazanin"/>
               </a:rPr>
               <a:t> </a:t>
             </a:r>
@@ -7786,22 +7786,22 @@
           <a:p>
             <a:pPr algn="r" rtl="1" marL="0" indent="0">
               <a:defRPr lang="fa-IR" sz="1700" b="0">
-                <a:latin typeface="B Nazanin"/>
-                <a:ea typeface="B Nazanin"/>
-                <a:cs typeface="B Nazanin"/>
-                <a:solidFill>
-                  <a:srgbClr val="F4F6FB"/>
-                </a:solidFill>
+                <a:solidFill>
+                  <a:srgbClr val="F4F6FB"/>
+                </a:solidFill>
+                <a:latin typeface="B Nazanin"/>
+                <a:ea typeface="B Nazanin"/>
+                <a:cs typeface="B Nazanin"/>
               </a:defRPr>
             </a:pPr>
             <a:r>
               <a:rPr lang="fa-IR" sz="1700" b="0">
-                <a:latin typeface="B Nazanin"/>
-                <a:ea typeface="B Nazanin"/>
-                <a:cs typeface="B Nazanin"/>
-                <a:solidFill>
-                  <a:srgbClr val="F4F6FB"/>
-                </a:solidFill>
+                <a:solidFill>
+                  <a:srgbClr val="F4F6FB"/>
+                </a:solidFill>
+                <a:latin typeface="B Nazanin"/>
+                <a:ea typeface="B Nazanin"/>
+                <a:cs typeface="B Nazanin"/>
               </a:rPr>
               <a:t>در این مطالعه، XAUUSD با کندل‌های روزانه و قرارداد داده‌ای مشخص بررسی می‌شود؛ بنابراین نتیجه به همین بازار، feed و تناوب محدود است.</a:t>
             </a:r>
@@ -7860,22 +7860,22 @@
           <a:p>
             <a:pPr algn="ctr" rtl="1" marL="0" indent="0">
               <a:defRPr lang="fa-IR" sz="1300" b="1">
-                <a:latin typeface="B Nazanin"/>
-                <a:ea typeface="B Nazanin"/>
-                <a:cs typeface="B Nazanin"/>
                 <a:solidFill>
                   <a:srgbClr val="08101F"/>
                 </a:solidFill>
+                <a:latin typeface="B Nazanin"/>
+                <a:ea typeface="B Nazanin"/>
+                <a:cs typeface="B Nazanin"/>
               </a:defRPr>
             </a:pPr>
             <a:r>
               <a:rPr lang="fa-IR" sz="1300" b="1">
-                <a:latin typeface="B Nazanin"/>
-                <a:ea typeface="B Nazanin"/>
-                <a:cs typeface="B Nazanin"/>
                 <a:solidFill>
                   <a:srgbClr val="08101F"/>
                 </a:solidFill>
+                <a:latin typeface="B Nazanin"/>
+                <a:ea typeface="B Nazanin"/>
+                <a:cs typeface="B Nazanin"/>
               </a:rPr>
               <a:t>هدف: پیش‌بینی جهت، نه توصیه سرمایه‌گذاری</a:t>
             </a:r>
@@ -7945,22 +7945,22 @@
           <a:p>
             <a:pPr algn="r" rtl="1" marL="0" indent="0">
               <a:defRPr lang="fa-IR" sz="2700" b="1">
-                <a:latin typeface="B Nazanin"/>
-                <a:ea typeface="B Nazanin"/>
-                <a:cs typeface="B Nazanin"/>
-                <a:solidFill>
-                  <a:srgbClr val="F4F6FB"/>
-                </a:solidFill>
+                <a:solidFill>
+                  <a:srgbClr val="F4F6FB"/>
+                </a:solidFill>
+                <a:latin typeface="B Nazanin"/>
+                <a:ea typeface="B Nazanin"/>
+                <a:cs typeface="B Nazanin"/>
               </a:defRPr>
             </a:pPr>
             <a:r>
               <a:rPr lang="fa-IR" sz="2700" b="1">
-                <a:latin typeface="B Nazanin"/>
-                <a:ea typeface="B Nazanin"/>
-                <a:cs typeface="B Nazanin"/>
-                <a:solidFill>
-                  <a:srgbClr val="F4F6FB"/>
-                </a:solidFill>
+                <a:solidFill>
+                  <a:srgbClr val="F4F6FB"/>
+                </a:solidFill>
+                <a:latin typeface="B Nazanin"/>
+                <a:ea typeface="B Nazanin"/>
+                <a:cs typeface="B Nazanin"/>
               </a:rPr>
               <a:t>۲. مسئله پژوهش و پرسش اصلی</a:t>
             </a:r>
@@ -8019,22 +8019,22 @@
           <a:p>
             <a:pPr algn="r" rtl="1" marL="0" indent="0">
               <a:defRPr lang="fa-IR" sz="1000" b="0">
-                <a:latin typeface="B Nazanin"/>
-                <a:ea typeface="B Nazanin"/>
-                <a:cs typeface="B Nazanin"/>
                 <a:solidFill>
                   <a:srgbClr val="AAB4C8"/>
                 </a:solidFill>
+                <a:latin typeface="B Nazanin"/>
+                <a:ea typeface="B Nazanin"/>
+                <a:cs typeface="B Nazanin"/>
               </a:defRPr>
             </a:pPr>
             <a:r>
               <a:rPr lang="fa-IR" sz="1000" b="0">
-                <a:latin typeface="B Nazanin"/>
-                <a:ea typeface="B Nazanin"/>
-                <a:cs typeface="B Nazanin"/>
                 <a:solidFill>
                   <a:srgbClr val="AAB4C8"/>
                 </a:solidFill>
+                <a:latin typeface="B Nazanin"/>
+                <a:ea typeface="B Nazanin"/>
+                <a:cs typeface="B Nazanin"/>
               </a:rPr>
               <a:t>ارائه پژوهش | اسلاید 3 | B Nazanin</a:t>
             </a:r>
@@ -8093,22 +8093,22 @@
           <a:p>
             <a:pPr algn="r" rtl="1" marL="0" indent="0">
               <a:defRPr lang="fa-IR" sz="2100" b="1">
-                <a:latin typeface="B Nazanin"/>
-                <a:ea typeface="B Nazanin"/>
-                <a:cs typeface="B Nazanin"/>
                 <a:solidFill>
                   <a:srgbClr val="E0B24A"/>
                 </a:solidFill>
+                <a:latin typeface="B Nazanin"/>
+                <a:ea typeface="B Nazanin"/>
+                <a:cs typeface="B Nazanin"/>
               </a:defRPr>
             </a:pPr>
             <a:r>
               <a:rPr lang="fa-IR" sz="2100" b="1">
-                <a:latin typeface="B Nazanin"/>
-                <a:ea typeface="B Nazanin"/>
-                <a:cs typeface="B Nazanin"/>
                 <a:solidFill>
                   <a:srgbClr val="E0B24A"/>
                 </a:solidFill>
+                <a:latin typeface="B Nazanin"/>
+                <a:ea typeface="B Nazanin"/>
+                <a:cs typeface="B Nazanin"/>
               </a:rPr>
               <a:t>چرا پیش‌بینی جهت طلا دشوار است؟</a:t>
             </a:r>
@@ -8145,22 +8145,22 @@
           <a:p>
             <a:pPr algn="r" rtl="1" marL="0" indent="0">
               <a:defRPr lang="fa-IR" sz="1700" b="0">
-                <a:latin typeface="B Nazanin"/>
-                <a:ea typeface="B Nazanin"/>
-                <a:cs typeface="B Nazanin"/>
-                <a:solidFill>
-                  <a:srgbClr val="F4F6FB"/>
-                </a:solidFill>
+                <a:solidFill>
+                  <a:srgbClr val="F4F6FB"/>
+                </a:solidFill>
+                <a:latin typeface="B Nazanin"/>
+                <a:ea typeface="B Nazanin"/>
+                <a:cs typeface="B Nazanin"/>
               </a:defRPr>
             </a:pPr>
             <a:r>
               <a:rPr lang="fa-IR" sz="1700" b="0">
-                <a:latin typeface="B Nazanin"/>
-                <a:ea typeface="B Nazanin"/>
-                <a:cs typeface="B Nazanin"/>
-                <a:solidFill>
-                  <a:srgbClr val="F4F6FB"/>
-                </a:solidFill>
+                <a:solidFill>
+                  <a:srgbClr val="F4F6FB"/>
+                </a:solidFill>
+                <a:latin typeface="B Nazanin"/>
+                <a:ea typeface="B Nazanin"/>
+                <a:cs typeface="B Nazanin"/>
               </a:rPr>
               <a:t>• بازار غیرایستا و دارای تغییر رژیم است</a:t>
             </a:r>
@@ -8173,22 +8173,22 @@
           <a:p>
             <a:pPr algn="r" rtl="1" marL="0" indent="0">
               <a:defRPr lang="fa-IR" sz="1700" b="0">
-                <a:latin typeface="B Nazanin"/>
-                <a:ea typeface="B Nazanin"/>
-                <a:cs typeface="B Nazanin"/>
-                <a:solidFill>
-                  <a:srgbClr val="F4F6FB"/>
-                </a:solidFill>
+                <a:solidFill>
+                  <a:srgbClr val="F4F6FB"/>
+                </a:solidFill>
+                <a:latin typeface="B Nazanin"/>
+                <a:ea typeface="B Nazanin"/>
+                <a:cs typeface="B Nazanin"/>
               </a:defRPr>
             </a:pPr>
             <a:r>
               <a:rPr lang="fa-IR" sz="1700" b="0">
-                <a:latin typeface="B Nazanin"/>
-                <a:ea typeface="B Nazanin"/>
-                <a:cs typeface="B Nazanin"/>
-                <a:solidFill>
-                  <a:srgbClr val="F4F6FB"/>
-                </a:solidFill>
+                <a:solidFill>
+                  <a:srgbClr val="F4F6FB"/>
+                </a:solidFill>
+                <a:latin typeface="B Nazanin"/>
+                <a:ea typeface="B Nazanin"/>
+                <a:cs typeface="B Nazanin"/>
               </a:rPr>
               <a:t>• نویز زیاد و وابستگی عملکرد به افق زمانی</a:t>
             </a:r>
@@ -8201,22 +8201,22 @@
           <a:p>
             <a:pPr algn="r" rtl="1" marL="0" indent="0">
               <a:defRPr lang="fa-IR" sz="1700" b="0">
-                <a:latin typeface="B Nazanin"/>
-                <a:ea typeface="B Nazanin"/>
-                <a:cs typeface="B Nazanin"/>
-                <a:solidFill>
-                  <a:srgbClr val="F4F6FB"/>
-                </a:solidFill>
+                <a:solidFill>
+                  <a:srgbClr val="F4F6FB"/>
+                </a:solidFill>
+                <a:latin typeface="B Nazanin"/>
+                <a:ea typeface="B Nazanin"/>
+                <a:cs typeface="B Nazanin"/>
               </a:defRPr>
             </a:pPr>
             <a:r>
               <a:rPr lang="fa-IR" sz="1700" b="0">
-                <a:latin typeface="B Nazanin"/>
-                <a:ea typeface="B Nazanin"/>
-                <a:cs typeface="B Nazanin"/>
-                <a:solidFill>
-                  <a:srgbClr val="F4F6FB"/>
-                </a:solidFill>
+                <a:solidFill>
+                  <a:srgbClr val="F4F6FB"/>
+                </a:solidFill>
+                <a:latin typeface="B Nazanin"/>
+                <a:ea typeface="B Nazanin"/>
+                <a:cs typeface="B Nazanin"/>
               </a:rPr>
               <a:t>• هم‌پوشانی برچسب‌ها، خطر نشت ایجاد می‌کند</a:t>
             </a:r>
@@ -8229,22 +8229,22 @@
           <a:p>
             <a:pPr algn="r" rtl="1" marL="0" indent="0">
               <a:defRPr lang="fa-IR" sz="1700" b="0">
-                <a:latin typeface="B Nazanin"/>
-                <a:ea typeface="B Nazanin"/>
-                <a:cs typeface="B Nazanin"/>
-                <a:solidFill>
-                  <a:srgbClr val="F4F6FB"/>
-                </a:solidFill>
+                <a:solidFill>
+                  <a:srgbClr val="F4F6FB"/>
+                </a:solidFill>
+                <a:latin typeface="B Nazanin"/>
+                <a:ea typeface="B Nazanin"/>
+                <a:cs typeface="B Nazanin"/>
               </a:defRPr>
             </a:pPr>
             <a:r>
               <a:rPr lang="fa-IR" sz="1700" b="0">
-                <a:latin typeface="B Nazanin"/>
-                <a:ea typeface="B Nazanin"/>
-                <a:cs typeface="B Nazanin"/>
-                <a:solidFill>
-                  <a:srgbClr val="F4F6FB"/>
-                </a:solidFill>
+                <a:solidFill>
+                  <a:srgbClr val="F4F6FB"/>
+                </a:solidFill>
+                <a:latin typeface="B Nazanin"/>
+                <a:ea typeface="B Nazanin"/>
+                <a:cs typeface="B Nazanin"/>
               </a:rPr>
               <a:t>• اعتبارسنجی تصادفی می‌تواند خوش‌بینی کاذب بسازد</a:t>
             </a:r>
@@ -8257,22 +8257,22 @@
           <a:p>
             <a:pPr algn="r" rtl="1" marL="0" indent="0">
               <a:defRPr lang="fa-IR" sz="1700" b="0">
-                <a:latin typeface="B Nazanin"/>
-                <a:ea typeface="B Nazanin"/>
-                <a:cs typeface="B Nazanin"/>
-                <a:solidFill>
-                  <a:srgbClr val="F4F6FB"/>
-                </a:solidFill>
+                <a:solidFill>
+                  <a:srgbClr val="F4F6FB"/>
+                </a:solidFill>
+                <a:latin typeface="B Nazanin"/>
+                <a:ea typeface="B Nazanin"/>
+                <a:cs typeface="B Nazanin"/>
               </a:defRPr>
             </a:pPr>
             <a:r>
               <a:rPr lang="fa-IR" sz="1700" b="0">
-                <a:latin typeface="B Nazanin"/>
-                <a:ea typeface="B Nazanin"/>
-                <a:cs typeface="B Nazanin"/>
-                <a:solidFill>
-                  <a:srgbClr val="F4F6FB"/>
-                </a:solidFill>
+                <a:solidFill>
+                  <a:srgbClr val="F4F6FB"/>
+                </a:solidFill>
+                <a:latin typeface="B Nazanin"/>
+                <a:ea typeface="B Nazanin"/>
+                <a:cs typeface="B Nazanin"/>
               </a:rPr>
               <a:t>• دقت آماری الزاماً قابلیت اجرای واقعی نیست</a:t>
             </a:r>
@@ -8331,22 +8331,22 @@
           <a:p>
             <a:pPr algn="r" rtl="1" marL="0" indent="0">
               <a:defRPr lang="fa-IR" sz="2100" b="1">
-                <a:latin typeface="B Nazanin"/>
-                <a:ea typeface="B Nazanin"/>
-                <a:cs typeface="B Nazanin"/>
                 <a:solidFill>
                   <a:srgbClr val="21C4B1"/>
                 </a:solidFill>
+                <a:latin typeface="B Nazanin"/>
+                <a:ea typeface="B Nazanin"/>
+                <a:cs typeface="B Nazanin"/>
               </a:defRPr>
             </a:pPr>
             <a:r>
               <a:rPr lang="fa-IR" sz="2100" b="1">
-                <a:latin typeface="B Nazanin"/>
-                <a:ea typeface="B Nazanin"/>
-                <a:cs typeface="B Nazanin"/>
                 <a:solidFill>
                   <a:srgbClr val="21C4B1"/>
                 </a:solidFill>
+                <a:latin typeface="B Nazanin"/>
+                <a:ea typeface="B Nazanin"/>
+                <a:cs typeface="B Nazanin"/>
               </a:rPr>
               <a:t>پرسش اصلی</a:t>
             </a:r>
@@ -8383,22 +8383,22 @@
           <a:p>
             <a:pPr algn="r" rtl="1" marL="0" indent="0">
               <a:defRPr lang="fa-IR" sz="2100" b="1">
-                <a:latin typeface="B Nazanin"/>
-                <a:ea typeface="B Nazanin"/>
-                <a:cs typeface="B Nazanin"/>
-                <a:solidFill>
-                  <a:srgbClr val="F4F6FB"/>
-                </a:solidFill>
+                <a:solidFill>
+                  <a:srgbClr val="F4F6FB"/>
+                </a:solidFill>
+                <a:latin typeface="B Nazanin"/>
+                <a:ea typeface="B Nazanin"/>
+                <a:cs typeface="B Nazanin"/>
               </a:defRPr>
             </a:pPr>
             <a:r>
               <a:rPr lang="fa-IR" sz="2100" b="1">
-                <a:latin typeface="B Nazanin"/>
-                <a:ea typeface="B Nazanin"/>
-                <a:cs typeface="B Nazanin"/>
-                <a:solidFill>
-                  <a:srgbClr val="F4F6FB"/>
-                </a:solidFill>
+                <a:solidFill>
+                  <a:srgbClr val="F4F6FB"/>
+                </a:solidFill>
+                <a:latin typeface="B Nazanin"/>
+                <a:ea typeface="B Nazanin"/>
+                <a:cs typeface="B Nazanin"/>
               </a:rPr>
               <a:t>آیا افزودن اطلاعات رژیمی مبتنی بر نمای هرست، در پیش‌بینی چندافقی XAUUSD ارزش افزوده پایدار ایجاد می‌کند؟</a:t>
             </a:r>
@@ -8457,22 +8457,22 @@
           <a:p>
             <a:pPr algn="ctr" rtl="1" marL="0" indent="0">
               <a:defRPr lang="fa-IR" sz="1300" b="1">
-                <a:latin typeface="B Nazanin"/>
-                <a:ea typeface="B Nazanin"/>
-                <a:cs typeface="B Nazanin"/>
                 <a:solidFill>
                   <a:srgbClr val="08101F"/>
                 </a:solidFill>
+                <a:latin typeface="B Nazanin"/>
+                <a:ea typeface="B Nazanin"/>
+                <a:cs typeface="B Nazanin"/>
               </a:defRPr>
             </a:pPr>
             <a:r>
               <a:rPr lang="fa-IR" sz="1300" b="1">
-                <a:latin typeface="B Nazanin"/>
-                <a:ea typeface="B Nazanin"/>
-                <a:cs typeface="B Nazanin"/>
                 <a:solidFill>
                   <a:srgbClr val="08101F"/>
                 </a:solidFill>
+                <a:latin typeface="B Nazanin"/>
+                <a:ea typeface="B Nazanin"/>
+                <a:cs typeface="B Nazanin"/>
               </a:rPr>
               <a:t>Hurst = زمینه بازار</a:t>
             </a:r>
@@ -8542,22 +8542,22 @@
           <a:p>
             <a:pPr algn="r" rtl="1" marL="0" indent="0">
               <a:defRPr lang="fa-IR" sz="2700" b="1">
-                <a:latin typeface="B Nazanin"/>
-                <a:ea typeface="B Nazanin"/>
-                <a:cs typeface="B Nazanin"/>
-                <a:solidFill>
-                  <a:srgbClr val="F4F6FB"/>
-                </a:solidFill>
+                <a:solidFill>
+                  <a:srgbClr val="F4F6FB"/>
+                </a:solidFill>
+                <a:latin typeface="B Nazanin"/>
+                <a:ea typeface="B Nazanin"/>
+                <a:cs typeface="B Nazanin"/>
               </a:defRPr>
             </a:pPr>
             <a:r>
               <a:rPr lang="fa-IR" sz="2700" b="1">
-                <a:latin typeface="B Nazanin"/>
-                <a:ea typeface="B Nazanin"/>
-                <a:cs typeface="B Nazanin"/>
-                <a:solidFill>
-                  <a:srgbClr val="F4F6FB"/>
-                </a:solidFill>
+                <a:solidFill>
+                  <a:srgbClr val="F4F6FB"/>
+                </a:solidFill>
+                <a:latin typeface="B Nazanin"/>
+                <a:ea typeface="B Nazanin"/>
+                <a:cs typeface="B Nazanin"/>
               </a:rPr>
               <a:t>۳. شکاف پژوهشی و نوآوری ترکیبی</a:t>
             </a:r>
@@ -8616,22 +8616,22 @@
           <a:p>
             <a:pPr algn="r" rtl="1" marL="0" indent="0">
               <a:defRPr lang="fa-IR" sz="1000" b="0">
-                <a:latin typeface="B Nazanin"/>
-                <a:ea typeface="B Nazanin"/>
-                <a:cs typeface="B Nazanin"/>
                 <a:solidFill>
                   <a:srgbClr val="AAB4C8"/>
                 </a:solidFill>
+                <a:latin typeface="B Nazanin"/>
+                <a:ea typeface="B Nazanin"/>
+                <a:cs typeface="B Nazanin"/>
               </a:defRPr>
             </a:pPr>
             <a:r>
               <a:rPr lang="fa-IR" sz="1000" b="0">
-                <a:latin typeface="B Nazanin"/>
-                <a:ea typeface="B Nazanin"/>
-                <a:cs typeface="B Nazanin"/>
                 <a:solidFill>
                   <a:srgbClr val="AAB4C8"/>
                 </a:solidFill>
+                <a:latin typeface="B Nazanin"/>
+                <a:ea typeface="B Nazanin"/>
+                <a:cs typeface="B Nazanin"/>
               </a:rPr>
               <a:t>ارائه پژوهش | اسلاید 4 | B Nazanin</a:t>
             </a:r>
@@ -8712,22 +8712,22 @@
           <a:p>
             <a:pPr algn="r" rtl="1" marL="0" indent="0">
               <a:defRPr lang="fa-IR" sz="1700" b="1">
-                <a:latin typeface="B Nazanin"/>
-                <a:ea typeface="B Nazanin"/>
-                <a:cs typeface="B Nazanin"/>
                 <a:solidFill>
                   <a:srgbClr val="6EA8FE"/>
                 </a:solidFill>
+                <a:latin typeface="B Nazanin"/>
+                <a:ea typeface="B Nazanin"/>
+                <a:cs typeface="B Nazanin"/>
               </a:defRPr>
             </a:pPr>
             <a:r>
               <a:rPr lang="fa-IR" sz="1700" b="1">
-                <a:latin typeface="B Nazanin"/>
-                <a:ea typeface="B Nazanin"/>
-                <a:cs typeface="B Nazanin"/>
                 <a:solidFill>
                   <a:srgbClr val="6EA8FE"/>
                 </a:solidFill>
+                <a:latin typeface="B Nazanin"/>
+                <a:ea typeface="B Nazanin"/>
+                <a:cs typeface="B Nazanin"/>
               </a:rPr>
               <a:t>آنچه جدا بررسی می‌شود</a:t>
             </a:r>
@@ -8764,22 +8764,22 @@
           <a:p>
             <a:pPr algn="r" rtl="1" marL="0" indent="0">
               <a:defRPr lang="fa-IR" sz="1400" b="0">
-                <a:latin typeface="B Nazanin"/>
-                <a:ea typeface="B Nazanin"/>
-                <a:cs typeface="B Nazanin"/>
-                <a:solidFill>
-                  <a:srgbClr val="F4F6FB"/>
-                </a:solidFill>
+                <a:solidFill>
+                  <a:srgbClr val="F4F6FB"/>
+                </a:solidFill>
+                <a:latin typeface="B Nazanin"/>
+                <a:ea typeface="B Nazanin"/>
+                <a:cs typeface="B Nazanin"/>
               </a:defRPr>
             </a:pPr>
             <a:r>
               <a:rPr lang="fa-IR" sz="1400" b="0">
-                <a:latin typeface="B Nazanin"/>
-                <a:ea typeface="B Nazanin"/>
-                <a:cs typeface="B Nazanin"/>
-                <a:solidFill>
-                  <a:srgbClr val="F4F6FB"/>
-                </a:solidFill>
+                <a:solidFill>
+                  <a:srgbClr val="F4F6FB"/>
+                </a:solidFill>
+                <a:latin typeface="B Nazanin"/>
+                <a:ea typeface="B Nazanin"/>
+                <a:cs typeface="B Nazanin"/>
               </a:rPr>
               <a:t>نمای هرست و DFA</a:t>
             </a:r>
@@ -8792,22 +8792,22 @@
           <a:p>
             <a:pPr algn="r" rtl="1" marL="0" indent="0">
               <a:defRPr lang="fa-IR" sz="1400" b="0">
-                <a:latin typeface="B Nazanin"/>
-                <a:ea typeface="B Nazanin"/>
-                <a:cs typeface="B Nazanin"/>
-                <a:solidFill>
-                  <a:srgbClr val="F4F6FB"/>
-                </a:solidFill>
+                <a:solidFill>
+                  <a:srgbClr val="F4F6FB"/>
+                </a:solidFill>
+                <a:latin typeface="B Nazanin"/>
+                <a:ea typeface="B Nazanin"/>
+                <a:cs typeface="B Nazanin"/>
               </a:defRPr>
             </a:pPr>
             <a:r>
               <a:rPr lang="fa-IR" sz="1400" b="0">
-                <a:latin typeface="B Nazanin"/>
-                <a:ea typeface="B Nazanin"/>
-                <a:cs typeface="B Nazanin"/>
-                <a:solidFill>
-                  <a:srgbClr val="F4F6FB"/>
-                </a:solidFill>
+                <a:solidFill>
+                  <a:srgbClr val="F4F6FB"/>
+                </a:solidFill>
+                <a:latin typeface="B Nazanin"/>
+                <a:ea typeface="B Nazanin"/>
+                <a:cs typeface="B Nazanin"/>
               </a:rPr>
               <a:t>مدل‌های یادگیری ماشین</a:t>
             </a:r>
@@ -8820,22 +8820,22 @@
           <a:p>
             <a:pPr algn="r" rtl="1" marL="0" indent="0">
               <a:defRPr lang="fa-IR" sz="1400" b="0">
-                <a:latin typeface="B Nazanin"/>
-                <a:ea typeface="B Nazanin"/>
-                <a:cs typeface="B Nazanin"/>
-                <a:solidFill>
-                  <a:srgbClr val="F4F6FB"/>
-                </a:solidFill>
+                <a:solidFill>
+                  <a:srgbClr val="F4F6FB"/>
+                </a:solidFill>
+                <a:latin typeface="B Nazanin"/>
+                <a:ea typeface="B Nazanin"/>
+                <a:cs typeface="B Nazanin"/>
               </a:defRPr>
             </a:pPr>
             <a:r>
               <a:rPr lang="fa-IR" sz="1400" b="0">
-                <a:latin typeface="B Nazanin"/>
-                <a:ea typeface="B Nazanin"/>
-                <a:cs typeface="B Nazanin"/>
-                <a:solidFill>
-                  <a:srgbClr val="F4F6FB"/>
-                </a:solidFill>
+                <a:solidFill>
+                  <a:srgbClr val="F4F6FB"/>
+                </a:solidFill>
+                <a:latin typeface="B Nazanin"/>
+                <a:ea typeface="B Nazanin"/>
+                <a:cs typeface="B Nazanin"/>
               </a:rPr>
               <a:t>استراتژی معاملاتی</a:t>
             </a:r>
@@ -8848,22 +8848,22 @@
           <a:p>
             <a:pPr algn="r" rtl="1" marL="0" indent="0">
               <a:defRPr lang="fa-IR" sz="1400" b="0">
-                <a:latin typeface="B Nazanin"/>
-                <a:ea typeface="B Nazanin"/>
-                <a:cs typeface="B Nazanin"/>
-                <a:solidFill>
-                  <a:srgbClr val="F4F6FB"/>
-                </a:solidFill>
+                <a:solidFill>
+                  <a:srgbClr val="F4F6FB"/>
+                </a:solidFill>
+                <a:latin typeface="B Nazanin"/>
+                <a:ea typeface="B Nazanin"/>
+                <a:cs typeface="B Nazanin"/>
               </a:defRPr>
             </a:pPr>
             <a:r>
               <a:rPr lang="fa-IR" sz="1400" b="0">
-                <a:latin typeface="B Nazanin"/>
-                <a:ea typeface="B Nazanin"/>
-                <a:cs typeface="B Nazanin"/>
-                <a:solidFill>
-                  <a:srgbClr val="F4F6FB"/>
-                </a:solidFill>
+                <a:solidFill>
+                  <a:srgbClr val="F4F6FB"/>
+                </a:solidFill>
+                <a:latin typeface="B Nazanin"/>
+                <a:ea typeface="B Nazanin"/>
+                <a:cs typeface="B Nazanin"/>
               </a:rPr>
               <a:t>اعتبارسنجی عملکرد</a:t>
             </a:r>
@@ -8944,22 +8944,22 @@
           <a:p>
             <a:pPr algn="r" rtl="1" marL="0" indent="0">
               <a:defRPr lang="fa-IR" sz="1700" b="1">
-                <a:latin typeface="B Nazanin"/>
-                <a:ea typeface="B Nazanin"/>
-                <a:cs typeface="B Nazanin"/>
                 <a:solidFill>
                   <a:srgbClr val="21C4B1"/>
                 </a:solidFill>
+                <a:latin typeface="B Nazanin"/>
+                <a:ea typeface="B Nazanin"/>
+                <a:cs typeface="B Nazanin"/>
               </a:defRPr>
             </a:pPr>
             <a:r>
               <a:rPr lang="fa-IR" sz="1700" b="1">
-                <a:latin typeface="B Nazanin"/>
-                <a:ea typeface="B Nazanin"/>
-                <a:cs typeface="B Nazanin"/>
                 <a:solidFill>
                   <a:srgbClr val="21C4B1"/>
                 </a:solidFill>
+                <a:latin typeface="B Nazanin"/>
+                <a:ea typeface="B Nazanin"/>
+                <a:cs typeface="B Nazanin"/>
               </a:rPr>
               <a:t>خلأ روش‌شناختی</a:t>
             </a:r>
@@ -8996,22 +8996,22 @@
           <a:p>
             <a:pPr algn="r" rtl="1" marL="0" indent="0">
               <a:defRPr lang="fa-IR" sz="1400" b="0">
-                <a:latin typeface="B Nazanin"/>
-                <a:ea typeface="B Nazanin"/>
-                <a:cs typeface="B Nazanin"/>
-                <a:solidFill>
-                  <a:srgbClr val="F4F6FB"/>
-                </a:solidFill>
+                <a:solidFill>
+                  <a:srgbClr val="F4F6FB"/>
+                </a:solidFill>
+                <a:latin typeface="B Nazanin"/>
+                <a:ea typeface="B Nazanin"/>
+                <a:cs typeface="B Nazanin"/>
               </a:defRPr>
             </a:pPr>
             <a:r>
               <a:rPr lang="fa-IR" sz="1400" b="0">
-                <a:latin typeface="B Nazanin"/>
-                <a:ea typeface="B Nazanin"/>
-                <a:cs typeface="B Nazanin"/>
-                <a:solidFill>
-                  <a:srgbClr val="F4F6FB"/>
-                </a:solidFill>
+                <a:solidFill>
+                  <a:srgbClr val="F4F6FB"/>
+                </a:solidFill>
+                <a:latin typeface="B Nazanin"/>
+                <a:ea typeface="B Nazanin"/>
+                <a:cs typeface="B Nazanin"/>
               </a:rPr>
               <a:t>مقایسه با خط پایه</a:t>
             </a:r>
@@ -9024,22 +9024,22 @@
           <a:p>
             <a:pPr algn="r" rtl="1" marL="0" indent="0">
               <a:defRPr lang="fa-IR" sz="1400" b="0">
-                <a:latin typeface="B Nazanin"/>
-                <a:ea typeface="B Nazanin"/>
-                <a:cs typeface="B Nazanin"/>
-                <a:solidFill>
-                  <a:srgbClr val="F4F6FB"/>
-                </a:solidFill>
+                <a:solidFill>
+                  <a:srgbClr val="F4F6FB"/>
+                </a:solidFill>
+                <a:latin typeface="B Nazanin"/>
+                <a:ea typeface="B Nazanin"/>
+                <a:cs typeface="B Nazanin"/>
               </a:defRPr>
             </a:pPr>
             <a:r>
               <a:rPr lang="fa-IR" sz="1400" b="0">
-                <a:latin typeface="B Nazanin"/>
-                <a:ea typeface="B Nazanin"/>
-                <a:cs typeface="B Nazanin"/>
-                <a:solidFill>
-                  <a:srgbClr val="F4F6FB"/>
-                </a:solidFill>
+                <a:solidFill>
+                  <a:srgbClr val="F4F6FB"/>
+                </a:solidFill>
+                <a:latin typeface="B Nazanin"/>
+                <a:ea typeface="B Nazanin"/>
+                <a:cs typeface="B Nazanin"/>
               </a:rPr>
               <a:t>تفکیک هدف آماری و اجرایی</a:t>
             </a:r>
@@ -9052,22 +9052,22 @@
           <a:p>
             <a:pPr algn="r" rtl="1" marL="0" indent="0">
               <a:defRPr lang="fa-IR" sz="1400" b="0">
-                <a:latin typeface="B Nazanin"/>
-                <a:ea typeface="B Nazanin"/>
-                <a:cs typeface="B Nazanin"/>
-                <a:solidFill>
-                  <a:srgbClr val="F4F6FB"/>
-                </a:solidFill>
+                <a:solidFill>
+                  <a:srgbClr val="F4F6FB"/>
+                </a:solidFill>
+                <a:latin typeface="B Nazanin"/>
+                <a:ea typeface="B Nazanin"/>
+                <a:cs typeface="B Nazanin"/>
               </a:defRPr>
             </a:pPr>
             <a:r>
               <a:rPr lang="fa-IR" sz="1400" b="0">
-                <a:latin typeface="B Nazanin"/>
-                <a:ea typeface="B Nazanin"/>
-                <a:cs typeface="B Nazanin"/>
-                <a:solidFill>
-                  <a:srgbClr val="F4F6FB"/>
-                </a:solidFill>
+                <a:solidFill>
+                  <a:srgbClr val="F4F6FB"/>
+                </a:solidFill>
+                <a:latin typeface="B Nazanin"/>
+                <a:ea typeface="B Nazanin"/>
+                <a:cs typeface="B Nazanin"/>
               </a:rPr>
               <a:t>کنترل هم‌پوشانی برچسب‌ها</a:t>
             </a:r>
@@ -9080,22 +9080,22 @@
           <a:p>
             <a:pPr algn="r" rtl="1" marL="0" indent="0">
               <a:defRPr lang="fa-IR" sz="1400" b="0">
-                <a:latin typeface="B Nazanin"/>
-                <a:ea typeface="B Nazanin"/>
-                <a:cs typeface="B Nazanin"/>
-                <a:solidFill>
-                  <a:srgbClr val="F4F6FB"/>
-                </a:solidFill>
+                <a:solidFill>
+                  <a:srgbClr val="F4F6FB"/>
+                </a:solidFill>
+                <a:latin typeface="B Nazanin"/>
+                <a:ea typeface="B Nazanin"/>
+                <a:cs typeface="B Nazanin"/>
               </a:defRPr>
             </a:pPr>
             <a:r>
               <a:rPr lang="fa-IR" sz="1400" b="0">
-                <a:latin typeface="B Nazanin"/>
-                <a:ea typeface="B Nazanin"/>
-                <a:cs typeface="B Nazanin"/>
-                <a:solidFill>
-                  <a:srgbClr val="F4F6FB"/>
-                </a:solidFill>
+                <a:solidFill>
+                  <a:srgbClr val="F4F6FB"/>
+                </a:solidFill>
+                <a:latin typeface="B Nazanin"/>
+                <a:ea typeface="B Nazanin"/>
+                <a:cs typeface="B Nazanin"/>
               </a:rPr>
               <a:t>ثبت قابل ممیزی</a:t>
             </a:r>
@@ -9176,22 +9176,22 @@
           <a:p>
             <a:pPr algn="r" rtl="1" marL="0" indent="0">
               <a:defRPr lang="fa-IR" sz="1700" b="1">
-                <a:latin typeface="B Nazanin"/>
-                <a:ea typeface="B Nazanin"/>
-                <a:cs typeface="B Nazanin"/>
                 <a:solidFill>
                   <a:srgbClr val="E0B24A"/>
                 </a:solidFill>
+                <a:latin typeface="B Nazanin"/>
+                <a:ea typeface="B Nazanin"/>
+                <a:cs typeface="B Nazanin"/>
               </a:defRPr>
             </a:pPr>
             <a:r>
               <a:rPr lang="fa-IR" sz="1700" b="1">
-                <a:latin typeface="B Nazanin"/>
-                <a:ea typeface="B Nazanin"/>
-                <a:cs typeface="B Nazanin"/>
                 <a:solidFill>
                   <a:srgbClr val="E0B24A"/>
                 </a:solidFill>
+                <a:latin typeface="B Nazanin"/>
+                <a:ea typeface="B Nazanin"/>
+                <a:cs typeface="B Nazanin"/>
               </a:rPr>
               <a:t>نوآوری ترکیبی</a:t>
             </a:r>
@@ -9228,22 +9228,22 @@
           <a:p>
             <a:pPr algn="r" rtl="1" marL="0" indent="0">
               <a:defRPr lang="fa-IR" sz="1400" b="0">
-                <a:latin typeface="B Nazanin"/>
-                <a:ea typeface="B Nazanin"/>
-                <a:cs typeface="B Nazanin"/>
-                <a:solidFill>
-                  <a:srgbClr val="F4F6FB"/>
-                </a:solidFill>
+                <a:solidFill>
+                  <a:srgbClr val="F4F6FB"/>
+                </a:solidFill>
+                <a:latin typeface="B Nazanin"/>
+                <a:ea typeface="B Nazanin"/>
+                <a:cs typeface="B Nazanin"/>
               </a:defRPr>
             </a:pPr>
             <a:r>
               <a:rPr lang="fa-IR" sz="1400" b="0">
-                <a:latin typeface="B Nazanin"/>
-                <a:ea typeface="B Nazanin"/>
-                <a:cs typeface="B Nazanin"/>
-                <a:solidFill>
-                  <a:srgbClr val="F4F6FB"/>
-                </a:solidFill>
+                <a:solidFill>
+                  <a:srgbClr val="F4F6FB"/>
+                </a:solidFill>
+                <a:latin typeface="B Nazanin"/>
+                <a:ea typeface="B Nazanin"/>
+                <a:cs typeface="B Nazanin"/>
               </a:rPr>
               <a:t>ادغام کنترل‌شده اجزا</a:t>
             </a:r>
@@ -9256,22 +9256,22 @@
           <a:p>
             <a:pPr algn="r" rtl="1" marL="0" indent="0">
               <a:defRPr lang="fa-IR" sz="1400" b="0">
-                <a:latin typeface="B Nazanin"/>
-                <a:ea typeface="B Nazanin"/>
-                <a:cs typeface="B Nazanin"/>
-                <a:solidFill>
-                  <a:srgbClr val="F4F6FB"/>
-                </a:solidFill>
+                <a:solidFill>
+                  <a:srgbClr val="F4F6FB"/>
+                </a:solidFill>
+                <a:latin typeface="B Nazanin"/>
+                <a:ea typeface="B Nazanin"/>
+                <a:cs typeface="B Nazanin"/>
               </a:defRPr>
             </a:pPr>
             <a:r>
               <a:rPr lang="fa-IR" sz="1400" b="0">
-                <a:latin typeface="B Nazanin"/>
-                <a:ea typeface="B Nazanin"/>
-                <a:cs typeface="B Nazanin"/>
-                <a:solidFill>
-                  <a:srgbClr val="F4F6FB"/>
-                </a:solidFill>
+                <a:solidFill>
+                  <a:srgbClr val="F4F6FB"/>
+                </a:solidFill>
+                <a:latin typeface="B Nazanin"/>
+                <a:ea typeface="B Nazanin"/>
+                <a:cs typeface="B Nazanin"/>
               </a:rPr>
               <a:t>Ablation از پیش‌تعریف‌شده</a:t>
             </a:r>
@@ -9284,22 +9284,22 @@
           <a:p>
             <a:pPr algn="r" rtl="1" marL="0" indent="0">
               <a:defRPr lang="fa-IR" sz="1400" b="0">
-                <a:latin typeface="B Nazanin"/>
-                <a:ea typeface="B Nazanin"/>
-                <a:cs typeface="B Nazanin"/>
-                <a:solidFill>
-                  <a:srgbClr val="F4F6FB"/>
-                </a:solidFill>
+                <a:solidFill>
+                  <a:srgbClr val="F4F6FB"/>
+                </a:solidFill>
+                <a:latin typeface="B Nazanin"/>
+                <a:ea typeface="B Nazanin"/>
+                <a:cs typeface="B Nazanin"/>
               </a:defRPr>
             </a:pPr>
             <a:r>
               <a:rPr lang="fa-IR" sz="1400" b="0">
-                <a:latin typeface="B Nazanin"/>
-                <a:ea typeface="B Nazanin"/>
-                <a:cs typeface="B Nazanin"/>
-                <a:solidFill>
-                  <a:srgbClr val="F4F6FB"/>
-                </a:solidFill>
+                <a:solidFill>
+                  <a:srgbClr val="F4F6FB"/>
+                </a:solidFill>
+                <a:latin typeface="B Nazanin"/>
+                <a:ea typeface="B Nazanin"/>
+                <a:cs typeface="B Nazanin"/>
               </a:rPr>
               <a:t>Walk-Forward و Purge</a:t>
             </a:r>
@@ -9312,22 +9312,22 @@
           <a:p>
             <a:pPr algn="r" rtl="1" marL="0" indent="0">
               <a:defRPr lang="fa-IR" sz="1400" b="0">
-                <a:latin typeface="B Nazanin"/>
-                <a:ea typeface="B Nazanin"/>
-                <a:cs typeface="B Nazanin"/>
-                <a:solidFill>
-                  <a:srgbClr val="F4F6FB"/>
-                </a:solidFill>
+                <a:solidFill>
+                  <a:srgbClr val="F4F6FB"/>
+                </a:solidFill>
+                <a:latin typeface="B Nazanin"/>
+                <a:ea typeface="B Nazanin"/>
+                <a:cs typeface="B Nazanin"/>
               </a:defRPr>
             </a:pPr>
             <a:r>
               <a:rPr lang="fa-IR" sz="1400" b="0">
-                <a:latin typeface="B Nazanin"/>
-                <a:ea typeface="B Nazanin"/>
-                <a:cs typeface="B Nazanin"/>
-                <a:solidFill>
-                  <a:srgbClr val="F4F6FB"/>
-                </a:solidFill>
+                <a:solidFill>
+                  <a:srgbClr val="F4F6FB"/>
+                </a:solidFill>
+                <a:latin typeface="B Nazanin"/>
+                <a:ea typeface="B Nazanin"/>
+                <a:cs typeface="B Nazanin"/>
               </a:rPr>
               <a:t>نتیجه‌گیری با ادعای محدود</a:t>
             </a:r>
@@ -9364,22 +9364,22 @@
           <a:p>
             <a:pPr algn="ctr" rtl="1" marL="0" indent="0">
               <a:defRPr lang="fa-IR" sz="1800" b="1">
-                <a:latin typeface="B Nazanin"/>
-                <a:ea typeface="B Nazanin"/>
-                <a:cs typeface="B Nazanin"/>
                 <a:solidFill>
                   <a:srgbClr val="E0B24A"/>
                 </a:solidFill>
+                <a:latin typeface="B Nazanin"/>
+                <a:ea typeface="B Nazanin"/>
+                <a:cs typeface="B Nazanin"/>
               </a:defRPr>
             </a:pPr>
             <a:r>
               <a:rPr lang="fa-IR" sz="1800" b="1">
-                <a:latin typeface="B Nazanin"/>
-                <a:ea typeface="B Nazanin"/>
-                <a:cs typeface="B Nazanin"/>
                 <a:solidFill>
                   <a:srgbClr val="E0B24A"/>
                 </a:solidFill>
+                <a:latin typeface="B Nazanin"/>
+                <a:ea typeface="B Nazanin"/>
+                <a:cs typeface="B Nazanin"/>
               </a:rPr>
               <a:t>نوآوری در ابداع DFA یا Stacking نیست؛ در طراحی پروتکل یکپارچه برای سنجش اثر مستقل Hurst است.</a:t>
             </a:r>
@@ -9449,22 +9449,22 @@
           <a:p>
             <a:pPr algn="r" rtl="1" marL="0" indent="0">
               <a:defRPr lang="fa-IR" sz="2700" b="1">
-                <a:latin typeface="B Nazanin"/>
-                <a:ea typeface="B Nazanin"/>
-                <a:cs typeface="B Nazanin"/>
-                <a:solidFill>
-                  <a:srgbClr val="F4F6FB"/>
-                </a:solidFill>
+                <a:solidFill>
+                  <a:srgbClr val="F4F6FB"/>
+                </a:solidFill>
+                <a:latin typeface="B Nazanin"/>
+                <a:ea typeface="B Nazanin"/>
+                <a:cs typeface="B Nazanin"/>
               </a:defRPr>
             </a:pPr>
             <a:r>
               <a:rPr lang="fa-IR" sz="2700" b="1">
-                <a:latin typeface="B Nazanin"/>
-                <a:ea typeface="B Nazanin"/>
-                <a:cs typeface="B Nazanin"/>
-                <a:solidFill>
-                  <a:srgbClr val="F4F6FB"/>
-                </a:solidFill>
+                <a:solidFill>
+                  <a:srgbClr val="F4F6FB"/>
+                </a:solidFill>
+                <a:latin typeface="B Nazanin"/>
+                <a:ea typeface="B Nazanin"/>
+                <a:cs typeface="B Nazanin"/>
               </a:rPr>
               <a:t>۴. داده و قرارداد اطلاعات</a:t>
             </a:r>
@@ -9523,22 +9523,22 @@
           <a:p>
             <a:pPr algn="r" rtl="1" marL="0" indent="0">
               <a:defRPr lang="fa-IR" sz="1000" b="0">
-                <a:latin typeface="B Nazanin"/>
-                <a:ea typeface="B Nazanin"/>
-                <a:cs typeface="B Nazanin"/>
                 <a:solidFill>
                   <a:srgbClr val="AAB4C8"/>
                 </a:solidFill>
+                <a:latin typeface="B Nazanin"/>
+                <a:ea typeface="B Nazanin"/>
+                <a:cs typeface="B Nazanin"/>
               </a:defRPr>
             </a:pPr>
             <a:r>
               <a:rPr lang="fa-IR" sz="1000" b="0">
-                <a:latin typeface="B Nazanin"/>
-                <a:ea typeface="B Nazanin"/>
-                <a:cs typeface="B Nazanin"/>
                 <a:solidFill>
                   <a:srgbClr val="AAB4C8"/>
                 </a:solidFill>
+                <a:latin typeface="B Nazanin"/>
+                <a:ea typeface="B Nazanin"/>
+                <a:cs typeface="B Nazanin"/>
               </a:rPr>
               <a:t>ارائه پژوهش | اسلاید 5 | B Nazanin</a:t>
             </a:r>
@@ -9597,22 +9597,22 @@
           <a:p>
             <a:pPr algn="r" rtl="1" marL="0" indent="0">
               <a:defRPr lang="fa-IR" sz="2100" b="1">
-                <a:latin typeface="B Nazanin"/>
-                <a:ea typeface="B Nazanin"/>
-                <a:cs typeface="B Nazanin"/>
                 <a:solidFill>
                   <a:srgbClr val="E0B24A"/>
                 </a:solidFill>
+                <a:latin typeface="B Nazanin"/>
+                <a:ea typeface="B Nazanin"/>
+                <a:cs typeface="B Nazanin"/>
               </a:defRPr>
             </a:pPr>
             <a:r>
               <a:rPr lang="fa-IR" sz="2100" b="1">
-                <a:latin typeface="B Nazanin"/>
-                <a:ea typeface="B Nazanin"/>
-                <a:cs typeface="B Nazanin"/>
                 <a:solidFill>
                   <a:srgbClr val="E0B24A"/>
                 </a:solidFill>
+                <a:latin typeface="B Nazanin"/>
+                <a:ea typeface="B Nazanin"/>
+                <a:cs typeface="B Nazanin"/>
               </a:rPr>
               <a:t>مشخصات داده</a:t>
             </a:r>
@@ -9649,22 +9649,22 @@
           <a:p>
             <a:pPr algn="r" rtl="1" marL="0" indent="0">
               <a:defRPr lang="fa-IR" sz="1700" b="0">
-                <a:latin typeface="B Nazanin"/>
-                <a:ea typeface="B Nazanin"/>
-                <a:cs typeface="B Nazanin"/>
-                <a:solidFill>
-                  <a:srgbClr val="F4F6FB"/>
-                </a:solidFill>
+                <a:solidFill>
+                  <a:srgbClr val="F4F6FB"/>
+                </a:solidFill>
+                <a:latin typeface="B Nazanin"/>
+                <a:ea typeface="B Nazanin"/>
+                <a:cs typeface="B Nazanin"/>
               </a:defRPr>
             </a:pPr>
             <a:r>
               <a:rPr lang="fa-IR" sz="1700" b="0">
-                <a:latin typeface="B Nazanin"/>
-                <a:ea typeface="B Nazanin"/>
-                <a:cs typeface="B Nazanin"/>
-                <a:solidFill>
-                  <a:srgbClr val="F4F6FB"/>
-                </a:solidFill>
+                <a:solidFill>
+                  <a:srgbClr val="F4F6FB"/>
+                </a:solidFill>
+                <a:latin typeface="B Nazanin"/>
+                <a:ea typeface="B Nazanin"/>
+                <a:cs typeface="B Nazanin"/>
               </a:rPr>
               <a:t>• ۴٬۰۱۷ مشاهده روزانه</a:t>
             </a:r>
@@ -9677,22 +9677,22 @@
           <a:p>
             <a:pPr algn="r" rtl="1" marL="0" indent="0">
               <a:defRPr lang="fa-IR" sz="1700" b="0">
-                <a:latin typeface="B Nazanin"/>
-                <a:ea typeface="B Nazanin"/>
-                <a:cs typeface="B Nazanin"/>
-                <a:solidFill>
-                  <a:srgbClr val="F4F6FB"/>
-                </a:solidFill>
+                <a:solidFill>
+                  <a:srgbClr val="F4F6FB"/>
+                </a:solidFill>
+                <a:latin typeface="B Nazanin"/>
+                <a:ea typeface="B Nazanin"/>
+                <a:cs typeface="B Nazanin"/>
               </a:defRPr>
             </a:pPr>
             <a:r>
               <a:rPr lang="fa-IR" sz="1700" b="0">
-                <a:latin typeface="B Nazanin"/>
-                <a:ea typeface="B Nazanin"/>
-                <a:cs typeface="B Nazanin"/>
-                <a:solidFill>
-                  <a:srgbClr val="F4F6FB"/>
-                </a:solidFill>
+                <a:solidFill>
+                  <a:srgbClr val="F4F6FB"/>
+                </a:solidFill>
+                <a:latin typeface="B Nazanin"/>
+                <a:ea typeface="B Nazanin"/>
+                <a:cs typeface="B Nazanin"/>
               </a:rPr>
               <a:t>• ۳ ژانویه ۲۰۱۱ تا ۳۱ ژوئیه ۲۰۲۶</a:t>
             </a:r>
@@ -9705,22 +9705,22 @@
           <a:p>
             <a:pPr algn="r" rtl="1" marL="0" indent="0">
               <a:defRPr lang="fa-IR" sz="1700" b="0">
-                <a:latin typeface="B Nazanin"/>
-                <a:ea typeface="B Nazanin"/>
-                <a:cs typeface="B Nazanin"/>
-                <a:solidFill>
-                  <a:srgbClr val="F4F6FB"/>
-                </a:solidFill>
+                <a:solidFill>
+                  <a:srgbClr val="F4F6FB"/>
+                </a:solidFill>
+                <a:latin typeface="B Nazanin"/>
+                <a:ea typeface="B Nazanin"/>
+                <a:cs typeface="B Nazanin"/>
               </a:defRPr>
             </a:pPr>
             <a:r>
               <a:rPr lang="fa-IR" sz="1700" b="0">
-                <a:latin typeface="B Nazanin"/>
-                <a:ea typeface="B Nazanin"/>
-                <a:cs typeface="B Nazanin"/>
-                <a:solidFill>
-                  <a:srgbClr val="F4F6FB"/>
-                </a:solidFill>
+                <a:solidFill>
+                  <a:srgbClr val="F4F6FB"/>
+                </a:solidFill>
+                <a:latin typeface="B Nazanin"/>
+                <a:ea typeface="B Nazanin"/>
+                <a:cs typeface="B Nazanin"/>
               </a:rPr>
               <a:t>• XAUUSD از MetaQuotes-Demo</a:t>
             </a:r>
@@ -9733,22 +9733,22 @@
           <a:p>
             <a:pPr algn="r" rtl="1" marL="0" indent="0">
               <a:defRPr lang="fa-IR" sz="1700" b="0">
-                <a:latin typeface="B Nazanin"/>
-                <a:ea typeface="B Nazanin"/>
-                <a:cs typeface="B Nazanin"/>
-                <a:solidFill>
-                  <a:srgbClr val="F4F6FB"/>
-                </a:solidFill>
+                <a:solidFill>
+                  <a:srgbClr val="F4F6FB"/>
+                </a:solidFill>
+                <a:latin typeface="B Nazanin"/>
+                <a:ea typeface="B Nazanin"/>
+                <a:cs typeface="B Nazanin"/>
               </a:defRPr>
             </a:pPr>
             <a:r>
               <a:rPr lang="fa-IR" sz="1700" b="0">
-                <a:latin typeface="B Nazanin"/>
-                <a:ea typeface="B Nazanin"/>
-                <a:cs typeface="B Nazanin"/>
-                <a:solidFill>
-                  <a:srgbClr val="F4F6FB"/>
-                </a:solidFill>
+                <a:solidFill>
+                  <a:srgbClr val="F4F6FB"/>
+                </a:solidFill>
+                <a:latin typeface="B Nazanin"/>
+                <a:ea typeface="B Nazanin"/>
+                <a:cs typeface="B Nazanin"/>
               </a:rPr>
               <a:t>• OHLCV؛ حجم از نوع Tick Volume</a:t>
             </a:r>
@@ -9761,22 +9761,22 @@
           <a:p>
             <a:pPr algn="r" rtl="1" marL="0" indent="0">
               <a:defRPr lang="fa-IR" sz="1700" b="0">
-                <a:latin typeface="B Nazanin"/>
-                <a:ea typeface="B Nazanin"/>
-                <a:cs typeface="B Nazanin"/>
-                <a:solidFill>
-                  <a:srgbClr val="F4F6FB"/>
-                </a:solidFill>
+                <a:solidFill>
+                  <a:srgbClr val="F4F6FB"/>
+                </a:solidFill>
+                <a:latin typeface="B Nazanin"/>
+                <a:ea typeface="B Nazanin"/>
+                <a:cs typeface="B Nazanin"/>
               </a:defRPr>
             </a:pPr>
             <a:r>
               <a:rPr lang="fa-IR" sz="1700" b="0">
-                <a:latin typeface="B Nazanin"/>
-                <a:ea typeface="B Nazanin"/>
-                <a:cs typeface="B Nazanin"/>
-                <a:solidFill>
-                  <a:srgbClr val="F4F6FB"/>
-                </a:solidFill>
+                <a:solidFill>
+                  <a:srgbClr val="F4F6FB"/>
+                </a:solidFill>
+                <a:latin typeface="B Nazanin"/>
+                <a:ea typeface="B Nazanin"/>
+                <a:cs typeface="B Nazanin"/>
               </a:rPr>
               <a:t>• تناوب روزانه و زمان UTC</a:t>
             </a:r>
@@ -9835,22 +9835,22 @@
           <a:p>
             <a:pPr algn="r" rtl="1" marL="0" indent="0">
               <a:defRPr lang="fa-IR" sz="2100" b="1">
-                <a:latin typeface="B Nazanin"/>
-                <a:ea typeface="B Nazanin"/>
-                <a:cs typeface="B Nazanin"/>
                 <a:solidFill>
                   <a:srgbClr val="21C4B1"/>
                 </a:solidFill>
+                <a:latin typeface="B Nazanin"/>
+                <a:ea typeface="B Nazanin"/>
+                <a:cs typeface="B Nazanin"/>
               </a:defRPr>
             </a:pPr>
             <a:r>
               <a:rPr lang="fa-IR" sz="2100" b="1">
-                <a:latin typeface="B Nazanin"/>
-                <a:ea typeface="B Nazanin"/>
-                <a:cs typeface="B Nazanin"/>
                 <a:solidFill>
                   <a:srgbClr val="21C4B1"/>
                 </a:solidFill>
+                <a:latin typeface="B Nazanin"/>
+                <a:ea typeface="B Nazanin"/>
+                <a:cs typeface="B Nazanin"/>
               </a:rPr>
               <a:t>قرارداد افق‌ها</a:t>
             </a:r>
@@ -9909,22 +9909,22 @@
           <a:p>
             <a:pPr algn="ctr" rtl="1" marL="0" indent="0">
               <a:defRPr lang="fa-IR" sz="1800" b="1">
-                <a:latin typeface="B Nazanin"/>
-                <a:ea typeface="B Nazanin"/>
-                <a:cs typeface="B Nazanin"/>
                 <a:solidFill>
                   <a:srgbClr val="08101F"/>
                 </a:solidFill>
+                <a:latin typeface="B Nazanin"/>
+                <a:ea typeface="B Nazanin"/>
+                <a:cs typeface="B Nazanin"/>
               </a:defRPr>
             </a:pPr>
             <a:r>
               <a:rPr lang="fa-IR" sz="1800" b="1">
-                <a:latin typeface="B Nazanin"/>
-                <a:ea typeface="B Nazanin"/>
-                <a:cs typeface="B Nazanin"/>
                 <a:solidFill>
                   <a:srgbClr val="08101F"/>
                 </a:solidFill>
+                <a:latin typeface="B Nazanin"/>
+                <a:ea typeface="B Nazanin"/>
+                <a:cs typeface="B Nazanin"/>
               </a:rPr>
               <a:t>H=۱</a:t>
             </a:r>
@@ -9983,22 +9983,22 @@
           <a:p>
             <a:pPr algn="ctr" rtl="1" marL="0" indent="0">
               <a:defRPr lang="fa-IR" sz="1800" b="1">
-                <a:latin typeface="B Nazanin"/>
-                <a:ea typeface="B Nazanin"/>
-                <a:cs typeface="B Nazanin"/>
                 <a:solidFill>
                   <a:srgbClr val="08101F"/>
                 </a:solidFill>
+                <a:latin typeface="B Nazanin"/>
+                <a:ea typeface="B Nazanin"/>
+                <a:cs typeface="B Nazanin"/>
               </a:defRPr>
             </a:pPr>
             <a:r>
               <a:rPr lang="fa-IR" sz="1800" b="1">
-                <a:latin typeface="B Nazanin"/>
-                <a:ea typeface="B Nazanin"/>
-                <a:cs typeface="B Nazanin"/>
                 <a:solidFill>
                   <a:srgbClr val="08101F"/>
                 </a:solidFill>
+                <a:latin typeface="B Nazanin"/>
+                <a:ea typeface="B Nazanin"/>
+                <a:cs typeface="B Nazanin"/>
               </a:rPr>
               <a:t>H=۵</a:t>
             </a:r>
@@ -10057,22 +10057,22 @@
           <a:p>
             <a:pPr algn="ctr" rtl="1" marL="0" indent="0">
               <a:defRPr lang="fa-IR" sz="1800" b="1">
-                <a:latin typeface="B Nazanin"/>
-                <a:ea typeface="B Nazanin"/>
-                <a:cs typeface="B Nazanin"/>
                 <a:solidFill>
                   <a:srgbClr val="08101F"/>
                 </a:solidFill>
+                <a:latin typeface="B Nazanin"/>
+                <a:ea typeface="B Nazanin"/>
+                <a:cs typeface="B Nazanin"/>
               </a:defRPr>
             </a:pPr>
             <a:r>
               <a:rPr lang="fa-IR" sz="1800" b="1">
-                <a:latin typeface="B Nazanin"/>
-                <a:ea typeface="B Nazanin"/>
-                <a:cs typeface="B Nazanin"/>
                 <a:solidFill>
                   <a:srgbClr val="08101F"/>
                 </a:solidFill>
+                <a:latin typeface="B Nazanin"/>
+                <a:ea typeface="B Nazanin"/>
+                <a:cs typeface="B Nazanin"/>
               </a:rPr>
               <a:t>H=۱۰</a:t>
             </a:r>
@@ -10131,22 +10131,22 @@
           <a:p>
             <a:pPr algn="ctr" rtl="1" marL="0" indent="0">
               <a:defRPr lang="fa-IR" sz="1800" b="1">
-                <a:latin typeface="B Nazanin"/>
-                <a:ea typeface="B Nazanin"/>
-                <a:cs typeface="B Nazanin"/>
                 <a:solidFill>
                   <a:srgbClr val="08101F"/>
                 </a:solidFill>
+                <a:latin typeface="B Nazanin"/>
+                <a:ea typeface="B Nazanin"/>
+                <a:cs typeface="B Nazanin"/>
               </a:defRPr>
             </a:pPr>
             <a:r>
               <a:rPr lang="fa-IR" sz="1800" b="1">
-                <a:latin typeface="B Nazanin"/>
-                <a:ea typeface="B Nazanin"/>
-                <a:cs typeface="B Nazanin"/>
                 <a:solidFill>
                   <a:srgbClr val="08101F"/>
                 </a:solidFill>
+                <a:latin typeface="B Nazanin"/>
+                <a:ea typeface="B Nazanin"/>
+                <a:cs typeface="B Nazanin"/>
               </a:rPr>
               <a:t>H=۲۰</a:t>
             </a:r>
@@ -10183,22 +10183,22 @@
           <a:p>
             <a:pPr algn="r" rtl="1" marL="0" indent="0">
               <a:defRPr lang="fa-IR" sz="1700" b="0">
-                <a:latin typeface="B Nazanin"/>
-                <a:ea typeface="B Nazanin"/>
-                <a:cs typeface="B Nazanin"/>
-                <a:solidFill>
-                  <a:srgbClr val="F4F6FB"/>
-                </a:solidFill>
+                <a:solidFill>
+                  <a:srgbClr val="F4F6FB"/>
+                </a:solidFill>
+                <a:latin typeface="B Nazanin"/>
+                <a:ea typeface="B Nazanin"/>
+                <a:cs typeface="B Nazanin"/>
               </a:defRPr>
             </a:pPr>
             <a:r>
               <a:rPr lang="fa-IR" sz="1700" b="0">
-                <a:latin typeface="B Nazanin"/>
-                <a:ea typeface="B Nazanin"/>
-                <a:cs typeface="B Nazanin"/>
-                <a:solidFill>
-                  <a:srgbClr val="F4F6FB"/>
-                </a:solidFill>
+                <a:solidFill>
+                  <a:srgbClr val="F4F6FB"/>
+                </a:solidFill>
+                <a:latin typeface="B Nazanin"/>
+                <a:ea typeface="B Nazanin"/>
+                <a:cs typeface="B Nazanin"/>
               </a:rPr>
               <a:t>۴۰۱۷ تعداد کل کندل‌هاست؛ تعداد مؤثر ارزیابی پس از گرم‌شدن ویژگی‌ها، افق هدف و purge کمتر می‌شود.</a:t>
             </a:r>
@@ -10268,22 +10268,22 @@
           <a:p>
             <a:pPr algn="r" rtl="1" marL="0" indent="0">
               <a:defRPr lang="fa-IR" sz="2700" b="1">
-                <a:latin typeface="B Nazanin"/>
-                <a:ea typeface="B Nazanin"/>
-                <a:cs typeface="B Nazanin"/>
-                <a:solidFill>
-                  <a:srgbClr val="F4F6FB"/>
-                </a:solidFill>
+                <a:solidFill>
+                  <a:srgbClr val="F4F6FB"/>
+                </a:solidFill>
+                <a:latin typeface="B Nazanin"/>
+                <a:ea typeface="B Nazanin"/>
+                <a:cs typeface="B Nazanin"/>
               </a:defRPr>
             </a:pPr>
             <a:r>
               <a:rPr lang="fa-IR" sz="2700" b="1">
-                <a:latin typeface="B Nazanin"/>
-                <a:ea typeface="B Nazanin"/>
-                <a:cs typeface="B Nazanin"/>
-                <a:solidFill>
-                  <a:srgbClr val="F4F6FB"/>
-                </a:solidFill>
+                <a:solidFill>
+                  <a:srgbClr val="F4F6FB"/>
+                </a:solidFill>
+                <a:latin typeface="B Nazanin"/>
+                <a:ea typeface="B Nazanin"/>
+                <a:cs typeface="B Nazanin"/>
               </a:rPr>
               <a:t>۵. آماده‌سازی داده و طراحی ویژگی‌ها</a:t>
             </a:r>
@@ -10342,22 +10342,22 @@
           <a:p>
             <a:pPr algn="r" rtl="1" marL="0" indent="0">
               <a:defRPr lang="fa-IR" sz="1000" b="0">
-                <a:latin typeface="B Nazanin"/>
-                <a:ea typeface="B Nazanin"/>
-                <a:cs typeface="B Nazanin"/>
                 <a:solidFill>
                   <a:srgbClr val="AAB4C8"/>
                 </a:solidFill>
+                <a:latin typeface="B Nazanin"/>
+                <a:ea typeface="B Nazanin"/>
+                <a:cs typeface="B Nazanin"/>
               </a:defRPr>
             </a:pPr>
             <a:r>
               <a:rPr lang="fa-IR" sz="1000" b="0">
-                <a:latin typeface="B Nazanin"/>
-                <a:ea typeface="B Nazanin"/>
-                <a:cs typeface="B Nazanin"/>
                 <a:solidFill>
                   <a:srgbClr val="AAB4C8"/>
                 </a:solidFill>
+                <a:latin typeface="B Nazanin"/>
+                <a:ea typeface="B Nazanin"/>
+                <a:cs typeface="B Nazanin"/>
               </a:rPr>
               <a:t>ارائه پژوهش | اسلاید 6 | B Nazanin</a:t>
             </a:r>
@@ -10394,22 +10394,22 @@
           <a:p>
             <a:pPr algn="r" rtl="1" marL="0" indent="0">
               <a:defRPr lang="fa-IR" sz="1300" b="1">
-                <a:latin typeface="B Nazanin"/>
-                <a:ea typeface="B Nazanin"/>
-                <a:cs typeface="B Nazanin"/>
                 <a:solidFill>
                   <a:srgbClr val="E0B24A"/>
                 </a:solidFill>
+                <a:latin typeface="B Nazanin"/>
+                <a:ea typeface="B Nazanin"/>
+                <a:cs typeface="B Nazanin"/>
               </a:defRPr>
             </a:pPr>
             <a:r>
               <a:rPr lang="fa-IR" sz="1300" b="1">
-                <a:latin typeface="B Nazanin"/>
-                <a:ea typeface="B Nazanin"/>
-                <a:cs typeface="B Nazanin"/>
                 <a:solidFill>
                   <a:srgbClr val="E0B24A"/>
                 </a:solidFill>
+                <a:latin typeface="B Nazanin"/>
+                <a:ea typeface="B Nazanin"/>
+                <a:cs typeface="B Nazanin"/>
               </a:rPr>
               <a:t>اصل طراحی: فقط اطلاعات در دسترس تا زمان تصمیم</a:t>
             </a:r>
@@ -10490,22 +10490,22 @@
           <a:p>
             <a:pPr algn="r" rtl="1" marL="0" indent="0">
               <a:defRPr lang="fa-IR" sz="1700" b="1">
-                <a:latin typeface="B Nazanin"/>
-                <a:ea typeface="B Nazanin"/>
-                <a:cs typeface="B Nazanin"/>
                 <a:solidFill>
                   <a:srgbClr val="E0B24A"/>
                 </a:solidFill>
+                <a:latin typeface="B Nazanin"/>
+                <a:ea typeface="B Nazanin"/>
+                <a:cs typeface="B Nazanin"/>
               </a:defRPr>
             </a:pPr>
             <a:r>
               <a:rPr lang="fa-IR" sz="1700" b="1">
-                <a:latin typeface="B Nazanin"/>
-                <a:ea typeface="B Nazanin"/>
-                <a:cs typeface="B Nazanin"/>
                 <a:solidFill>
                   <a:srgbClr val="E0B24A"/>
                 </a:solidFill>
+                <a:latin typeface="B Nazanin"/>
+                <a:ea typeface="B Nazanin"/>
+                <a:cs typeface="B Nazanin"/>
               </a:rPr>
               <a:t>قیمت و بازده</a:t>
             </a:r>
@@ -10542,22 +10542,22 @@
           <a:p>
             <a:pPr algn="r" rtl="1" marL="0" indent="0">
               <a:defRPr lang="fa-IR" sz="1400" b="0">
-                <a:latin typeface="B Nazanin"/>
-                <a:ea typeface="B Nazanin"/>
-                <a:cs typeface="B Nazanin"/>
-                <a:solidFill>
-                  <a:srgbClr val="F4F6FB"/>
-                </a:solidFill>
+                <a:solidFill>
+                  <a:srgbClr val="F4F6FB"/>
+                </a:solidFill>
+                <a:latin typeface="B Nazanin"/>
+                <a:ea typeface="B Nazanin"/>
+                <a:cs typeface="B Nazanin"/>
               </a:defRPr>
             </a:pPr>
             <a:r>
               <a:rPr lang="fa-IR" sz="1400" b="0">
-                <a:latin typeface="B Nazanin"/>
-                <a:ea typeface="B Nazanin"/>
-                <a:cs typeface="B Nazanin"/>
-                <a:solidFill>
-                  <a:srgbClr val="F4F6FB"/>
-                </a:solidFill>
+                <a:solidFill>
+                  <a:srgbClr val="F4F6FB"/>
+                </a:solidFill>
+                <a:latin typeface="B Nazanin"/>
+                <a:ea typeface="B Nazanin"/>
+                <a:cs typeface="B Nazanin"/>
               </a:rPr>
               <a:t>وقفه‌های ۱، ۲، ۳، ۵، ۱۰ و ۲۰ روزه</a:t>
             </a:r>
@@ -10570,22 +10570,22 @@
           <a:p>
             <a:pPr algn="r" rtl="1" marL="0" indent="0">
               <a:defRPr lang="fa-IR" sz="1400" b="0">
-                <a:latin typeface="B Nazanin"/>
-                <a:ea typeface="B Nazanin"/>
-                <a:cs typeface="B Nazanin"/>
-                <a:solidFill>
-                  <a:srgbClr val="F4F6FB"/>
-                </a:solidFill>
+                <a:solidFill>
+                  <a:srgbClr val="F4F6FB"/>
+                </a:solidFill>
+                <a:latin typeface="B Nazanin"/>
+                <a:ea typeface="B Nazanin"/>
+                <a:cs typeface="B Nazanin"/>
               </a:defRPr>
             </a:pPr>
             <a:r>
               <a:rPr lang="fa-IR" sz="1400" b="0">
-                <a:latin typeface="B Nazanin"/>
-                <a:ea typeface="B Nazanin"/>
-                <a:cs typeface="B Nazanin"/>
-                <a:solidFill>
-                  <a:srgbClr val="F4F6FB"/>
-                </a:solidFill>
+                <a:solidFill>
+                  <a:srgbClr val="F4F6FB"/>
+                </a:solidFill>
+                <a:latin typeface="B Nazanin"/>
+                <a:ea typeface="B Nazanin"/>
+                <a:cs typeface="B Nazanin"/>
               </a:rPr>
               <a:t>مومنتوم و روند</a:t>
             </a:r>
@@ -10598,22 +10598,22 @@
           <a:p>
             <a:pPr algn="r" rtl="1" marL="0" indent="0">
               <a:defRPr lang="fa-IR" sz="1400" b="0">
-                <a:latin typeface="B Nazanin"/>
-                <a:ea typeface="B Nazanin"/>
-                <a:cs typeface="B Nazanin"/>
-                <a:solidFill>
-                  <a:srgbClr val="F4F6FB"/>
-                </a:solidFill>
+                <a:solidFill>
+                  <a:srgbClr val="F4F6FB"/>
+                </a:solidFill>
+                <a:latin typeface="B Nazanin"/>
+                <a:ea typeface="B Nazanin"/>
+                <a:cs typeface="B Nazanin"/>
               </a:defRPr>
             </a:pPr>
             <a:r>
               <a:rPr lang="fa-IR" sz="1400" b="0">
-                <a:latin typeface="B Nazanin"/>
-                <a:ea typeface="B Nazanin"/>
-                <a:cs typeface="B Nazanin"/>
-                <a:solidFill>
-                  <a:srgbClr val="F4F6FB"/>
-                </a:solidFill>
+                <a:solidFill>
+                  <a:srgbClr val="F4F6FB"/>
+                </a:solidFill>
+                <a:latin typeface="B Nazanin"/>
+                <a:ea typeface="B Nazanin"/>
+                <a:cs typeface="B Nazanin"/>
               </a:rPr>
               <a:t>افت سرمایه و شیب روند</a:t>
             </a:r>
@@ -10694,22 +10694,22 @@
           <a:p>
             <a:pPr algn="r" rtl="1" marL="0" indent="0">
               <a:defRPr lang="fa-IR" sz="1700" b="1">
-                <a:latin typeface="B Nazanin"/>
-                <a:ea typeface="B Nazanin"/>
-                <a:cs typeface="B Nazanin"/>
                 <a:solidFill>
                   <a:srgbClr val="21C4B1"/>
                 </a:solidFill>
+                <a:latin typeface="B Nazanin"/>
+                <a:ea typeface="B Nazanin"/>
+                <a:cs typeface="B Nazanin"/>
               </a:defRPr>
             </a:pPr>
             <a:r>
               <a:rPr lang="fa-IR" sz="1700" b="1">
-                <a:latin typeface="B Nazanin"/>
-                <a:ea typeface="B Nazanin"/>
-                <a:cs typeface="B Nazanin"/>
                 <a:solidFill>
                   <a:srgbClr val="21C4B1"/>
                 </a:solidFill>
+                <a:latin typeface="B Nazanin"/>
+                <a:ea typeface="B Nazanin"/>
+                <a:cs typeface="B Nazanin"/>
               </a:rPr>
               <a:t>آمار غلتان</a:t>
             </a:r>
@@ -10746,22 +10746,22 @@
           <a:p>
             <a:pPr algn="r" rtl="1" marL="0" indent="0">
               <a:defRPr lang="fa-IR" sz="1400" b="0">
-                <a:latin typeface="B Nazanin"/>
-                <a:ea typeface="B Nazanin"/>
-                <a:cs typeface="B Nazanin"/>
-                <a:solidFill>
-                  <a:srgbClr val="F4F6FB"/>
-                </a:solidFill>
+                <a:solidFill>
+                  <a:srgbClr val="F4F6FB"/>
+                </a:solidFill>
+                <a:latin typeface="B Nazanin"/>
+                <a:ea typeface="B Nazanin"/>
+                <a:cs typeface="B Nazanin"/>
               </a:defRPr>
             </a:pPr>
             <a:r>
               <a:rPr lang="fa-IR" sz="1400" b="0">
-                <a:latin typeface="B Nazanin"/>
-                <a:ea typeface="B Nazanin"/>
-                <a:cs typeface="B Nazanin"/>
-                <a:solidFill>
-                  <a:srgbClr val="F4F6FB"/>
-                </a:solidFill>
+                <a:solidFill>
+                  <a:srgbClr val="F4F6FB"/>
+                </a:solidFill>
+                <a:latin typeface="B Nazanin"/>
+                <a:ea typeface="B Nazanin"/>
+                <a:cs typeface="B Nazanin"/>
               </a:rPr>
               <a:t>پنجره‌های ۵، ۱۰، ۲۰، ۶۳ و ۱۲۶ روزه</a:t>
             </a:r>
@@ -10774,22 +10774,22 @@
           <a:p>
             <a:pPr algn="r" rtl="1" marL="0" indent="0">
               <a:defRPr lang="fa-IR" sz="1400" b="0">
-                <a:latin typeface="B Nazanin"/>
-                <a:ea typeface="B Nazanin"/>
-                <a:cs typeface="B Nazanin"/>
-                <a:solidFill>
-                  <a:srgbClr val="F4F6FB"/>
-                </a:solidFill>
+                <a:solidFill>
+                  <a:srgbClr val="F4F6FB"/>
+                </a:solidFill>
+                <a:latin typeface="B Nazanin"/>
+                <a:ea typeface="B Nazanin"/>
+                <a:cs typeface="B Nazanin"/>
               </a:defRPr>
             </a:pPr>
             <a:r>
               <a:rPr lang="fa-IR" sz="1400" b="0">
-                <a:latin typeface="B Nazanin"/>
-                <a:ea typeface="B Nazanin"/>
-                <a:cs typeface="B Nazanin"/>
-                <a:solidFill>
-                  <a:srgbClr val="F4F6FB"/>
-                </a:solidFill>
+                <a:solidFill>
+                  <a:srgbClr val="F4F6FB"/>
+                </a:solidFill>
+                <a:latin typeface="B Nazanin"/>
+                <a:ea typeface="B Nazanin"/>
+                <a:cs typeface="B Nazanin"/>
               </a:rPr>
               <a:t>نوسان و EWMA</a:t>
             </a:r>
@@ -10802,22 +10802,22 @@
           <a:p>
             <a:pPr algn="r" rtl="1" marL="0" indent="0">
               <a:defRPr lang="fa-IR" sz="1400" b="0">
-                <a:latin typeface="B Nazanin"/>
-                <a:ea typeface="B Nazanin"/>
-                <a:cs typeface="B Nazanin"/>
-                <a:solidFill>
-                  <a:srgbClr val="F4F6FB"/>
-                </a:solidFill>
+                <a:solidFill>
+                  <a:srgbClr val="F4F6FB"/>
+                </a:solidFill>
+                <a:latin typeface="B Nazanin"/>
+                <a:ea typeface="B Nazanin"/>
+                <a:cs typeface="B Nazanin"/>
               </a:defRPr>
             </a:pPr>
             <a:r>
               <a:rPr lang="fa-IR" sz="1400" b="0">
-                <a:latin typeface="B Nazanin"/>
-                <a:ea typeface="B Nazanin"/>
-                <a:cs typeface="B Nazanin"/>
-                <a:solidFill>
-                  <a:srgbClr val="F4F6FB"/>
-                </a:solidFill>
+                <a:solidFill>
+                  <a:srgbClr val="F4F6FB"/>
+                </a:solidFill>
+                <a:latin typeface="B Nazanin"/>
+                <a:ea typeface="B Nazanin"/>
+                <a:cs typeface="B Nazanin"/>
               </a:rPr>
               <a:t>Z-score، چولگی و کشیدگی</a:t>
             </a:r>
@@ -10898,22 +10898,22 @@
           <a:p>
             <a:pPr algn="r" rtl="1" marL="0" indent="0">
               <a:defRPr lang="fa-IR" sz="1700" b="1">
-                <a:latin typeface="B Nazanin"/>
-                <a:ea typeface="B Nazanin"/>
-                <a:cs typeface="B Nazanin"/>
                 <a:solidFill>
                   <a:srgbClr val="6EA8FE"/>
                 </a:solidFill>
+                <a:latin typeface="B Nazanin"/>
+                <a:ea typeface="B Nazanin"/>
+                <a:cs typeface="B Nazanin"/>
               </a:defRPr>
             </a:pPr>
             <a:r>
               <a:rPr lang="fa-IR" sz="1700" b="1">
-                <a:latin typeface="B Nazanin"/>
-                <a:ea typeface="B Nazanin"/>
-                <a:cs typeface="B Nazanin"/>
                 <a:solidFill>
                   <a:srgbClr val="6EA8FE"/>
                 </a:solidFill>
+                <a:latin typeface="B Nazanin"/>
+                <a:ea typeface="B Nazanin"/>
+                <a:cs typeface="B Nazanin"/>
               </a:rPr>
               <a:t>شاخص‌های تکنیکی</a:t>
             </a:r>
@@ -10950,22 +10950,22 @@
           <a:p>
             <a:pPr algn="r" rtl="1" marL="0" indent="0">
               <a:defRPr lang="fa-IR" sz="1400" b="0">
-                <a:latin typeface="B Nazanin"/>
-                <a:ea typeface="B Nazanin"/>
-                <a:cs typeface="B Nazanin"/>
-                <a:solidFill>
-                  <a:srgbClr val="F4F6FB"/>
-                </a:solidFill>
+                <a:solidFill>
+                  <a:srgbClr val="F4F6FB"/>
+                </a:solidFill>
+                <a:latin typeface="B Nazanin"/>
+                <a:ea typeface="B Nazanin"/>
+                <a:cs typeface="B Nazanin"/>
               </a:defRPr>
             </a:pPr>
             <a:r>
               <a:rPr lang="fa-IR" sz="1400" b="0">
-                <a:latin typeface="B Nazanin"/>
-                <a:ea typeface="B Nazanin"/>
-                <a:cs typeface="B Nazanin"/>
-                <a:solidFill>
-                  <a:srgbClr val="F4F6FB"/>
-                </a:solidFill>
+                <a:solidFill>
+                  <a:srgbClr val="F4F6FB"/>
+                </a:solidFill>
+                <a:latin typeface="B Nazanin"/>
+                <a:ea typeface="B Nazanin"/>
+                <a:cs typeface="B Nazanin"/>
               </a:rPr>
               <a:t>RSI، ATR و MACD</a:t>
             </a:r>
@@ -10978,22 +10978,22 @@
           <a:p>
             <a:pPr algn="r" rtl="1" marL="0" indent="0">
               <a:defRPr lang="fa-IR" sz="1400" b="0">
-                <a:latin typeface="B Nazanin"/>
-                <a:ea typeface="B Nazanin"/>
-                <a:cs typeface="B Nazanin"/>
-                <a:solidFill>
-                  <a:srgbClr val="F4F6FB"/>
-                </a:solidFill>
+                <a:solidFill>
+                  <a:srgbClr val="F4F6FB"/>
+                </a:solidFill>
+                <a:latin typeface="B Nazanin"/>
+                <a:ea typeface="B Nazanin"/>
+                <a:cs typeface="B Nazanin"/>
               </a:defRPr>
             </a:pPr>
             <a:r>
               <a:rPr lang="fa-IR" sz="1400" b="0">
-                <a:latin typeface="B Nazanin"/>
-                <a:ea typeface="B Nazanin"/>
-                <a:cs typeface="B Nazanin"/>
-                <a:solidFill>
-                  <a:srgbClr val="F4F6FB"/>
-                </a:solidFill>
+                <a:solidFill>
+                  <a:srgbClr val="F4F6FB"/>
+                </a:solidFill>
+                <a:latin typeface="B Nazanin"/>
+                <a:ea typeface="B Nazanin"/>
+                <a:cs typeface="B Nazanin"/>
               </a:rPr>
               <a:t>ویژگی‌های حجم</a:t>
             </a:r>
@@ -11006,22 +11006,22 @@
           <a:p>
             <a:pPr algn="r" rtl="1" marL="0" indent="0">
               <a:defRPr lang="fa-IR" sz="1400" b="0">
-                <a:latin typeface="B Nazanin"/>
-                <a:ea typeface="B Nazanin"/>
-                <a:cs typeface="B Nazanin"/>
-                <a:solidFill>
-                  <a:srgbClr val="F4F6FB"/>
-                </a:solidFill>
+                <a:solidFill>
+                  <a:srgbClr val="F4F6FB"/>
+                </a:solidFill>
+                <a:latin typeface="B Nazanin"/>
+                <a:ea typeface="B Nazanin"/>
+                <a:cs typeface="B Nazanin"/>
               </a:defRPr>
             </a:pPr>
             <a:r>
               <a:rPr lang="fa-IR" sz="1400" b="0">
-                <a:latin typeface="B Nazanin"/>
-                <a:ea typeface="B Nazanin"/>
-                <a:cs typeface="B Nazanin"/>
-                <a:solidFill>
-                  <a:srgbClr val="F4F6FB"/>
-                </a:solidFill>
+                <a:solidFill>
+                  <a:srgbClr val="F4F6FB"/>
+                </a:solidFill>
+                <a:latin typeface="B Nazanin"/>
+                <a:ea typeface="B Nazanin"/>
+                <a:cs typeface="B Nazanin"/>
               </a:rPr>
               <a:t>تقویم چرخه‌ای و آنتروپی علامت</a:t>
             </a:r>
@@ -11058,22 +11058,22 @@
           <a:p>
             <a:pPr algn="ctr" rtl="1" marL="0" indent="0">
               <a:defRPr lang="fa-IR" sz="1800" b="1">
-                <a:latin typeface="B Nazanin"/>
-                <a:ea typeface="B Nazanin"/>
-                <a:cs typeface="B Nazanin"/>
                 <a:solidFill>
                   <a:srgbClr val="21C4B1"/>
                 </a:solidFill>
+                <a:latin typeface="B Nazanin"/>
+                <a:ea typeface="B Nazanin"/>
+                <a:cs typeface="B Nazanin"/>
               </a:defRPr>
             </a:pPr>
             <a:r>
               <a:rPr lang="fa-IR" sz="1800" b="1">
-                <a:latin typeface="B Nazanin"/>
-                <a:ea typeface="B Nazanin"/>
-                <a:cs typeface="B Nazanin"/>
                 <a:solidFill>
                   <a:srgbClr val="21C4B1"/>
                 </a:solidFill>
+                <a:latin typeface="B Nazanin"/>
+                <a:ea typeface="B Nazanin"/>
+                <a:cs typeface="B Nazanin"/>
               </a:rPr>
               <a:t>مقادیر مفقود و مقیاس‌بندی فقط درون داده آموزش هر fold تعیین می‌شوند.</a:t>
             </a:r>
@@ -11143,22 +11143,22 @@
           <a:p>
             <a:pPr algn="r" rtl="1" marL="0" indent="0">
               <a:defRPr lang="fa-IR" sz="2700" b="1">
-                <a:latin typeface="B Nazanin"/>
-                <a:ea typeface="B Nazanin"/>
-                <a:cs typeface="B Nazanin"/>
-                <a:solidFill>
-                  <a:srgbClr val="F4F6FB"/>
-                </a:solidFill>
+                <a:solidFill>
+                  <a:srgbClr val="F4F6FB"/>
+                </a:solidFill>
+                <a:latin typeface="B Nazanin"/>
+                <a:ea typeface="B Nazanin"/>
+                <a:cs typeface="B Nazanin"/>
               </a:defRPr>
             </a:pPr>
             <a:r>
               <a:rPr lang="fa-IR" sz="2700" b="1">
-                <a:latin typeface="B Nazanin"/>
-                <a:ea typeface="B Nazanin"/>
-                <a:cs typeface="B Nazanin"/>
-                <a:solidFill>
-                  <a:srgbClr val="F4F6FB"/>
-                </a:solidFill>
+                <a:solidFill>
+                  <a:srgbClr val="F4F6FB"/>
+                </a:solidFill>
+                <a:latin typeface="B Nazanin"/>
+                <a:ea typeface="B Nazanin"/>
+                <a:cs typeface="B Nazanin"/>
               </a:rPr>
               <a:t>۶. نمای هرست و استخراج رژیم بازار</a:t>
             </a:r>
@@ -11217,22 +11217,22 @@
           <a:p>
             <a:pPr algn="r" rtl="1" marL="0" indent="0">
               <a:defRPr lang="fa-IR" sz="1000" b="0">
-                <a:latin typeface="B Nazanin"/>
-                <a:ea typeface="B Nazanin"/>
-                <a:cs typeface="B Nazanin"/>
                 <a:solidFill>
                   <a:srgbClr val="AAB4C8"/>
                 </a:solidFill>
+                <a:latin typeface="B Nazanin"/>
+                <a:ea typeface="B Nazanin"/>
+                <a:cs typeface="B Nazanin"/>
               </a:defRPr>
             </a:pPr>
             <a:r>
               <a:rPr lang="fa-IR" sz="1000" b="0">
-                <a:latin typeface="B Nazanin"/>
-                <a:ea typeface="B Nazanin"/>
-                <a:cs typeface="B Nazanin"/>
                 <a:solidFill>
                   <a:srgbClr val="AAB4C8"/>
                 </a:solidFill>
+                <a:latin typeface="B Nazanin"/>
+                <a:ea typeface="B Nazanin"/>
+                <a:cs typeface="B Nazanin"/>
               </a:rPr>
               <a:t>ارائه پژوهش | اسلاید 7 | B Nazanin</a:t>
             </a:r>
@@ -11291,22 +11291,22 @@
           <a:p>
             <a:pPr algn="r" rtl="1" marL="0" indent="0">
               <a:defRPr lang="fa-IR" sz="2100" b="1">
-                <a:latin typeface="B Nazanin"/>
-                <a:ea typeface="B Nazanin"/>
-                <a:cs typeface="B Nazanin"/>
                 <a:solidFill>
                   <a:srgbClr val="E0B24A"/>
                 </a:solidFill>
+                <a:latin typeface="B Nazanin"/>
+                <a:ea typeface="B Nazanin"/>
+                <a:cs typeface="B Nazanin"/>
               </a:defRPr>
             </a:pPr>
             <a:r>
               <a:rPr lang="fa-IR" sz="2100" b="1">
-                <a:latin typeface="B Nazanin"/>
-                <a:ea typeface="B Nazanin"/>
-                <a:cs typeface="B Nazanin"/>
                 <a:solidFill>
                   <a:srgbClr val="E0B24A"/>
                 </a:solidFill>
+                <a:latin typeface="B Nazanin"/>
+                <a:ea typeface="B Nazanin"/>
+                <a:cs typeface="B Nazanin"/>
               </a:rPr>
               <a:t>DFA1 چندمقیاسی</a:t>
             </a:r>
@@ -11343,22 +11343,22 @@
           <a:p>
             <a:pPr algn="r" rtl="1" marL="0" indent="0">
               <a:defRPr lang="fa-IR" sz="1700" b="0">
-                <a:latin typeface="B Nazanin"/>
-                <a:ea typeface="B Nazanin"/>
-                <a:cs typeface="B Nazanin"/>
-                <a:solidFill>
-                  <a:srgbClr val="F4F6FB"/>
-                </a:solidFill>
+                <a:solidFill>
+                  <a:srgbClr val="F4F6FB"/>
+                </a:solidFill>
+                <a:latin typeface="B Nazanin"/>
+                <a:ea typeface="B Nazanin"/>
+                <a:cs typeface="B Nazanin"/>
               </a:defRPr>
             </a:pPr>
             <a:r>
               <a:rPr lang="fa-IR" sz="1700" b="0">
-                <a:latin typeface="B Nazanin"/>
-                <a:ea typeface="B Nazanin"/>
-                <a:cs typeface="B Nazanin"/>
-                <a:solidFill>
-                  <a:srgbClr val="F4F6FB"/>
-                </a:solidFill>
+                <a:solidFill>
+                  <a:srgbClr val="F4F6FB"/>
+                </a:solidFill>
+                <a:latin typeface="B Nazanin"/>
+                <a:ea typeface="B Nazanin"/>
+                <a:cs typeface="B Nazanin"/>
               </a:rPr>
               <a:t>ورودی: تفاضل لگاریتم قیمت</a:t>
             </a:r>
@@ -11371,22 +11371,22 @@
           <a:p>
             <a:pPr algn="r" rtl="1" marL="0" indent="0">
               <a:defRPr lang="fa-IR" sz="1700" b="0">
-                <a:latin typeface="B Nazanin"/>
-                <a:ea typeface="B Nazanin"/>
-                <a:cs typeface="B Nazanin"/>
-                <a:solidFill>
-                  <a:srgbClr val="F4F6FB"/>
-                </a:solidFill>
+                <a:solidFill>
+                  <a:srgbClr val="F4F6FB"/>
+                </a:solidFill>
+                <a:latin typeface="B Nazanin"/>
+                <a:ea typeface="B Nazanin"/>
+                <a:cs typeface="B Nazanin"/>
               </a:defRPr>
             </a:pPr>
             <a:r>
               <a:rPr lang="fa-IR" sz="1700" b="0">
-                <a:latin typeface="B Nazanin"/>
-                <a:ea typeface="B Nazanin"/>
-                <a:cs typeface="B Nazanin"/>
-                <a:solidFill>
-                  <a:srgbClr val="F4F6FB"/>
-                </a:solidFill>
+                <a:solidFill>
+                  <a:srgbClr val="F4F6FB"/>
+                </a:solidFill>
+                <a:latin typeface="B Nazanin"/>
+                <a:ea typeface="B Nazanin"/>
+                <a:cs typeface="B Nazanin"/>
               </a:rPr>
               <a:t>پنجره‌ها: ۶۴ و ۱۲۸ مشاهده</a:t>
             </a:r>
@@ -11399,22 +11399,22 @@
           <a:p>
             <a:pPr algn="r" rtl="1" marL="0" indent="0">
               <a:defRPr lang="fa-IR" sz="1700" b="0">
-                <a:latin typeface="B Nazanin"/>
-                <a:ea typeface="B Nazanin"/>
-                <a:cs typeface="B Nazanin"/>
-                <a:solidFill>
-                  <a:srgbClr val="F4F6FB"/>
-                </a:solidFill>
+                <a:solidFill>
+                  <a:srgbClr val="F4F6FB"/>
+                </a:solidFill>
+                <a:latin typeface="B Nazanin"/>
+                <a:ea typeface="B Nazanin"/>
+                <a:cs typeface="B Nazanin"/>
               </a:defRPr>
             </a:pPr>
             <a:r>
               <a:rPr lang="fa-IR" sz="1700" b="0">
-                <a:latin typeface="B Nazanin"/>
-                <a:ea typeface="B Nazanin"/>
-                <a:cs typeface="B Nazanin"/>
-                <a:solidFill>
-                  <a:srgbClr val="F4F6FB"/>
-                </a:solidFill>
+                <a:solidFill>
+                  <a:srgbClr val="F4F6FB"/>
+                </a:solidFill>
+                <a:latin typeface="B Nazanin"/>
+                <a:ea typeface="B Nazanin"/>
+                <a:cs typeface="B Nazanin"/>
               </a:rPr>
               <a:t>مقیاس‌ها: توان‌های دو از ۴ تا حدود n/3</a:t>
             </a:r>
@@ -11427,22 +11427,22 @@
           <a:p>
             <a:pPr algn="r" rtl="1" marL="0" indent="0">
               <a:defRPr lang="fa-IR" sz="1700" b="0">
-                <a:latin typeface="B Nazanin"/>
-                <a:ea typeface="B Nazanin"/>
-                <a:cs typeface="B Nazanin"/>
-                <a:solidFill>
-                  <a:srgbClr val="F4F6FB"/>
-                </a:solidFill>
+                <a:solidFill>
+                  <a:srgbClr val="F4F6FB"/>
+                </a:solidFill>
+                <a:latin typeface="B Nazanin"/>
+                <a:ea typeface="B Nazanin"/>
+                <a:cs typeface="B Nazanin"/>
               </a:defRPr>
             </a:pPr>
             <a:r>
               <a:rPr lang="fa-IR" sz="1700" b="0">
-                <a:latin typeface="B Nazanin"/>
-                <a:ea typeface="B Nazanin"/>
-                <a:cs typeface="B Nazanin"/>
-                <a:solidFill>
-                  <a:srgbClr val="F4F6FB"/>
-                </a:solidFill>
+                <a:solidFill>
+                  <a:srgbClr val="F4F6FB"/>
+                </a:solidFill>
+                <a:latin typeface="B Nazanin"/>
+                <a:ea typeface="B Nazanin"/>
+                <a:cs typeface="B Nazanin"/>
               </a:rPr>
               <a:t>حداقل ۳ مقیاس قابل استفاده</a:t>
             </a:r>
@@ -11455,22 +11455,22 @@
           <a:p>
             <a:pPr algn="r" rtl="1" marL="0" indent="0">
               <a:defRPr lang="fa-IR" sz="1700" b="0">
-                <a:latin typeface="B Nazanin"/>
-                <a:ea typeface="B Nazanin"/>
-                <a:cs typeface="B Nazanin"/>
-                <a:solidFill>
-                  <a:srgbClr val="F4F6FB"/>
-                </a:solidFill>
+                <a:solidFill>
+                  <a:srgbClr val="F4F6FB"/>
+                </a:solidFill>
+                <a:latin typeface="B Nazanin"/>
+                <a:ea typeface="B Nazanin"/>
+                <a:cs typeface="B Nazanin"/>
               </a:defRPr>
             </a:pPr>
             <a:r>
               <a:rPr lang="fa-IR" sz="1700" b="0">
-                <a:latin typeface="B Nazanin"/>
-                <a:ea typeface="B Nazanin"/>
-                <a:cs typeface="B Nazanin"/>
-                <a:solidFill>
-                  <a:srgbClr val="F4F6FB"/>
-                </a:solidFill>
+                <a:solidFill>
+                  <a:srgbClr val="F4F6FB"/>
+                </a:solidFill>
+                <a:latin typeface="B Nazanin"/>
+                <a:ea typeface="B Nazanin"/>
+                <a:cs typeface="B Nazanin"/>
               </a:rPr>
               <a:t>برازش شیب خط لگاریتمی</a:t>
             </a:r>
@@ -11529,22 +11529,22 @@
           <a:p>
             <a:pPr algn="r" rtl="1" marL="0" indent="0">
               <a:defRPr lang="fa-IR" sz="2100" b="1">
-                <a:latin typeface="B Nazanin"/>
-                <a:ea typeface="B Nazanin"/>
-                <a:cs typeface="B Nazanin"/>
                 <a:solidFill>
                   <a:srgbClr val="21C4B1"/>
                 </a:solidFill>
+                <a:latin typeface="B Nazanin"/>
+                <a:ea typeface="B Nazanin"/>
+                <a:cs typeface="B Nazanin"/>
               </a:defRPr>
             </a:pPr>
             <a:r>
               <a:rPr lang="fa-IR" sz="2100" b="1">
-                <a:latin typeface="B Nazanin"/>
-                <a:ea typeface="B Nazanin"/>
-                <a:cs typeface="B Nazanin"/>
                 <a:solidFill>
                   <a:srgbClr val="21C4B1"/>
                 </a:solidFill>
+                <a:latin typeface="B Nazanin"/>
+                <a:ea typeface="B Nazanin"/>
+                <a:cs typeface="B Nazanin"/>
               </a:rPr>
               <a:t>تفسیر و احتیاط</a:t>
             </a:r>
@@ -11581,22 +11581,22 @@
           <a:p>
             <a:pPr algn="r" rtl="1" marL="0" indent="0">
               <a:defRPr lang="fa-IR" sz="1800" b="0">
-                <a:latin typeface="B Nazanin"/>
-                <a:ea typeface="B Nazanin"/>
-                <a:cs typeface="B Nazanin"/>
-                <a:solidFill>
-                  <a:srgbClr val="F4F6FB"/>
-                </a:solidFill>
+                <a:solidFill>
+                  <a:srgbClr val="F4F6FB"/>
+                </a:solidFill>
+                <a:latin typeface="B Nazanin"/>
+                <a:ea typeface="B Nazanin"/>
+                <a:cs typeface="B Nazanin"/>
               </a:defRPr>
             </a:pPr>
             <a:r>
               <a:rPr lang="fa-IR" sz="1800" b="0">
-                <a:latin typeface="B Nazanin"/>
-                <a:ea typeface="B Nazanin"/>
-                <a:cs typeface="B Nazanin"/>
-                <a:solidFill>
-                  <a:srgbClr val="F4F6FB"/>
-                </a:solidFill>
+                <a:solidFill>
+                  <a:srgbClr val="F4F6FB"/>
+                </a:solidFill>
+                <a:latin typeface="B Nazanin"/>
+                <a:ea typeface="B Nazanin"/>
+                <a:cs typeface="B Nazanin"/>
               </a:rPr>
               <a:t>H&gt;0.5  → گرایش به تداوم</a:t>
             </a:r>
@@ -11609,22 +11609,22 @@
           <a:p>
             <a:pPr algn="r" rtl="1" marL="0" indent="0">
               <a:defRPr lang="fa-IR" sz="1800" b="0">
-                <a:latin typeface="B Nazanin"/>
-                <a:ea typeface="B Nazanin"/>
-                <a:cs typeface="B Nazanin"/>
-                <a:solidFill>
-                  <a:srgbClr val="F4F6FB"/>
-                </a:solidFill>
+                <a:solidFill>
+                  <a:srgbClr val="F4F6FB"/>
+                </a:solidFill>
+                <a:latin typeface="B Nazanin"/>
+                <a:ea typeface="B Nazanin"/>
+                <a:cs typeface="B Nazanin"/>
               </a:defRPr>
             </a:pPr>
             <a:r>
               <a:rPr lang="fa-IR" sz="1800" b="0">
-                <a:latin typeface="B Nazanin"/>
-                <a:ea typeface="B Nazanin"/>
-                <a:cs typeface="B Nazanin"/>
-                <a:solidFill>
-                  <a:srgbClr val="F4F6FB"/>
-                </a:solidFill>
+                <a:solidFill>
+                  <a:srgbClr val="F4F6FB"/>
+                </a:solidFill>
+                <a:latin typeface="B Nazanin"/>
+                <a:ea typeface="B Nazanin"/>
+                <a:cs typeface="B Nazanin"/>
               </a:rPr>
               <a:t>H&lt;0.5  → گرایش به بازگشت</a:t>
             </a:r>
@@ -11637,22 +11637,22 @@
           <a:p>
             <a:pPr algn="r" rtl="1" marL="0" indent="0">
               <a:defRPr lang="fa-IR" sz="1800" b="0">
-                <a:latin typeface="B Nazanin"/>
-                <a:ea typeface="B Nazanin"/>
-                <a:cs typeface="B Nazanin"/>
-                <a:solidFill>
-                  <a:srgbClr val="F4F6FB"/>
-                </a:solidFill>
+                <a:solidFill>
+                  <a:srgbClr val="F4F6FB"/>
+                </a:solidFill>
+                <a:latin typeface="B Nazanin"/>
+                <a:ea typeface="B Nazanin"/>
+                <a:cs typeface="B Nazanin"/>
               </a:defRPr>
             </a:pPr>
             <a:r>
               <a:rPr lang="fa-IR" sz="1800" b="0">
-                <a:latin typeface="B Nazanin"/>
-                <a:ea typeface="B Nazanin"/>
-                <a:cs typeface="B Nazanin"/>
-                <a:solidFill>
-                  <a:srgbClr val="F4F6FB"/>
-                </a:solidFill>
+                <a:solidFill>
+                  <a:srgbClr val="F4F6FB"/>
+                </a:solidFill>
+                <a:latin typeface="B Nazanin"/>
+                <a:ea typeface="B Nazanin"/>
+                <a:cs typeface="B Nazanin"/>
               </a:rPr>
               <a:t> </a:t>
             </a:r>
@@ -11665,22 +11665,22 @@
           <a:p>
             <a:pPr algn="r" rtl="1" marL="0" indent="0">
               <a:defRPr lang="fa-IR" sz="1800" b="0">
-                <a:latin typeface="B Nazanin"/>
-                <a:ea typeface="B Nazanin"/>
-                <a:cs typeface="B Nazanin"/>
-                <a:solidFill>
-                  <a:srgbClr val="F4F6FB"/>
-                </a:solidFill>
+                <a:solidFill>
+                  <a:srgbClr val="F4F6FB"/>
+                </a:solidFill>
+                <a:latin typeface="B Nazanin"/>
+                <a:ea typeface="B Nazanin"/>
+                <a:cs typeface="B Nazanin"/>
               </a:defRPr>
             </a:pPr>
             <a:r>
               <a:rPr lang="fa-IR" sz="1800" b="0">
-                <a:latin typeface="B Nazanin"/>
-                <a:ea typeface="B Nazanin"/>
-                <a:cs typeface="B Nazanin"/>
-                <a:solidFill>
-                  <a:srgbClr val="F4F6FB"/>
-                </a:solidFill>
+                <a:solidFill>
+                  <a:srgbClr val="F4F6FB"/>
+                </a:solidFill>
+                <a:latin typeface="B Nazanin"/>
+                <a:ea typeface="B Nazanin"/>
+                <a:cs typeface="B Nazanin"/>
               </a:rPr>
               <a:t>ویژگی‌های رژیمی با shift(1) و صدک‌های گذشته‌نگر ساخته می‌شوند.</a:t>
             </a:r>
@@ -11739,22 +11739,22 @@
           <a:p>
             <a:pPr algn="ctr" rtl="1" marL="0" indent="0">
               <a:defRPr lang="fa-IR" sz="1400" b="1">
-                <a:latin typeface="B Nazanin"/>
-                <a:ea typeface="B Nazanin"/>
-                <a:cs typeface="B Nazanin"/>
-                <a:solidFill>
-                  <a:srgbClr val="F4F6FB"/>
-                </a:solidFill>
+                <a:solidFill>
+                  <a:srgbClr val="F4F6FB"/>
+                </a:solidFill>
+                <a:latin typeface="B Nazanin"/>
+                <a:ea typeface="B Nazanin"/>
+                <a:cs typeface="B Nazanin"/>
               </a:defRPr>
             </a:pPr>
             <a:r>
               <a:rPr lang="fa-IR" sz="1400" b="1">
-                <a:latin typeface="B Nazanin"/>
-                <a:ea typeface="B Nazanin"/>
-                <a:cs typeface="B Nazanin"/>
-                <a:solidFill>
-                  <a:srgbClr val="F4F6FB"/>
-                </a:solidFill>
+                <a:solidFill>
+                  <a:srgbClr val="F4F6FB"/>
+                </a:solidFill>
+                <a:latin typeface="B Nazanin"/>
+                <a:ea typeface="B Nazanin"/>
+                <a:cs typeface="B Nazanin"/>
               </a:rPr>
               <a:t>قانون مستقیم خریدوفروش نیست</a:t>
             </a:r>
@@ -11824,22 +11824,22 @@
           <a:p>
             <a:pPr algn="r" rtl="1" marL="0" indent="0">
               <a:defRPr lang="fa-IR" sz="2700" b="1">
-                <a:latin typeface="B Nazanin"/>
-                <a:ea typeface="B Nazanin"/>
-                <a:cs typeface="B Nazanin"/>
-                <a:solidFill>
-                  <a:srgbClr val="F4F6FB"/>
-                </a:solidFill>
+                <a:solidFill>
+                  <a:srgbClr val="F4F6FB"/>
+                </a:solidFill>
+                <a:latin typeface="B Nazanin"/>
+                <a:ea typeface="B Nazanin"/>
+                <a:cs typeface="B Nazanin"/>
               </a:defRPr>
             </a:pPr>
             <a:r>
               <a:rPr lang="fa-IR" sz="2700" b="1">
-                <a:latin typeface="B Nazanin"/>
-                <a:ea typeface="B Nazanin"/>
-                <a:cs typeface="B Nazanin"/>
-                <a:solidFill>
-                  <a:srgbClr val="F4F6FB"/>
-                </a:solidFill>
+                <a:solidFill>
+                  <a:srgbClr val="F4F6FB"/>
+                </a:solidFill>
+                <a:latin typeface="B Nazanin"/>
+                <a:ea typeface="B Nazanin"/>
+                <a:cs typeface="B Nazanin"/>
               </a:rPr>
               <a:t>۷. تفکیک هدف آماری از قرارداد اجرایی</a:t>
             </a:r>
@@ -11898,22 +11898,22 @@
           <a:p>
             <a:pPr algn="r" rtl="1" marL="0" indent="0">
               <a:defRPr lang="fa-IR" sz="1000" b="0">
-                <a:latin typeface="B Nazanin"/>
-                <a:ea typeface="B Nazanin"/>
-                <a:cs typeface="B Nazanin"/>
                 <a:solidFill>
                   <a:srgbClr val="AAB4C8"/>
                 </a:solidFill>
+                <a:latin typeface="B Nazanin"/>
+                <a:ea typeface="B Nazanin"/>
+                <a:cs typeface="B Nazanin"/>
               </a:defRPr>
             </a:pPr>
             <a:r>
               <a:rPr lang="fa-IR" sz="1000" b="0">
-                <a:latin typeface="B Nazanin"/>
-                <a:ea typeface="B Nazanin"/>
-                <a:cs typeface="B Nazanin"/>
                 <a:solidFill>
                   <a:srgbClr val="AAB4C8"/>
                 </a:solidFill>
+                <a:latin typeface="B Nazanin"/>
+                <a:ea typeface="B Nazanin"/>
+                <a:cs typeface="B Nazanin"/>
               </a:rPr>
               <a:t>ارائه پژوهش | اسلاید 8 | B Nazanin</a:t>
             </a:r>
@@ -11972,22 +11972,22 @@
           <a:p>
             <a:pPr algn="r" rtl="1" marL="0" indent="0">
               <a:defRPr lang="fa-IR" sz="2100" b="1">
-                <a:latin typeface="B Nazanin"/>
-                <a:ea typeface="B Nazanin"/>
-                <a:cs typeface="B Nazanin"/>
                 <a:solidFill>
                   <a:srgbClr val="6EA8FE"/>
                 </a:solidFill>
+                <a:latin typeface="B Nazanin"/>
+                <a:ea typeface="B Nazanin"/>
+                <a:cs typeface="B Nazanin"/>
               </a:defRPr>
             </a:pPr>
             <a:r>
               <a:rPr lang="fa-IR" sz="2100" b="1">
-                <a:latin typeface="B Nazanin"/>
-                <a:ea typeface="B Nazanin"/>
-                <a:cs typeface="B Nazanin"/>
                 <a:solidFill>
                   <a:srgbClr val="6EA8FE"/>
                 </a:solidFill>
+                <a:latin typeface="B Nazanin"/>
+                <a:ea typeface="B Nazanin"/>
+                <a:cs typeface="B Nazanin"/>
               </a:rPr>
               <a:t>هدف آماری آموزش</a:t>
             </a:r>
@@ -12024,22 +12024,22 @@
           <a:p>
             <a:pPr algn="ctr" rtl="1" marL="0" indent="0">
               <a:defRPr lang="fa-IR" sz="2000" b="1">
-                <a:latin typeface="B Nazanin"/>
-                <a:ea typeface="B Nazanin"/>
-                <a:cs typeface="B Nazanin"/>
-                <a:solidFill>
-                  <a:srgbClr val="F4F6FB"/>
-                </a:solidFill>
+                <a:solidFill>
+                  <a:srgbClr val="F4F6FB"/>
+                </a:solidFill>
+                <a:latin typeface="B Nazanin"/>
+                <a:ea typeface="B Nazanin"/>
+                <a:cs typeface="B Nazanin"/>
               </a:defRPr>
             </a:pPr>
             <a:r>
               <a:rPr lang="fa-IR" sz="2000" b="1">
-                <a:latin typeface="B Nazanin"/>
-                <a:ea typeface="B Nazanin"/>
-                <a:cs typeface="B Nazanin"/>
-                <a:solidFill>
-                  <a:srgbClr val="F4F6FB"/>
-                </a:solidFill>
+                <a:solidFill>
+                  <a:srgbClr val="F4F6FB"/>
+                </a:solidFill>
+                <a:latin typeface="B Nazanin"/>
+                <a:ea typeface="B Nazanin"/>
+                <a:cs typeface="B Nazanin"/>
               </a:rPr>
               <a:t>r_stat(t,H) = log(C[t+H]) − log(C[t])</a:t>
             </a:r>
@@ -12076,22 +12076,22 @@
           <a:p>
             <a:pPr algn="r" rtl="1" marL="0" indent="0">
               <a:defRPr lang="fa-IR" sz="1600" b="0">
-                <a:latin typeface="B Nazanin"/>
-                <a:ea typeface="B Nazanin"/>
-                <a:cs typeface="B Nazanin"/>
                 <a:solidFill>
                   <a:srgbClr val="AAB4C8"/>
                 </a:solidFill>
+                <a:latin typeface="B Nazanin"/>
+                <a:ea typeface="B Nazanin"/>
+                <a:cs typeface="B Nazanin"/>
               </a:defRPr>
             </a:pPr>
             <a:r>
               <a:rPr lang="fa-IR" sz="1600" b="0">
-                <a:latin typeface="B Nazanin"/>
-                <a:ea typeface="B Nazanin"/>
-                <a:cs typeface="B Nazanin"/>
                 <a:solidFill>
                   <a:srgbClr val="AAB4C8"/>
                 </a:solidFill>
+                <a:latin typeface="B Nazanin"/>
+                <a:ea typeface="B Nazanin"/>
+                <a:cs typeface="B Nazanin"/>
               </a:rPr>
               <a:t>جهت بازده Close-to-Close برای سنجش الگوی پیش‌بینی.</a:t>
             </a:r>
@@ -12150,22 +12150,22 @@
           <a:p>
             <a:pPr algn="r" rtl="1" marL="0" indent="0">
               <a:defRPr lang="fa-IR" sz="2100" b="1">
-                <a:latin typeface="B Nazanin"/>
-                <a:ea typeface="B Nazanin"/>
-                <a:cs typeface="B Nazanin"/>
                 <a:solidFill>
                   <a:srgbClr val="21C4B1"/>
                 </a:solidFill>
+                <a:latin typeface="B Nazanin"/>
+                <a:ea typeface="B Nazanin"/>
+                <a:cs typeface="B Nazanin"/>
               </a:defRPr>
             </a:pPr>
             <a:r>
               <a:rPr lang="fa-IR" sz="2100" b="1">
-                <a:latin typeface="B Nazanin"/>
-                <a:ea typeface="B Nazanin"/>
-                <a:cs typeface="B Nazanin"/>
                 <a:solidFill>
                   <a:srgbClr val="21C4B1"/>
                 </a:solidFill>
+                <a:latin typeface="B Nazanin"/>
+                <a:ea typeface="B Nazanin"/>
+                <a:cs typeface="B Nazanin"/>
               </a:rPr>
               <a:t>قرارداد اجرایی بازپخش</a:t>
             </a:r>
@@ -12202,22 +12202,22 @@
           <a:p>
             <a:pPr algn="ctr" rtl="1" marL="0" indent="0">
               <a:defRPr lang="fa-IR" sz="2000" b="1">
-                <a:latin typeface="B Nazanin"/>
-                <a:ea typeface="B Nazanin"/>
-                <a:cs typeface="B Nazanin"/>
-                <a:solidFill>
-                  <a:srgbClr val="F4F6FB"/>
-                </a:solidFill>
+                <a:solidFill>
+                  <a:srgbClr val="F4F6FB"/>
+                </a:solidFill>
+                <a:latin typeface="B Nazanin"/>
+                <a:ea typeface="B Nazanin"/>
+                <a:cs typeface="B Nazanin"/>
               </a:defRPr>
             </a:pPr>
             <a:r>
               <a:rPr lang="fa-IR" sz="2000" b="1">
-                <a:latin typeface="B Nazanin"/>
-                <a:ea typeface="B Nazanin"/>
-                <a:cs typeface="B Nazanin"/>
-                <a:solidFill>
-                  <a:srgbClr val="F4F6FB"/>
-                </a:solidFill>
+                <a:solidFill>
+                  <a:srgbClr val="F4F6FB"/>
+                </a:solidFill>
+                <a:latin typeface="B Nazanin"/>
+                <a:ea typeface="B Nazanin"/>
+                <a:cs typeface="B Nazanin"/>
               </a:rPr>
               <a:t>r_exec(t,H) = log(O[t+1+H]) − log(O[t+1])</a:t>
             </a:r>
@@ -12254,22 +12254,22 @@
           <a:p>
             <a:pPr algn="r" rtl="1" marL="0" indent="0">
               <a:defRPr lang="fa-IR" sz="1600" b="0">
-                <a:latin typeface="B Nazanin"/>
-                <a:ea typeface="B Nazanin"/>
-                <a:cs typeface="B Nazanin"/>
                 <a:solidFill>
                   <a:srgbClr val="AAB4C8"/>
                 </a:solidFill>
+                <a:latin typeface="B Nazanin"/>
+                <a:ea typeface="B Nazanin"/>
+                <a:cs typeface="B Nazanin"/>
               </a:defRPr>
             </a:pPr>
             <a:r>
               <a:rPr lang="fa-IR" sz="1600" b="0">
-                <a:latin typeface="B Nazanin"/>
-                <a:ea typeface="B Nazanin"/>
-                <a:cs typeface="B Nazanin"/>
                 <a:solidFill>
                   <a:srgbClr val="AAB4C8"/>
                 </a:solidFill>
+                <a:latin typeface="B Nazanin"/>
+                <a:ea typeface="B Nazanin"/>
+                <a:cs typeface="B Nazanin"/>
               </a:rPr>
               <a:t>ورود در Open روز بعد و خروج در Open متناظر با افق.</a:t>
             </a:r>
@@ -12306,22 +12306,22 @@
           <a:p>
             <a:pPr algn="ctr" rtl="1" marL="0" indent="0">
               <a:defRPr lang="fa-IR" sz="1800" b="1">
-                <a:latin typeface="B Nazanin"/>
-                <a:ea typeface="B Nazanin"/>
-                <a:cs typeface="B Nazanin"/>
                 <a:solidFill>
                   <a:srgbClr val="E0B24A"/>
                 </a:solidFill>
+                <a:latin typeface="B Nazanin"/>
+                <a:ea typeface="B Nazanin"/>
+                <a:cs typeface="B Nazanin"/>
               </a:defRPr>
             </a:pPr>
             <a:r>
               <a:rPr lang="fa-IR" sz="1800" b="1">
-                <a:latin typeface="B Nazanin"/>
-                <a:ea typeface="B Nazanin"/>
-                <a:cs typeface="B Nazanin"/>
                 <a:solidFill>
                   <a:srgbClr val="E0B24A"/>
                 </a:solidFill>
+                <a:latin typeface="B Nazanin"/>
+                <a:ea typeface="B Nazanin"/>
+                <a:cs typeface="B Nazanin"/>
               </a:rPr>
               <a:t>هیچ بازده آینده‌ای برای حذف یا انتخاب ردیف‌های آموزش استفاده نمی‌شود.</a:t>
             </a:r>
@@ -12391,22 +12391,22 @@
           <a:p>
             <a:pPr algn="r" rtl="1" marL="0" indent="0">
               <a:defRPr lang="fa-IR" sz="2700" b="1">
-                <a:latin typeface="B Nazanin"/>
-                <a:ea typeface="B Nazanin"/>
-                <a:cs typeface="B Nazanin"/>
-                <a:solidFill>
-                  <a:srgbClr val="F4F6FB"/>
-                </a:solidFill>
+                <a:solidFill>
+                  <a:srgbClr val="F4F6FB"/>
+                </a:solidFill>
+                <a:latin typeface="B Nazanin"/>
+                <a:ea typeface="B Nazanin"/>
+                <a:cs typeface="B Nazanin"/>
               </a:defRPr>
             </a:pPr>
             <a:r>
               <a:rPr lang="fa-IR" sz="2700" b="1">
-                <a:latin typeface="B Nazanin"/>
-                <a:ea typeface="B Nazanin"/>
-                <a:cs typeface="B Nazanin"/>
-                <a:solidFill>
-                  <a:srgbClr val="F4F6FB"/>
-                </a:solidFill>
+                <a:solidFill>
+                  <a:srgbClr val="F4F6FB"/>
+                </a:solidFill>
+                <a:latin typeface="B Nazanin"/>
+                <a:ea typeface="B Nazanin"/>
+                <a:cs typeface="B Nazanin"/>
               </a:rPr>
               <a:t>۸. معماری روش پیشنهادی</a:t>
             </a:r>
@@ -12465,22 +12465,22 @@
           <a:p>
             <a:pPr algn="r" rtl="1" marL="0" indent="0">
               <a:defRPr lang="fa-IR" sz="1000" b="0">
-                <a:latin typeface="B Nazanin"/>
-                <a:ea typeface="B Nazanin"/>
-                <a:cs typeface="B Nazanin"/>
                 <a:solidFill>
                   <a:srgbClr val="AAB4C8"/>
                 </a:solidFill>
+                <a:latin typeface="B Nazanin"/>
+                <a:ea typeface="B Nazanin"/>
+                <a:cs typeface="B Nazanin"/>
               </a:defRPr>
             </a:pPr>
             <a:r>
               <a:rPr lang="fa-IR" sz="1000" b="0">
-                <a:latin typeface="B Nazanin"/>
-                <a:ea typeface="B Nazanin"/>
-                <a:cs typeface="B Nazanin"/>
                 <a:solidFill>
                   <a:srgbClr val="AAB4C8"/>
                 </a:solidFill>
+                <a:latin typeface="B Nazanin"/>
+                <a:ea typeface="B Nazanin"/>
+                <a:cs typeface="B Nazanin"/>
               </a:rPr>
               <a:t>ارائه پژوهش | اسلاید 9 | B Nazanin</a:t>
             </a:r>
@@ -12517,22 +12517,22 @@
           <a:p>
             <a:pPr algn="r" rtl="1" marL="0" indent="0">
               <a:defRPr lang="fa-IR" sz="1300" b="1">
-                <a:latin typeface="B Nazanin"/>
-                <a:ea typeface="B Nazanin"/>
-                <a:cs typeface="B Nazanin"/>
                 <a:solidFill>
                   <a:srgbClr val="AAB4C8"/>
                 </a:solidFill>
+                <a:latin typeface="B Nazanin"/>
+                <a:ea typeface="B Nazanin"/>
+                <a:cs typeface="B Nazanin"/>
               </a:defRPr>
             </a:pPr>
             <a:r>
               <a:rPr lang="fa-IR" sz="1300" b="1">
-                <a:latin typeface="B Nazanin"/>
-                <a:ea typeface="B Nazanin"/>
-                <a:cs typeface="B Nazanin"/>
                 <a:solidFill>
                   <a:srgbClr val="AAB4C8"/>
                 </a:solidFill>
+                <a:latin typeface="B Nazanin"/>
+                <a:ea typeface="B Nazanin"/>
+                <a:cs typeface="B Nazanin"/>
               </a:rPr>
               <a:t>از داده خام تا ارزیابی اقتصادی؛ هر مرحله قابل ثبت و بازبینی است.</a:t>
             </a:r>
@@ -12591,22 +12591,22 @@
           <a:p>
             <a:pPr algn="ctr" rtl="1" marL="0" indent="0">
               <a:defRPr lang="fa-IR" sz="1700" b="1">
-                <a:latin typeface="B Nazanin"/>
-                <a:ea typeface="B Nazanin"/>
-                <a:cs typeface="B Nazanin"/>
-                <a:solidFill>
-                  <a:srgbClr val="F4F6FB"/>
-                </a:solidFill>
+                <a:solidFill>
+                  <a:srgbClr val="F4F6FB"/>
+                </a:solidFill>
+                <a:latin typeface="B Nazanin"/>
+                <a:ea typeface="B Nazanin"/>
+                <a:cs typeface="B Nazanin"/>
               </a:defRPr>
             </a:pPr>
             <a:r>
               <a:rPr lang="fa-IR" sz="1700" b="1">
-                <a:latin typeface="B Nazanin"/>
-                <a:ea typeface="B Nazanin"/>
-                <a:cs typeface="B Nazanin"/>
-                <a:solidFill>
-                  <a:srgbClr val="F4F6FB"/>
-                </a:solidFill>
+                <a:solidFill>
+                  <a:srgbClr val="F4F6FB"/>
+                </a:solidFill>
+                <a:latin typeface="B Nazanin"/>
+                <a:ea typeface="B Nazanin"/>
+                <a:cs typeface="B Nazanin"/>
               </a:rPr>
               <a:t>داده و</a:t>
             </a:r>
@@ -12619,22 +12619,22 @@
           <a:p>
             <a:pPr algn="ctr" rtl="1" marL="0" indent="0">
               <a:defRPr lang="fa-IR" sz="1700" b="1">
-                <a:latin typeface="B Nazanin"/>
-                <a:ea typeface="B Nazanin"/>
-                <a:cs typeface="B Nazanin"/>
-                <a:solidFill>
-                  <a:srgbClr val="F4F6FB"/>
-                </a:solidFill>
+                <a:solidFill>
+                  <a:srgbClr val="F4F6FB"/>
+                </a:solidFill>
+                <a:latin typeface="B Nazanin"/>
+                <a:ea typeface="B Nazanin"/>
+                <a:cs typeface="B Nazanin"/>
               </a:defRPr>
             </a:pPr>
             <a:r>
               <a:rPr lang="fa-IR" sz="1700" b="1">
-                <a:latin typeface="B Nazanin"/>
-                <a:ea typeface="B Nazanin"/>
-                <a:cs typeface="B Nazanin"/>
-                <a:solidFill>
-                  <a:srgbClr val="F4F6FB"/>
-                </a:solidFill>
+                <a:solidFill>
+                  <a:srgbClr val="F4F6FB"/>
+                </a:solidFill>
+                <a:latin typeface="B Nazanin"/>
+                <a:ea typeface="B Nazanin"/>
+                <a:cs typeface="B Nazanin"/>
               </a:rPr>
               <a:t>کنترل کیفیت</a:t>
             </a:r>
@@ -12715,22 +12715,22 @@
           <a:p>
             <a:pPr algn="ctr" rtl="1" marL="0" indent="0">
               <a:defRPr lang="fa-IR" sz="1700" b="1">
-                <a:latin typeface="B Nazanin"/>
-                <a:ea typeface="B Nazanin"/>
-                <a:cs typeface="B Nazanin"/>
-                <a:solidFill>
-                  <a:srgbClr val="F4F6FB"/>
-                </a:solidFill>
+                <a:solidFill>
+                  <a:srgbClr val="F4F6FB"/>
+                </a:solidFill>
+                <a:latin typeface="B Nazanin"/>
+                <a:ea typeface="B Nazanin"/>
+                <a:cs typeface="B Nazanin"/>
               </a:defRPr>
             </a:pPr>
             <a:r>
               <a:rPr lang="fa-IR" sz="1700" b="1">
-                <a:latin typeface="B Nazanin"/>
-                <a:ea typeface="B Nazanin"/>
-                <a:cs typeface="B Nazanin"/>
-                <a:solidFill>
-                  <a:srgbClr val="F4F6FB"/>
-                </a:solidFill>
+                <a:solidFill>
+                  <a:srgbClr val="F4F6FB"/>
+                </a:solidFill>
+                <a:latin typeface="B Nazanin"/>
+                <a:ea typeface="B Nazanin"/>
+                <a:cs typeface="B Nazanin"/>
               </a:rPr>
               <a:t>ویژگی‌های</a:t>
             </a:r>
@@ -12743,22 +12743,22 @@
           <a:p>
             <a:pPr algn="ctr" rtl="1" marL="0" indent="0">
               <a:defRPr lang="fa-IR" sz="1700" b="1">
-                <a:latin typeface="B Nazanin"/>
-                <a:ea typeface="B Nazanin"/>
-                <a:cs typeface="B Nazanin"/>
-                <a:solidFill>
-                  <a:srgbClr val="F4F6FB"/>
-                </a:solidFill>
+                <a:solidFill>
+                  <a:srgbClr val="F4F6FB"/>
+                </a:solidFill>
+                <a:latin typeface="B Nazanin"/>
+                <a:ea typeface="B Nazanin"/>
+                <a:cs typeface="B Nazanin"/>
               </a:defRPr>
             </a:pPr>
             <a:r>
               <a:rPr lang="fa-IR" sz="1700" b="1">
-                <a:latin typeface="B Nazanin"/>
-                <a:ea typeface="B Nazanin"/>
-                <a:cs typeface="B Nazanin"/>
-                <a:solidFill>
-                  <a:srgbClr val="F4F6FB"/>
-                </a:solidFill>
+                <a:solidFill>
+                  <a:srgbClr val="F4F6FB"/>
+                </a:solidFill>
+                <a:latin typeface="B Nazanin"/>
+                <a:ea typeface="B Nazanin"/>
+                <a:cs typeface="B Nazanin"/>
               </a:rPr>
               <a:t>پایه + Hurst</a:t>
             </a:r>
@@ -12839,22 +12839,22 @@
           <a:p>
             <a:pPr algn="ctr" rtl="1" marL="0" indent="0">
               <a:defRPr lang="fa-IR" sz="1700" b="1">
-                <a:latin typeface="B Nazanin"/>
-                <a:ea typeface="B Nazanin"/>
-                <a:cs typeface="B Nazanin"/>
-                <a:solidFill>
-                  <a:srgbClr val="F4F6FB"/>
-                </a:solidFill>
+                <a:solidFill>
+                  <a:srgbClr val="F4F6FB"/>
+                </a:solidFill>
+                <a:latin typeface="B Nazanin"/>
+                <a:ea typeface="B Nazanin"/>
+                <a:cs typeface="B Nazanin"/>
               </a:defRPr>
             </a:pPr>
             <a:r>
               <a:rPr lang="fa-IR" sz="1700" b="1">
-                <a:latin typeface="B Nazanin"/>
-                <a:ea typeface="B Nazanin"/>
-                <a:cs typeface="B Nazanin"/>
-                <a:solidFill>
-                  <a:srgbClr val="F4F6FB"/>
-                </a:solidFill>
+                <a:solidFill>
+                  <a:srgbClr val="F4F6FB"/>
+                </a:solidFill>
+                <a:latin typeface="B Nazanin"/>
+                <a:ea typeface="B Nazanin"/>
+                <a:cs typeface="B Nazanin"/>
               </a:rPr>
               <a:t>برچسب‌های</a:t>
             </a:r>
@@ -12867,22 +12867,22 @@
           <a:p>
             <a:pPr algn="ctr" rtl="1" marL="0" indent="0">
               <a:defRPr lang="fa-IR" sz="1700" b="1">
-                <a:latin typeface="B Nazanin"/>
-                <a:ea typeface="B Nazanin"/>
-                <a:cs typeface="B Nazanin"/>
-                <a:solidFill>
-                  <a:srgbClr val="F4F6FB"/>
-                </a:solidFill>
+                <a:solidFill>
+                  <a:srgbClr val="F4F6FB"/>
+                </a:solidFill>
+                <a:latin typeface="B Nazanin"/>
+                <a:ea typeface="B Nazanin"/>
+                <a:cs typeface="B Nazanin"/>
               </a:defRPr>
             </a:pPr>
             <a:r>
               <a:rPr lang="fa-IR" sz="1700" b="1">
-                <a:latin typeface="B Nazanin"/>
-                <a:ea typeface="B Nazanin"/>
-                <a:cs typeface="B Nazanin"/>
-                <a:solidFill>
-                  <a:srgbClr val="F4F6FB"/>
-                </a:solidFill>
+                <a:solidFill>
+                  <a:srgbClr val="F4F6FB"/>
+                </a:solidFill>
+                <a:latin typeface="B Nazanin"/>
+                <a:ea typeface="B Nazanin"/>
+                <a:cs typeface="B Nazanin"/>
               </a:rPr>
               <a:t>چندافقی</a:t>
             </a:r>
@@ -12963,22 +12963,22 @@
           <a:p>
             <a:pPr algn="ctr" rtl="1" marL="0" indent="0">
               <a:defRPr lang="fa-IR" sz="1700" b="1">
-                <a:latin typeface="B Nazanin"/>
-                <a:ea typeface="B Nazanin"/>
-                <a:cs typeface="B Nazanin"/>
-                <a:solidFill>
-                  <a:srgbClr val="F4F6FB"/>
-                </a:solidFill>
+                <a:solidFill>
+                  <a:srgbClr val="F4F6FB"/>
+                </a:solidFill>
+                <a:latin typeface="B Nazanin"/>
+                <a:ea typeface="B Nazanin"/>
+                <a:cs typeface="B Nazanin"/>
               </a:defRPr>
             </a:pPr>
             <a:r>
               <a:rPr lang="fa-IR" sz="1700" b="1">
-                <a:latin typeface="B Nazanin"/>
-                <a:ea typeface="B Nazanin"/>
-                <a:cs typeface="B Nazanin"/>
-                <a:solidFill>
-                  <a:srgbClr val="F4F6FB"/>
-                </a:solidFill>
+                <a:solidFill>
+                  <a:srgbClr val="F4F6FB"/>
+                </a:solidFill>
+                <a:latin typeface="B Nazanin"/>
+                <a:ea typeface="B Nazanin"/>
+                <a:cs typeface="B Nazanin"/>
               </a:rPr>
               <a:t>مدل پایه و</a:t>
             </a:r>
@@ -12991,22 +12991,22 @@
           <a:p>
             <a:pPr algn="ctr" rtl="1" marL="0" indent="0">
               <a:defRPr lang="fa-IR" sz="1700" b="1">
-                <a:latin typeface="B Nazanin"/>
-                <a:ea typeface="B Nazanin"/>
-                <a:cs typeface="B Nazanin"/>
-                <a:solidFill>
-                  <a:srgbClr val="F4F6FB"/>
-                </a:solidFill>
+                <a:solidFill>
+                  <a:srgbClr val="F4F6FB"/>
+                </a:solidFill>
+                <a:latin typeface="B Nazanin"/>
+                <a:ea typeface="B Nazanin"/>
+                <a:cs typeface="B Nazanin"/>
               </a:defRPr>
             </a:pPr>
             <a:r>
               <a:rPr lang="fa-IR" sz="1700" b="1">
-                <a:latin typeface="B Nazanin"/>
-                <a:ea typeface="B Nazanin"/>
-                <a:cs typeface="B Nazanin"/>
-                <a:solidFill>
-                  <a:srgbClr val="F4F6FB"/>
-                </a:solidFill>
+                <a:solidFill>
+                  <a:srgbClr val="F4F6FB"/>
+                </a:solidFill>
+                <a:latin typeface="B Nazanin"/>
+                <a:ea typeface="B Nazanin"/>
+                <a:cs typeface="B Nazanin"/>
               </a:rPr>
               <a:t>احتمال OOF</a:t>
             </a:r>
@@ -13087,22 +13087,22 @@
           <a:p>
             <a:pPr algn="ctr" rtl="1" marL="0" indent="0">
               <a:defRPr lang="fa-IR" sz="1700" b="1">
-                <a:latin typeface="B Nazanin"/>
-                <a:ea typeface="B Nazanin"/>
-                <a:cs typeface="B Nazanin"/>
-                <a:solidFill>
-                  <a:srgbClr val="F4F6FB"/>
-                </a:solidFill>
+                <a:solidFill>
+                  <a:srgbClr val="F4F6FB"/>
+                </a:solidFill>
+                <a:latin typeface="B Nazanin"/>
+                <a:ea typeface="B Nazanin"/>
+                <a:cs typeface="B Nazanin"/>
               </a:defRPr>
             </a:pPr>
             <a:r>
               <a:rPr lang="fa-IR" sz="1700" b="1">
-                <a:latin typeface="B Nazanin"/>
-                <a:ea typeface="B Nazanin"/>
-                <a:cs typeface="B Nazanin"/>
-                <a:solidFill>
-                  <a:srgbClr val="F4F6FB"/>
-                </a:solidFill>
+                <a:solidFill>
+                  <a:srgbClr val="F4F6FB"/>
+                </a:solidFill>
+                <a:latin typeface="B Nazanin"/>
+                <a:ea typeface="B Nazanin"/>
+                <a:cs typeface="B Nazanin"/>
               </a:rPr>
               <a:t>فراطبقه‌بند</a:t>
             </a:r>
@@ -13115,22 +13115,22 @@
           <a:p>
             <a:pPr algn="ctr" rtl="1" marL="0" indent="0">
               <a:defRPr lang="fa-IR" sz="1700" b="1">
-                <a:latin typeface="B Nazanin"/>
-                <a:ea typeface="B Nazanin"/>
-                <a:cs typeface="B Nazanin"/>
-                <a:solidFill>
-                  <a:srgbClr val="F4F6FB"/>
-                </a:solidFill>
+                <a:solidFill>
+                  <a:srgbClr val="F4F6FB"/>
+                </a:solidFill>
+                <a:latin typeface="B Nazanin"/>
+                <a:ea typeface="B Nazanin"/>
+                <a:cs typeface="B Nazanin"/>
               </a:defRPr>
             </a:pPr>
             <a:r>
               <a:rPr lang="fa-IR" sz="1700" b="1">
-                <a:latin typeface="B Nazanin"/>
-                <a:ea typeface="B Nazanin"/>
-                <a:cs typeface="B Nazanin"/>
-                <a:solidFill>
-                  <a:srgbClr val="F4F6FB"/>
-                </a:solidFill>
+                <a:solidFill>
+                  <a:srgbClr val="F4F6FB"/>
+                </a:solidFill>
+                <a:latin typeface="B Nazanin"/>
+                <a:ea typeface="B Nazanin"/>
+                <a:cs typeface="B Nazanin"/>
               </a:rPr>
               <a:t>و کالیبراسیون</a:t>
             </a:r>
@@ -13211,22 +13211,22 @@
           <a:p>
             <a:pPr algn="ctr" rtl="1" marL="0" indent="0">
               <a:defRPr lang="fa-IR" sz="1700" b="1">
-                <a:latin typeface="B Nazanin"/>
-                <a:ea typeface="B Nazanin"/>
-                <a:cs typeface="B Nazanin"/>
-                <a:solidFill>
-                  <a:srgbClr val="F4F6FB"/>
-                </a:solidFill>
+                <a:solidFill>
+                  <a:srgbClr val="F4F6FB"/>
+                </a:solidFill>
+                <a:latin typeface="B Nazanin"/>
+                <a:ea typeface="B Nazanin"/>
+                <a:cs typeface="B Nazanin"/>
               </a:defRPr>
             </a:pPr>
             <a:r>
               <a:rPr lang="fa-IR" sz="1700" b="1">
-                <a:latin typeface="B Nazanin"/>
-                <a:ea typeface="B Nazanin"/>
-                <a:cs typeface="B Nazanin"/>
-                <a:solidFill>
-                  <a:srgbClr val="F4F6FB"/>
-                </a:solidFill>
+                <a:solidFill>
+                  <a:srgbClr val="F4F6FB"/>
+                </a:solidFill>
+                <a:latin typeface="B Nazanin"/>
+                <a:ea typeface="B Nazanin"/>
+                <a:cs typeface="B Nazanin"/>
               </a:rPr>
               <a:t>Ablation و</a:t>
             </a:r>
@@ -13239,22 +13239,22 @@
           <a:p>
             <a:pPr algn="ctr" rtl="1" marL="0" indent="0">
               <a:defRPr lang="fa-IR" sz="1700" b="1">
-                <a:latin typeface="B Nazanin"/>
-                <a:ea typeface="B Nazanin"/>
-                <a:cs typeface="B Nazanin"/>
-                <a:solidFill>
-                  <a:srgbClr val="F4F6FB"/>
-                </a:solidFill>
+                <a:solidFill>
+                  <a:srgbClr val="F4F6FB"/>
+                </a:solidFill>
+                <a:latin typeface="B Nazanin"/>
+                <a:ea typeface="B Nazanin"/>
+                <a:cs typeface="B Nazanin"/>
               </a:defRPr>
             </a:pPr>
             <a:r>
               <a:rPr lang="fa-IR" sz="1700" b="1">
-                <a:latin typeface="B Nazanin"/>
-                <a:ea typeface="B Nazanin"/>
-                <a:cs typeface="B Nazanin"/>
-                <a:solidFill>
-                  <a:srgbClr val="F4F6FB"/>
-                </a:solidFill>
+                <a:solidFill>
+                  <a:srgbClr val="F4F6FB"/>
+                </a:solidFill>
+                <a:latin typeface="B Nazanin"/>
+                <a:ea typeface="B Nazanin"/>
+                <a:cs typeface="B Nazanin"/>
               </a:rPr>
               <a:t>آزمون آماری</a:t>
             </a:r>
@@ -13335,22 +13335,22 @@
           <a:p>
             <a:pPr algn="ctr" rtl="1" marL="0" indent="0">
               <a:defRPr lang="fa-IR" sz="1700" b="1">
-                <a:latin typeface="B Nazanin"/>
-                <a:ea typeface="B Nazanin"/>
-                <a:cs typeface="B Nazanin"/>
-                <a:solidFill>
-                  <a:srgbClr val="F4F6FB"/>
-                </a:solidFill>
+                <a:solidFill>
+                  <a:srgbClr val="F4F6FB"/>
+                </a:solidFill>
+                <a:latin typeface="B Nazanin"/>
+                <a:ea typeface="B Nazanin"/>
+                <a:cs typeface="B Nazanin"/>
               </a:defRPr>
             </a:pPr>
             <a:r>
               <a:rPr lang="fa-IR" sz="1700" b="1">
-                <a:latin typeface="B Nazanin"/>
-                <a:ea typeface="B Nazanin"/>
-                <a:cs typeface="B Nazanin"/>
-                <a:solidFill>
-                  <a:srgbClr val="F4F6FB"/>
-                </a:solidFill>
+                <a:solidFill>
+                  <a:srgbClr val="F4F6FB"/>
+                </a:solidFill>
+                <a:latin typeface="B Nazanin"/>
+                <a:ea typeface="B Nazanin"/>
+                <a:cs typeface="B Nazanin"/>
               </a:rPr>
               <a:t>بازپخش</a:t>
             </a:r>
@@ -13363,22 +13363,22 @@
           <a:p>
             <a:pPr algn="ctr" rtl="1" marL="0" indent="0">
               <a:defRPr lang="fa-IR" sz="1700" b="1">
-                <a:latin typeface="B Nazanin"/>
-                <a:ea typeface="B Nazanin"/>
-                <a:cs typeface="B Nazanin"/>
-                <a:solidFill>
-                  <a:srgbClr val="F4F6FB"/>
-                </a:solidFill>
+                <a:solidFill>
+                  <a:srgbClr val="F4F6FB"/>
+                </a:solidFill>
+                <a:latin typeface="B Nazanin"/>
+                <a:ea typeface="B Nazanin"/>
+                <a:cs typeface="B Nazanin"/>
               </a:defRPr>
             </a:pPr>
             <a:r>
               <a:rPr lang="fa-IR" sz="1700" b="1">
-                <a:latin typeface="B Nazanin"/>
-                <a:ea typeface="B Nazanin"/>
-                <a:cs typeface="B Nazanin"/>
-                <a:solidFill>
-                  <a:srgbClr val="F4F6FB"/>
-                </a:solidFill>
+                <a:solidFill>
+                  <a:srgbClr val="F4F6FB"/>
+                </a:solidFill>
+                <a:latin typeface="B Nazanin"/>
+                <a:ea typeface="B Nazanin"/>
+                <a:cs typeface="B Nazanin"/>
               </a:rPr>
               <a:t>Python / MT5</a:t>
             </a:r>
@@ -13415,22 +13415,22 @@
           <a:p>
             <a:pPr algn="ctr" rtl="1" marL="0" indent="0">
               <a:defRPr lang="fa-IR" sz="1600" b="1">
-                <a:latin typeface="B Nazanin"/>
-                <a:ea typeface="B Nazanin"/>
-                <a:cs typeface="B Nazanin"/>
                 <a:solidFill>
                   <a:srgbClr val="E0B24A"/>
                 </a:solidFill>
+                <a:latin typeface="B Nazanin"/>
+                <a:ea typeface="B Nazanin"/>
+                <a:cs typeface="B Nazanin"/>
               </a:defRPr>
             </a:pPr>
             <a:r>
               <a:rPr lang="fa-IR" sz="1600" b="1">
-                <a:latin typeface="B Nazanin"/>
-                <a:ea typeface="B Nazanin"/>
-                <a:cs typeface="B Nazanin"/>
                 <a:solidFill>
                   <a:srgbClr val="E0B24A"/>
                 </a:solidFill>
+                <a:latin typeface="B Nazanin"/>
+                <a:ea typeface="B Nazanin"/>
+                <a:cs typeface="B Nazanin"/>
               </a:rPr>
               <a:t>در عنوان «Gated»، دروازه به معنای قانون سخت H&gt;0.5 نیست؛ Hurst فقط زمینه تصمیم را غنی می‌کند.</a:t>
             </a:r>
